--- a/protected-downloads/praesentation/M17.pptx
+++ b/protected-downloads/praesentation/M17.pptx
@@ -8,14 +8,14 @@
     <p:sldId id="256" r:id="rId7"/>
     <p:sldId id="257" r:id="rId8"/>
     <p:sldId id="258" r:id="rId9"/>
-    <p:sldId id="259" r:id="rId10"/>
-    <p:sldId id="260" r:id="rId11"/>
-    <p:sldId id="261" r:id="rId12"/>
-    <p:sldId id="262" r:id="rId13"/>
-    <p:sldId id="263" r:id="rId14"/>
-    <p:sldId id="264" r:id="rId15"/>
-    <p:sldId id="265" r:id="rId16"/>
-    <p:sldId id="266" r:id="rId17"/>
+    <p:sldId id="259" r:id="rId11"/>
+    <p:sldId id="260" r:id="rId12"/>
+    <p:sldId id="261" r:id="rId13"/>
+    <p:sldId id="262" r:id="rId14"/>
+    <p:sldId id="263" r:id="rId15"/>
+    <p:sldId id="264" r:id="rId16"/>
+    <p:sldId id="265" r:id="rId17"/>
+    <p:sldId id="266" r:id="rId18"/>
   </p:sldIdLst>
   <p:sldSz cx="12188952" cy="6858000" type="screen4x3"/>
   <p:notesSz cx="6858000" cy="9144000"/>
@@ -115,6 +115,916 @@
     </a:lvl9pPr>
   </p:defaultTextStyle>
 </p:presentation>
+</file>
+
+<file path=ppt/notesMasters/notesMaster1.xml><?xml version="1.0" encoding="utf-8"?>
+<p:notesMaster xmlns:a="http://schemas.openxmlformats.org/drawingml/2006/main" xmlns:p="http://schemas.openxmlformats.org/presentationml/2006/main" xmlns:r="http://schemas.openxmlformats.org/officeDocument/2006/relationships">
+  <p:cSld>
+    <p:bg>
+      <p:bgRef idx="1001">
+        <a:schemeClr val="bg1"/>
+      </p:bgRef>
+    </p:bg>
+    <p:spTree>
+      <p:nvGrpSpPr>
+        <p:cNvPr id="1" name=""/>
+        <p:cNvGrpSpPr/>
+        <p:nvPr/>
+      </p:nvGrpSpPr>
+      <p:grpSpPr>
+        <a:xfrm>
+          <a:off x="0" y="0"/>
+          <a:ext cx="0" cy="0"/>
+          <a:chOff x="0" y="0"/>
+          <a:chExt cx="0" cy="0"/>
+        </a:xfrm>
+      </p:grpSpPr>
+      <p:sp>
+        <p:nvSpPr>
+          <p:cNvPr id="2" name="Header Placeholder 1"/>
+          <p:cNvSpPr>
+            <a:spLocks noGrp="1"/>
+          </p:cNvSpPr>
+          <p:nvPr>
+            <p:ph type="hdr" sz="quarter"/>
+          </p:nvPr>
+        </p:nvSpPr>
+        <p:spPr>
+          <a:xfrm>
+            <a:off x="0" y="0"/>
+            <a:ext cx="2971800" cy="457200"/>
+          </a:xfrm>
+          <a:prstGeom prst="rect">
+            <a:avLst/>
+          </a:prstGeom>
+        </p:spPr>
+        <p:txBody>
+          <a:bodyPr vert="horz" lIns="91440" tIns="45720" rIns="91440" bIns="45720" rtlCol="0"/>
+          <a:lstStyle>
+            <a:lvl1pPr algn="l">
+              <a:defRPr sz="1200"/>
+            </a:lvl1pPr>
+          </a:lstStyle>
+          <a:p>
+            <a:endParaRPr lang="en-US"/>
+          </a:p>
+        </p:txBody>
+      </p:sp>
+      <p:sp>
+        <p:nvSpPr>
+          <p:cNvPr id="3" name="Date Placeholder 2"/>
+          <p:cNvSpPr>
+            <a:spLocks noGrp="1"/>
+          </p:cNvSpPr>
+          <p:nvPr>
+            <p:ph type="dt" idx="1"/>
+          </p:nvPr>
+        </p:nvSpPr>
+        <p:spPr>
+          <a:xfrm>
+            <a:off x="3884613" y="0"/>
+            <a:ext cx="2971800" cy="457200"/>
+          </a:xfrm>
+          <a:prstGeom prst="rect">
+            <a:avLst/>
+          </a:prstGeom>
+        </p:spPr>
+        <p:txBody>
+          <a:bodyPr vert="horz" lIns="91440" tIns="45720" rIns="91440" bIns="45720" rtlCol="0"/>
+          <a:lstStyle>
+            <a:lvl1pPr algn="r">
+              <a:defRPr sz="1200"/>
+            </a:lvl1pPr>
+          </a:lstStyle>
+          <a:p>
+            <a:fld id="{0F89C1C7-3DCD-1040-A9CF-14679D8B5DDD}" type="datetimeFigureOut">
+              <a:rPr lang="en-US" smtClean="0"/>
+              <a:t>10/17/16</a:t>
+            </a:fld>
+            <a:endParaRPr lang="en-US"/>
+          </a:p>
+        </p:txBody>
+      </p:sp>
+      <p:sp>
+        <p:nvSpPr>
+          <p:cNvPr id="4" name="Slide Image Placeholder 3"/>
+          <p:cNvSpPr>
+            <a:spLocks noGrp="1" noRot="1" noChangeAspect="1"/>
+          </p:cNvSpPr>
+          <p:nvPr>
+            <p:ph type="sldImg" idx="2"/>
+          </p:nvPr>
+        </p:nvSpPr>
+        <p:spPr>
+          <a:xfrm>
+            <a:off x="1143000" y="685800"/>
+            <a:ext cx="4572000" cy="3429000"/>
+          </a:xfrm>
+          <a:prstGeom prst="rect">
+            <a:avLst/>
+          </a:prstGeom>
+          <a:noFill/>
+          <a:ln w="12700">
+            <a:solidFill>
+              <a:prstClr val="black"/>
+            </a:solidFill>
+          </a:ln>
+        </p:spPr>
+        <p:txBody>
+          <a:bodyPr vert="horz" lIns="91440" tIns="45720" rIns="91440" bIns="45720" rtlCol="0" anchor="ctr"/>
+          <a:lstStyle/>
+          <a:p>
+            <a:endParaRPr lang="en-US"/>
+          </a:p>
+        </p:txBody>
+      </p:sp>
+      <p:sp>
+        <p:nvSpPr>
+          <p:cNvPr id="5" name="Notes Placeholder 4"/>
+          <p:cNvSpPr>
+            <a:spLocks noGrp="1"/>
+          </p:cNvSpPr>
+          <p:nvPr>
+            <p:ph type="body" sz="quarter" idx="3"/>
+          </p:nvPr>
+        </p:nvSpPr>
+        <p:spPr>
+          <a:xfrm>
+            <a:off x="685800" y="4343400"/>
+            <a:ext cx="5486400" cy="4114800"/>
+          </a:xfrm>
+          <a:prstGeom prst="rect">
+            <a:avLst/>
+          </a:prstGeom>
+        </p:spPr>
+        <p:txBody>
+          <a:bodyPr vert="horz" lIns="91440" tIns="45720" rIns="91440" bIns="45720" rtlCol="0"/>
+          <a:lstStyle/>
+          <a:p>
+            <a:pPr lvl="0"/>
+            <a:r>
+              <a:rPr lang="en-US" smtClean="0"/>
+              <a:t>Click to edit Master text styles</a:t>
+            </a:r>
+          </a:p>
+          <a:p>
+            <a:pPr lvl="1"/>
+            <a:r>
+              <a:rPr lang="en-US" smtClean="0"/>
+              <a:t>Second level</a:t>
+            </a:r>
+          </a:p>
+          <a:p>
+            <a:pPr lvl="2"/>
+            <a:r>
+              <a:rPr lang="en-US" smtClean="0"/>
+              <a:t>Third level</a:t>
+            </a:r>
+          </a:p>
+          <a:p>
+            <a:pPr lvl="3"/>
+            <a:r>
+              <a:rPr lang="en-US" smtClean="0"/>
+              <a:t>Fourth level</a:t>
+            </a:r>
+          </a:p>
+          <a:p>
+            <a:pPr lvl="4"/>
+            <a:r>
+              <a:rPr lang="en-US" smtClean="0"/>
+              <a:t>Fifth level</a:t>
+            </a:r>
+            <a:endParaRPr lang="en-US"/>
+          </a:p>
+        </p:txBody>
+      </p:sp>
+      <p:sp>
+        <p:nvSpPr>
+          <p:cNvPr id="6" name="Footer Placeholder 5"/>
+          <p:cNvSpPr>
+            <a:spLocks noGrp="1"/>
+          </p:cNvSpPr>
+          <p:nvPr>
+            <p:ph type="ftr" sz="quarter" idx="4"/>
+          </p:nvPr>
+        </p:nvSpPr>
+        <p:spPr>
+          <a:xfrm>
+            <a:off x="0" y="8685213"/>
+            <a:ext cx="2971800" cy="457200"/>
+          </a:xfrm>
+          <a:prstGeom prst="rect">
+            <a:avLst/>
+          </a:prstGeom>
+        </p:spPr>
+        <p:txBody>
+          <a:bodyPr vert="horz" lIns="91440" tIns="45720" rIns="91440" bIns="45720" rtlCol="0" anchor="b"/>
+          <a:lstStyle>
+            <a:lvl1pPr algn="l">
+              <a:defRPr sz="1200"/>
+            </a:lvl1pPr>
+          </a:lstStyle>
+          <a:p>
+            <a:endParaRPr lang="en-US"/>
+          </a:p>
+        </p:txBody>
+      </p:sp>
+      <p:sp>
+        <p:nvSpPr>
+          <p:cNvPr id="7" name="Slide Number Placeholder 6"/>
+          <p:cNvSpPr>
+            <a:spLocks noGrp="1"/>
+          </p:cNvSpPr>
+          <p:nvPr>
+            <p:ph type="sldNum" sz="quarter" idx="5"/>
+          </p:nvPr>
+        </p:nvSpPr>
+        <p:spPr>
+          <a:xfrm>
+            <a:off x="3884613" y="8685213"/>
+            <a:ext cx="2971800" cy="457200"/>
+          </a:xfrm>
+          <a:prstGeom prst="rect">
+            <a:avLst/>
+          </a:prstGeom>
+        </p:spPr>
+        <p:txBody>
+          <a:bodyPr vert="horz" lIns="91440" tIns="45720" rIns="91440" bIns="45720" rtlCol="0" anchor="b"/>
+          <a:lstStyle>
+            <a:lvl1pPr algn="r">
+              <a:defRPr sz="1200"/>
+            </a:lvl1pPr>
+          </a:lstStyle>
+          <a:p>
+            <a:fld id="{BB5E49A5-4136-284D-997B-48E1D791AD67}" type="slidenum">
+              <a:rPr lang="en-US" smtClean="0"/>
+              <a:t>‹#›</a:t>
+            </a:fld>
+            <a:endParaRPr lang="en-US"/>
+          </a:p>
+        </p:txBody>
+      </p:sp>
+    </p:spTree>
+    <p:extLst>
+      <p:ext uri="{BB962C8B-B14F-4D97-AF65-F5344CB8AC3E}">
+        <p14:creationId xmlns:p14="http://schemas.microsoft.com/office/powerpoint/2010/main" val="2623252185"/>
+      </p:ext>
+    </p:extLst>
+  </p:cSld>
+  <p:clrMap bg1="lt1" tx1="dk1" bg2="lt2" tx2="dk2" accent1="accent1" accent2="accent2" accent3="accent3" accent4="accent4" accent5="accent5" accent6="accent6" hlink="hlink" folHlink="folHlink"/>
+  <p:notesStyle>
+    <a:lvl1pPr marL="0" algn="l" defTabSz="457200" rtl="0" eaLnBrk="1" latinLnBrk="0" hangingPunct="1">
+      <a:defRPr sz="1200" kern="1200">
+        <a:solidFill>
+          <a:schemeClr val="tx1"/>
+        </a:solidFill>
+        <a:latin typeface="+mn-lt"/>
+        <a:ea typeface="+mn-ea"/>
+        <a:cs typeface="+mn-cs"/>
+      </a:defRPr>
+    </a:lvl1pPr>
+    <a:lvl2pPr marL="457200" algn="l" defTabSz="457200" rtl="0" eaLnBrk="1" latinLnBrk="0" hangingPunct="1">
+      <a:defRPr sz="1200" kern="1200">
+        <a:solidFill>
+          <a:schemeClr val="tx1"/>
+        </a:solidFill>
+        <a:latin typeface="+mn-lt"/>
+        <a:ea typeface="+mn-ea"/>
+        <a:cs typeface="+mn-cs"/>
+      </a:defRPr>
+    </a:lvl2pPr>
+    <a:lvl3pPr marL="914400" algn="l" defTabSz="457200" rtl="0" eaLnBrk="1" latinLnBrk="0" hangingPunct="1">
+      <a:defRPr sz="1200" kern="1200">
+        <a:solidFill>
+          <a:schemeClr val="tx1"/>
+        </a:solidFill>
+        <a:latin typeface="+mn-lt"/>
+        <a:ea typeface="+mn-ea"/>
+        <a:cs typeface="+mn-cs"/>
+      </a:defRPr>
+    </a:lvl3pPr>
+    <a:lvl4pPr marL="1371600" algn="l" defTabSz="457200" rtl="0" eaLnBrk="1" latinLnBrk="0" hangingPunct="1">
+      <a:defRPr sz="1200" kern="1200">
+        <a:solidFill>
+          <a:schemeClr val="tx1"/>
+        </a:solidFill>
+        <a:latin typeface="+mn-lt"/>
+        <a:ea typeface="+mn-ea"/>
+        <a:cs typeface="+mn-cs"/>
+      </a:defRPr>
+    </a:lvl4pPr>
+    <a:lvl5pPr marL="1828800" algn="l" defTabSz="457200" rtl="0" eaLnBrk="1" latinLnBrk="0" hangingPunct="1">
+      <a:defRPr sz="1200" kern="1200">
+        <a:solidFill>
+          <a:schemeClr val="tx1"/>
+        </a:solidFill>
+        <a:latin typeface="+mn-lt"/>
+        <a:ea typeface="+mn-ea"/>
+        <a:cs typeface="+mn-cs"/>
+      </a:defRPr>
+    </a:lvl5pPr>
+    <a:lvl6pPr marL="2286000" algn="l" defTabSz="457200" rtl="0" eaLnBrk="1" latinLnBrk="0" hangingPunct="1">
+      <a:defRPr sz="1200" kern="1200">
+        <a:solidFill>
+          <a:schemeClr val="tx1"/>
+        </a:solidFill>
+        <a:latin typeface="+mn-lt"/>
+        <a:ea typeface="+mn-ea"/>
+        <a:cs typeface="+mn-cs"/>
+      </a:defRPr>
+    </a:lvl6pPr>
+    <a:lvl7pPr marL="2743200" algn="l" defTabSz="457200" rtl="0" eaLnBrk="1" latinLnBrk="0" hangingPunct="1">
+      <a:defRPr sz="1200" kern="1200">
+        <a:solidFill>
+          <a:schemeClr val="tx1"/>
+        </a:solidFill>
+        <a:latin typeface="+mn-lt"/>
+        <a:ea typeface="+mn-ea"/>
+        <a:cs typeface="+mn-cs"/>
+      </a:defRPr>
+    </a:lvl7pPr>
+    <a:lvl8pPr marL="3200400" algn="l" defTabSz="457200" rtl="0" eaLnBrk="1" latinLnBrk="0" hangingPunct="1">
+      <a:defRPr sz="1200" kern="1200">
+        <a:solidFill>
+          <a:schemeClr val="tx1"/>
+        </a:solidFill>
+        <a:latin typeface="+mn-lt"/>
+        <a:ea typeface="+mn-ea"/>
+        <a:cs typeface="+mn-cs"/>
+      </a:defRPr>
+    </a:lvl8pPr>
+    <a:lvl9pPr marL="3657600" algn="l" defTabSz="457200" rtl="0" eaLnBrk="1" latinLnBrk="0" hangingPunct="1">
+      <a:defRPr sz="1200" kern="1200">
+        <a:solidFill>
+          <a:schemeClr val="tx1"/>
+        </a:solidFill>
+        <a:latin typeface="+mn-lt"/>
+        <a:ea typeface="+mn-ea"/>
+        <a:cs typeface="+mn-cs"/>
+      </a:defRPr>
+    </a:lvl9pPr>
+  </p:notesStyle>
+</p:notesMaster>
+</file>
+
+<file path=ppt/notesSlides/notesSlide1.xml><?xml version="1.0" encoding="utf-8"?>
+<p:notes xmlns:a="http://schemas.openxmlformats.org/drawingml/2006/main" xmlns:p="http://schemas.openxmlformats.org/presentationml/2006/main" xmlns:r="http://schemas.openxmlformats.org/officeDocument/2006/relationships">
+  <p:cSld>
+    <p:spTree>
+      <p:nvGrpSpPr>
+        <p:cNvPr id="1" name=""/>
+        <p:cNvGrpSpPr/>
+        <p:nvPr/>
+      </p:nvGrpSpPr>
+      <p:grpSpPr>
+        <a:xfrm>
+          <a:off x="0" y="0"/>
+          <a:ext cx="0" cy="0"/>
+          <a:chOff x="0" y="0"/>
+          <a:chExt cx="0" cy="0"/>
+        </a:xfrm>
+      </p:grpSpPr>
+      <p:sp>
+        <p:nvSpPr>
+          <p:cNvPr id="2" name="Slide Image Placeholder 1"/>
+          <p:cNvSpPr>
+            <a:spLocks noGrp="1"/>
+          </p:cNvSpPr>
+          <p:nvPr>
+            <p:ph type="sldImg" idx="2"/>
+          </p:nvPr>
+        </p:nvSpPr>
+        <p:spPr/>
+      </p:sp>
+      <p:sp>
+        <p:nvSpPr>
+          <p:cNvPr id="3" name="Notes Placeholder 2"/>
+          <p:cNvSpPr>
+            <a:spLocks noGrp="1"/>
+          </p:cNvSpPr>
+          <p:nvPr>
+            <p:ph type="body" idx="3" sz="quarter"/>
+          </p:nvPr>
+        </p:nvSpPr>
+        <p:spPr/>
+        <p:txBody>
+          <a:bodyPr/>
+          <a:lstStyle/>
+          <a:p>
+            <a:r>
+              <a:t>Siehe Trainerhandbuch (Sektion 3) für Moderationshinweise, Timing und erwartete Teilnehmerreaktionen.</a:t>
+            </a:r>
+          </a:p>
+        </p:txBody>
+      </p:sp>
+      <p:sp>
+        <p:nvSpPr>
+          <p:cNvPr id="4" name="Slide Number Placeholder 3"/>
+          <p:cNvSpPr>
+            <a:spLocks noGrp="1"/>
+          </p:cNvSpPr>
+          <p:nvPr>
+            <p:ph type="sldNum" idx="5" sz="quarter"/>
+          </p:nvPr>
+        </p:nvSpPr>
+        <p:spPr/>
+      </p:sp>
+    </p:spTree>
+  </p:cSld>
+  <p:clrMapOvr>
+    <a:masterClrMapping/>
+  </p:clrMapOvr>
+</p:notes>
+</file>
+
+<file path=ppt/notesSlides/notesSlide2.xml><?xml version="1.0" encoding="utf-8"?>
+<p:notes xmlns:a="http://schemas.openxmlformats.org/drawingml/2006/main" xmlns:p="http://schemas.openxmlformats.org/presentationml/2006/main" xmlns:r="http://schemas.openxmlformats.org/officeDocument/2006/relationships">
+  <p:cSld>
+    <p:spTree>
+      <p:nvGrpSpPr>
+        <p:cNvPr id="1" name=""/>
+        <p:cNvGrpSpPr/>
+        <p:nvPr/>
+      </p:nvGrpSpPr>
+      <p:grpSpPr>
+        <a:xfrm>
+          <a:off x="0" y="0"/>
+          <a:ext cx="0" cy="0"/>
+          <a:chOff x="0" y="0"/>
+          <a:chExt cx="0" cy="0"/>
+        </a:xfrm>
+      </p:grpSpPr>
+      <p:sp>
+        <p:nvSpPr>
+          <p:cNvPr id="2" name="Slide Image Placeholder 1"/>
+          <p:cNvSpPr>
+            <a:spLocks noGrp="1"/>
+          </p:cNvSpPr>
+          <p:nvPr>
+            <p:ph type="sldImg" idx="2"/>
+          </p:nvPr>
+        </p:nvSpPr>
+        <p:spPr/>
+      </p:sp>
+      <p:sp>
+        <p:nvSpPr>
+          <p:cNvPr id="3" name="Notes Placeholder 2"/>
+          <p:cNvSpPr>
+            <a:spLocks noGrp="1"/>
+          </p:cNvSpPr>
+          <p:nvPr>
+            <p:ph type="body" idx="3" sz="quarter"/>
+          </p:nvPr>
+        </p:nvSpPr>
+        <p:spPr/>
+        <p:txBody>
+          <a:bodyPr/>
+          <a:lstStyle/>
+          <a:p>
+            <a:r>
+              <a:t>Siehe Trainerhandbuch (Sektion 3) für Moderationshinweise, Timing und erwartete Teilnehmerreaktionen.</a:t>
+            </a:r>
+          </a:p>
+        </p:txBody>
+      </p:sp>
+      <p:sp>
+        <p:nvSpPr>
+          <p:cNvPr id="4" name="Slide Number Placeholder 3"/>
+          <p:cNvSpPr>
+            <a:spLocks noGrp="1"/>
+          </p:cNvSpPr>
+          <p:nvPr>
+            <p:ph type="sldNum" idx="5" sz="quarter"/>
+          </p:nvPr>
+        </p:nvSpPr>
+        <p:spPr/>
+      </p:sp>
+    </p:spTree>
+  </p:cSld>
+  <p:clrMapOvr>
+    <a:masterClrMapping/>
+  </p:clrMapOvr>
+</p:notes>
+</file>
+
+<file path=ppt/notesSlides/notesSlide3.xml><?xml version="1.0" encoding="utf-8"?>
+<p:notes xmlns:a="http://schemas.openxmlformats.org/drawingml/2006/main" xmlns:p="http://schemas.openxmlformats.org/presentationml/2006/main" xmlns:r="http://schemas.openxmlformats.org/officeDocument/2006/relationships">
+  <p:cSld>
+    <p:spTree>
+      <p:nvGrpSpPr>
+        <p:cNvPr id="1" name=""/>
+        <p:cNvGrpSpPr/>
+        <p:nvPr/>
+      </p:nvGrpSpPr>
+      <p:grpSpPr>
+        <a:xfrm>
+          <a:off x="0" y="0"/>
+          <a:ext cx="0" cy="0"/>
+          <a:chOff x="0" y="0"/>
+          <a:chExt cx="0" cy="0"/>
+        </a:xfrm>
+      </p:grpSpPr>
+      <p:sp>
+        <p:nvSpPr>
+          <p:cNvPr id="2" name="Slide Image Placeholder 1"/>
+          <p:cNvSpPr>
+            <a:spLocks noGrp="1"/>
+          </p:cNvSpPr>
+          <p:nvPr>
+            <p:ph type="sldImg" idx="2"/>
+          </p:nvPr>
+        </p:nvSpPr>
+        <p:spPr/>
+      </p:sp>
+      <p:sp>
+        <p:nvSpPr>
+          <p:cNvPr id="3" name="Notes Placeholder 2"/>
+          <p:cNvSpPr>
+            <a:spLocks noGrp="1"/>
+          </p:cNvSpPr>
+          <p:nvPr>
+            <p:ph type="body" idx="3" sz="quarter"/>
+          </p:nvPr>
+        </p:nvSpPr>
+        <p:spPr/>
+        <p:txBody>
+          <a:bodyPr/>
+          <a:lstStyle/>
+          <a:p>
+            <a:r>
+              <a:t>Siehe Trainerhandbuch (Sektion 3) für Moderationshinweise, Timing und erwartete Teilnehmerreaktionen.</a:t>
+            </a:r>
+          </a:p>
+        </p:txBody>
+      </p:sp>
+      <p:sp>
+        <p:nvSpPr>
+          <p:cNvPr id="4" name="Slide Number Placeholder 3"/>
+          <p:cNvSpPr>
+            <a:spLocks noGrp="1"/>
+          </p:cNvSpPr>
+          <p:nvPr>
+            <p:ph type="sldNum" idx="5" sz="quarter"/>
+          </p:nvPr>
+        </p:nvSpPr>
+        <p:spPr/>
+      </p:sp>
+    </p:spTree>
+  </p:cSld>
+  <p:clrMapOvr>
+    <a:masterClrMapping/>
+  </p:clrMapOvr>
+</p:notes>
+</file>
+
+<file path=ppt/notesSlides/notesSlide4.xml><?xml version="1.0" encoding="utf-8"?>
+<p:notes xmlns:a="http://schemas.openxmlformats.org/drawingml/2006/main" xmlns:p="http://schemas.openxmlformats.org/presentationml/2006/main" xmlns:r="http://schemas.openxmlformats.org/officeDocument/2006/relationships">
+  <p:cSld>
+    <p:spTree>
+      <p:nvGrpSpPr>
+        <p:cNvPr id="1" name=""/>
+        <p:cNvGrpSpPr/>
+        <p:nvPr/>
+      </p:nvGrpSpPr>
+      <p:grpSpPr>
+        <a:xfrm>
+          <a:off x="0" y="0"/>
+          <a:ext cx="0" cy="0"/>
+          <a:chOff x="0" y="0"/>
+          <a:chExt cx="0" cy="0"/>
+        </a:xfrm>
+      </p:grpSpPr>
+      <p:sp>
+        <p:nvSpPr>
+          <p:cNvPr id="2" name="Slide Image Placeholder 1"/>
+          <p:cNvSpPr>
+            <a:spLocks noGrp="1"/>
+          </p:cNvSpPr>
+          <p:nvPr>
+            <p:ph type="sldImg" idx="2"/>
+          </p:nvPr>
+        </p:nvSpPr>
+        <p:spPr/>
+      </p:sp>
+      <p:sp>
+        <p:nvSpPr>
+          <p:cNvPr id="3" name="Notes Placeholder 2"/>
+          <p:cNvSpPr>
+            <a:spLocks noGrp="1"/>
+          </p:cNvSpPr>
+          <p:nvPr>
+            <p:ph type="body" idx="3" sz="quarter"/>
+          </p:nvPr>
+        </p:nvSpPr>
+        <p:spPr/>
+        <p:txBody>
+          <a:bodyPr/>
+          <a:lstStyle/>
+          <a:p>
+            <a:r>
+              <a:t>Siehe Trainerhandbuch (Sektion 3) für Moderationshinweise, Timing und erwartete Teilnehmerreaktionen.</a:t>
+            </a:r>
+          </a:p>
+        </p:txBody>
+      </p:sp>
+      <p:sp>
+        <p:nvSpPr>
+          <p:cNvPr id="4" name="Slide Number Placeholder 3"/>
+          <p:cNvSpPr>
+            <a:spLocks noGrp="1"/>
+          </p:cNvSpPr>
+          <p:nvPr>
+            <p:ph type="sldNum" idx="5" sz="quarter"/>
+          </p:nvPr>
+        </p:nvSpPr>
+        <p:spPr/>
+      </p:sp>
+    </p:spTree>
+  </p:cSld>
+  <p:clrMapOvr>
+    <a:masterClrMapping/>
+  </p:clrMapOvr>
+</p:notes>
+</file>
+
+<file path=ppt/notesSlides/notesSlide5.xml><?xml version="1.0" encoding="utf-8"?>
+<p:notes xmlns:a="http://schemas.openxmlformats.org/drawingml/2006/main" xmlns:p="http://schemas.openxmlformats.org/presentationml/2006/main" xmlns:r="http://schemas.openxmlformats.org/officeDocument/2006/relationships">
+  <p:cSld>
+    <p:spTree>
+      <p:nvGrpSpPr>
+        <p:cNvPr id="1" name=""/>
+        <p:cNvGrpSpPr/>
+        <p:nvPr/>
+      </p:nvGrpSpPr>
+      <p:grpSpPr>
+        <a:xfrm>
+          <a:off x="0" y="0"/>
+          <a:ext cx="0" cy="0"/>
+          <a:chOff x="0" y="0"/>
+          <a:chExt cx="0" cy="0"/>
+        </a:xfrm>
+      </p:grpSpPr>
+      <p:sp>
+        <p:nvSpPr>
+          <p:cNvPr id="2" name="Slide Image Placeholder 1"/>
+          <p:cNvSpPr>
+            <a:spLocks noGrp="1"/>
+          </p:cNvSpPr>
+          <p:nvPr>
+            <p:ph type="sldImg" idx="2"/>
+          </p:nvPr>
+        </p:nvSpPr>
+        <p:spPr/>
+      </p:sp>
+      <p:sp>
+        <p:nvSpPr>
+          <p:cNvPr id="3" name="Notes Placeholder 2"/>
+          <p:cNvSpPr>
+            <a:spLocks noGrp="1"/>
+          </p:cNvSpPr>
+          <p:nvPr>
+            <p:ph type="body" idx="3" sz="quarter"/>
+          </p:nvPr>
+        </p:nvSpPr>
+        <p:spPr/>
+        <p:txBody>
+          <a:bodyPr/>
+          <a:lstStyle/>
+          <a:p>
+            <a:r>
+              <a:t>Siehe Trainerhandbuch (Sektion 3) für Moderationshinweise, Timing und erwartete Teilnehmerreaktionen.</a:t>
+            </a:r>
+          </a:p>
+        </p:txBody>
+      </p:sp>
+      <p:sp>
+        <p:nvSpPr>
+          <p:cNvPr id="4" name="Slide Number Placeholder 3"/>
+          <p:cNvSpPr>
+            <a:spLocks noGrp="1"/>
+          </p:cNvSpPr>
+          <p:nvPr>
+            <p:ph type="sldNum" idx="5" sz="quarter"/>
+          </p:nvPr>
+        </p:nvSpPr>
+        <p:spPr/>
+      </p:sp>
+    </p:spTree>
+  </p:cSld>
+  <p:clrMapOvr>
+    <a:masterClrMapping/>
+  </p:clrMapOvr>
+</p:notes>
+</file>
+
+<file path=ppt/notesSlides/notesSlide6.xml><?xml version="1.0" encoding="utf-8"?>
+<p:notes xmlns:a="http://schemas.openxmlformats.org/drawingml/2006/main" xmlns:p="http://schemas.openxmlformats.org/presentationml/2006/main" xmlns:r="http://schemas.openxmlformats.org/officeDocument/2006/relationships">
+  <p:cSld>
+    <p:spTree>
+      <p:nvGrpSpPr>
+        <p:cNvPr id="1" name=""/>
+        <p:cNvGrpSpPr/>
+        <p:nvPr/>
+      </p:nvGrpSpPr>
+      <p:grpSpPr>
+        <a:xfrm>
+          <a:off x="0" y="0"/>
+          <a:ext cx="0" cy="0"/>
+          <a:chOff x="0" y="0"/>
+          <a:chExt cx="0" cy="0"/>
+        </a:xfrm>
+      </p:grpSpPr>
+      <p:sp>
+        <p:nvSpPr>
+          <p:cNvPr id="2" name="Slide Image Placeholder 1"/>
+          <p:cNvSpPr>
+            <a:spLocks noGrp="1"/>
+          </p:cNvSpPr>
+          <p:nvPr>
+            <p:ph type="sldImg" idx="2"/>
+          </p:nvPr>
+        </p:nvSpPr>
+        <p:spPr/>
+      </p:sp>
+      <p:sp>
+        <p:nvSpPr>
+          <p:cNvPr id="3" name="Notes Placeholder 2"/>
+          <p:cNvSpPr>
+            <a:spLocks noGrp="1"/>
+          </p:cNvSpPr>
+          <p:nvPr>
+            <p:ph type="body" idx="3" sz="quarter"/>
+          </p:nvPr>
+        </p:nvSpPr>
+        <p:spPr/>
+        <p:txBody>
+          <a:bodyPr/>
+          <a:lstStyle/>
+          <a:p>
+            <a:r>
+              <a:t>Siehe Trainerhandbuch (Sektion 3) für Moderationshinweise, Timing und erwartete Teilnehmerreaktionen.</a:t>
+            </a:r>
+          </a:p>
+        </p:txBody>
+      </p:sp>
+      <p:sp>
+        <p:nvSpPr>
+          <p:cNvPr id="4" name="Slide Number Placeholder 3"/>
+          <p:cNvSpPr>
+            <a:spLocks noGrp="1"/>
+          </p:cNvSpPr>
+          <p:nvPr>
+            <p:ph type="sldNum" idx="5" sz="quarter"/>
+          </p:nvPr>
+        </p:nvSpPr>
+        <p:spPr/>
+      </p:sp>
+    </p:spTree>
+  </p:cSld>
+  <p:clrMapOvr>
+    <a:masterClrMapping/>
+  </p:clrMapOvr>
+</p:notes>
+</file>
+
+<file path=ppt/notesSlides/notesSlide7.xml><?xml version="1.0" encoding="utf-8"?>
+<p:notes xmlns:a="http://schemas.openxmlformats.org/drawingml/2006/main" xmlns:p="http://schemas.openxmlformats.org/presentationml/2006/main" xmlns:r="http://schemas.openxmlformats.org/officeDocument/2006/relationships">
+  <p:cSld>
+    <p:spTree>
+      <p:nvGrpSpPr>
+        <p:cNvPr id="1" name=""/>
+        <p:cNvGrpSpPr/>
+        <p:nvPr/>
+      </p:nvGrpSpPr>
+      <p:grpSpPr>
+        <a:xfrm>
+          <a:off x="0" y="0"/>
+          <a:ext cx="0" cy="0"/>
+          <a:chOff x="0" y="0"/>
+          <a:chExt cx="0" cy="0"/>
+        </a:xfrm>
+      </p:grpSpPr>
+      <p:sp>
+        <p:nvSpPr>
+          <p:cNvPr id="2" name="Slide Image Placeholder 1"/>
+          <p:cNvSpPr>
+            <a:spLocks noGrp="1"/>
+          </p:cNvSpPr>
+          <p:nvPr>
+            <p:ph type="sldImg" idx="2"/>
+          </p:nvPr>
+        </p:nvSpPr>
+        <p:spPr/>
+      </p:sp>
+      <p:sp>
+        <p:nvSpPr>
+          <p:cNvPr id="3" name="Notes Placeholder 2"/>
+          <p:cNvSpPr>
+            <a:spLocks noGrp="1"/>
+          </p:cNvSpPr>
+          <p:nvPr>
+            <p:ph type="body" idx="3" sz="quarter"/>
+          </p:nvPr>
+        </p:nvSpPr>
+        <p:spPr/>
+        <p:txBody>
+          <a:bodyPr/>
+          <a:lstStyle/>
+          <a:p>
+            <a:r>
+              <a:t>Siehe Trainerhandbuch (Sektion 3) für Moderationshinweise, Timing und erwartete Teilnehmerreaktionen.</a:t>
+            </a:r>
+          </a:p>
+        </p:txBody>
+      </p:sp>
+      <p:sp>
+        <p:nvSpPr>
+          <p:cNvPr id="4" name="Slide Number Placeholder 3"/>
+          <p:cNvSpPr>
+            <a:spLocks noGrp="1"/>
+          </p:cNvSpPr>
+          <p:nvPr>
+            <p:ph type="sldNum" idx="5" sz="quarter"/>
+          </p:nvPr>
+        </p:nvSpPr>
+        <p:spPr/>
+      </p:sp>
+    </p:spTree>
+  </p:cSld>
+  <p:clrMapOvr>
+    <a:masterClrMapping/>
+  </p:clrMapOvr>
+</p:notes>
+</file>
+
+<file path=ppt/notesSlides/notesSlide8.xml><?xml version="1.0" encoding="utf-8"?>
+<p:notes xmlns:a="http://schemas.openxmlformats.org/drawingml/2006/main" xmlns:p="http://schemas.openxmlformats.org/presentationml/2006/main" xmlns:r="http://schemas.openxmlformats.org/officeDocument/2006/relationships">
+  <p:cSld>
+    <p:spTree>
+      <p:nvGrpSpPr>
+        <p:cNvPr id="1" name=""/>
+        <p:cNvGrpSpPr/>
+        <p:nvPr/>
+      </p:nvGrpSpPr>
+      <p:grpSpPr>
+        <a:xfrm>
+          <a:off x="0" y="0"/>
+          <a:ext cx="0" cy="0"/>
+          <a:chOff x="0" y="0"/>
+          <a:chExt cx="0" cy="0"/>
+        </a:xfrm>
+      </p:grpSpPr>
+      <p:sp>
+        <p:nvSpPr>
+          <p:cNvPr id="2" name="Slide Image Placeholder 1"/>
+          <p:cNvSpPr>
+            <a:spLocks noGrp="1"/>
+          </p:cNvSpPr>
+          <p:nvPr>
+            <p:ph type="sldImg" idx="2"/>
+          </p:nvPr>
+        </p:nvSpPr>
+        <p:spPr/>
+      </p:sp>
+      <p:sp>
+        <p:nvSpPr>
+          <p:cNvPr id="3" name="Notes Placeholder 2"/>
+          <p:cNvSpPr>
+            <a:spLocks noGrp="1"/>
+          </p:cNvSpPr>
+          <p:nvPr>
+            <p:ph type="body" idx="3" sz="quarter"/>
+          </p:nvPr>
+        </p:nvSpPr>
+        <p:spPr/>
+        <p:txBody>
+          <a:bodyPr/>
+          <a:lstStyle/>
+          <a:p>
+            <a:r>
+              <a:t>Siehe Trainerhandbuch (Sektion 3) für Moderationshinweise, Timing und erwartete Teilnehmerreaktionen.</a:t>
+            </a:r>
+          </a:p>
+        </p:txBody>
+      </p:sp>
+      <p:sp>
+        <p:nvSpPr>
+          <p:cNvPr id="4" name="Slide Number Placeholder 3"/>
+          <p:cNvSpPr>
+            <a:spLocks noGrp="1"/>
+          </p:cNvSpPr>
+          <p:nvPr>
+            <p:ph type="sldNum" idx="5" sz="quarter"/>
+          </p:nvPr>
+        </p:nvSpPr>
+        <p:spPr/>
+      </p:sp>
+    </p:spTree>
+  </p:cSld>
+  <p:clrMapOvr>
+    <a:masterClrMapping/>
+  </p:clrMapOvr>
+</p:notes>
 </file>
 
 <file path=ppt/slideLayouts/slideLayout1.xml><?xml version="1.0" encoding="utf-8"?>
@@ -3984,44 +4894,6 @@
               </a:spcAft>
             </a:pPr>
             <a:r>
-              <a:rPr sz="1300">
-                <a:solidFill>
-                  <a:srgbClr val="3D5466"/>
-                </a:solidFill>
-                <a:latin typeface="Arial"/>
-              </a:rPr>
-              <a:t>▸  ___________________________________________________________________________</a:t>
-            </a:r>
-          </a:p>
-          <a:p>
-            <a:pPr>
-              <a:spcBef>
-                <a:spcPts val="400"/>
-              </a:spcBef>
-              <a:spcAft>
-                <a:spcPts val="200"/>
-              </a:spcAft>
-            </a:pPr>
-            <a:r>
-              <a:rPr sz="1300">
-                <a:solidFill>
-                  <a:srgbClr val="3D5466"/>
-                </a:solidFill>
-                <a:latin typeface="Arial"/>
-              </a:rPr>
-              <a:t>▸  ___________________________________________________________________________</a:t>
-            </a:r>
-          </a:p>
-          <a:p>
-            <a:pPr>
-              <a:spcBef>
-                <a:spcPts val="400"/>
-              </a:spcBef>
-              <a:spcAft>
-                <a:spcPts val="200"/>
-              </a:spcAft>
-            </a:pPr>
-            <a:r>
               <a:rPr sz="1200">
                 <a:solidFill>
                   <a:srgbClr val="3D5466"/>
@@ -4029,25 +4901,6 @@
                 <a:latin typeface="Arial"/>
               </a:rPr>
               <a:t>agree-Funktion, die ich morgen früh ausprobiere:</a:t>
-            </a:r>
-          </a:p>
-          <a:p>
-            <a:pPr>
-              <a:spcBef>
-                <a:spcPts val="400"/>
-              </a:spcBef>
-              <a:spcAft>
-                <a:spcPts val="200"/>
-              </a:spcAft>
-            </a:pPr>
-            <a:r>
-              <a:rPr sz="1200">
-                <a:solidFill>
-                  <a:srgbClr val="3D5466"/>
-                </a:solidFill>
-                <a:latin typeface="Arial"/>
-              </a:rPr>
-              <a:t>___________________________________________________________________________</a:t>
             </a:r>
           </a:p>
         </p:txBody>
@@ -4411,25 +5264,6 @@
             <a:spAutoFit/>
           </a:bodyPr>
           <a:lstStyle/>
-          <a:p>
-            <a:pPr>
-              <a:spcBef>
-                <a:spcPts val="400"/>
-              </a:spcBef>
-              <a:spcAft>
-                <a:spcPts val="200"/>
-              </a:spcAft>
-            </a:pPr>
-            <a:r>
-              <a:rPr sz="1200">
-                <a:solidFill>
-                  <a:srgbClr val="3D5466"/>
-                </a:solidFill>
-                <a:latin typeface="Arial"/>
-              </a:rPr>
-              <a:t>Aktueller Zeitaufwand Jahresgespräch gesamt: ________ Minuten</a:t>
-            </a:r>
-          </a:p>
           <a:p>
             <a:pPr>
               <a:spcBef>
@@ -8206,4 +9040,324 @@
   </a:objectDefaults>
   <a:extraClrSchemeLst/>
 </a:theme>
+</file>
+
+<file path=ppt/theme/theme2.xml><?xml version="1.0" encoding="utf-8"?>
+<a:theme xmlns:a="http://schemas.openxmlformats.org/drawingml/2006/main" name="Office Theme">
+  <a:themeElements>
+    <a:clrScheme name="Office">
+      <a:dk1>
+        <a:sysClr val="windowText" lastClr="000000"/>
+      </a:dk1>
+      <a:lt1>
+        <a:sysClr val="window" lastClr="FFFFFF"/>
+      </a:lt1>
+      <a:dk2>
+        <a:srgbClr val="1F497D"/>
+      </a:dk2>
+      <a:lt2>
+        <a:srgbClr val="EEECE1"/>
+      </a:lt2>
+      <a:accent1>
+        <a:srgbClr val="4F81BD"/>
+      </a:accent1>
+      <a:accent2>
+        <a:srgbClr val="C0504D"/>
+      </a:accent2>
+      <a:accent3>
+        <a:srgbClr val="9BBB59"/>
+      </a:accent3>
+      <a:accent4>
+        <a:srgbClr val="8064A2"/>
+      </a:accent4>
+      <a:accent5>
+        <a:srgbClr val="4BACC6"/>
+      </a:accent5>
+      <a:accent6>
+        <a:srgbClr val="F79646"/>
+      </a:accent6>
+      <a:hlink>
+        <a:srgbClr val="0000FF"/>
+      </a:hlink>
+      <a:folHlink>
+        <a:srgbClr val="800080"/>
+      </a:folHlink>
+    </a:clrScheme>
+    <a:fontScheme name="Office">
+      <a:majorFont>
+        <a:latin typeface="Calibri"/>
+        <a:ea typeface=""/>
+        <a:cs typeface=""/>
+        <a:font script="Jpan" typeface="ＭＳ Ｐゴシック"/>
+        <a:font script="Hang" typeface="맑은 고딕"/>
+        <a:font script="Hans" typeface="宋体"/>
+        <a:font script="Hant" typeface="新細明體"/>
+        <a:font script="Arab" typeface="Times New Roman"/>
+        <a:font script="Hebr" typeface="Times New Roman"/>
+        <a:font script="Thai" typeface="Angsana New"/>
+        <a:font script="Ethi" typeface="Nyala"/>
+        <a:font script="Beng" typeface="Vrinda"/>
+        <a:font script="Gujr" typeface="Shruti"/>
+        <a:font script="Khmr" typeface="MoolBoran"/>
+        <a:font script="Knda" typeface="Tunga"/>
+        <a:font script="Guru" typeface="Raavi"/>
+        <a:font script="Cans" typeface="Euphemia"/>
+        <a:font script="Cher" typeface="Plantagenet Cherokee"/>
+        <a:font script="Yiii" typeface="Microsoft Yi Baiti"/>
+        <a:font script="Tibt" typeface="Microsoft Himalaya"/>
+        <a:font script="Thaa" typeface="MV Boli"/>
+        <a:font script="Deva" typeface="Mangal"/>
+        <a:font script="Telu" typeface="Gautami"/>
+        <a:font script="Taml" typeface="Latha"/>
+        <a:font script="Syrc" typeface="Estrangelo Edessa"/>
+        <a:font script="Orya" typeface="Kalinga"/>
+        <a:font script="Mlym" typeface="Kartika"/>
+        <a:font script="Laoo" typeface="DokChampa"/>
+        <a:font script="Sinh" typeface="Iskoola Pota"/>
+        <a:font script="Mong" typeface="Mongolian Baiti"/>
+        <a:font script="Viet" typeface="Times New Roman"/>
+        <a:font script="Uigh" typeface="Microsoft Uighur"/>
+        <a:font script="Geor" typeface="Sylfaen"/>
+      </a:majorFont>
+      <a:minorFont>
+        <a:latin typeface="Calibri"/>
+        <a:ea typeface=""/>
+        <a:cs typeface=""/>
+        <a:font script="Jpan" typeface="ＭＳ Ｐゴシック"/>
+        <a:font script="Hang" typeface="맑은 고딕"/>
+        <a:font script="Hans" typeface="宋体"/>
+        <a:font script="Hant" typeface="新細明體"/>
+        <a:font script="Arab" typeface="Arial"/>
+        <a:font script="Hebr" typeface="Arial"/>
+        <a:font script="Thai" typeface="Cordia New"/>
+        <a:font script="Ethi" typeface="Nyala"/>
+        <a:font script="Beng" typeface="Vrinda"/>
+        <a:font script="Gujr" typeface="Shruti"/>
+        <a:font script="Khmr" typeface="DaunPenh"/>
+        <a:font script="Knda" typeface="Tunga"/>
+        <a:font script="Guru" typeface="Raavi"/>
+        <a:font script="Cans" typeface="Euphemia"/>
+        <a:font script="Cher" typeface="Plantagenet Cherokee"/>
+        <a:font script="Yiii" typeface="Microsoft Yi Baiti"/>
+        <a:font script="Tibt" typeface="Microsoft Himalaya"/>
+        <a:font script="Thaa" typeface="MV Boli"/>
+        <a:font script="Deva" typeface="Mangal"/>
+        <a:font script="Telu" typeface="Gautami"/>
+        <a:font script="Taml" typeface="Latha"/>
+        <a:font script="Syrc" typeface="Estrangelo Edessa"/>
+        <a:font script="Orya" typeface="Kalinga"/>
+        <a:font script="Mlym" typeface="Kartika"/>
+        <a:font script="Laoo" typeface="DokChampa"/>
+        <a:font script="Sinh" typeface="Iskoola Pota"/>
+        <a:font script="Mong" typeface="Mongolian Baiti"/>
+        <a:font script="Viet" typeface="Arial"/>
+        <a:font script="Uigh" typeface="Microsoft Uighur"/>
+        <a:font script="Geor" typeface="Sylfaen"/>
+      </a:minorFont>
+    </a:fontScheme>
+    <a:fmtScheme name="Office">
+      <a:fillStyleLst>
+        <a:solidFill>
+          <a:schemeClr val="phClr"/>
+        </a:solidFill>
+        <a:gradFill rotWithShape="1">
+          <a:gsLst>
+            <a:gs pos="0">
+              <a:schemeClr val="phClr">
+                <a:tint val="50000"/>
+                <a:satMod val="300000"/>
+              </a:schemeClr>
+            </a:gs>
+            <a:gs pos="35000">
+              <a:schemeClr val="phClr">
+                <a:tint val="37000"/>
+                <a:satMod val="300000"/>
+              </a:schemeClr>
+            </a:gs>
+            <a:gs pos="100000">
+              <a:schemeClr val="phClr">
+                <a:tint val="15000"/>
+                <a:satMod val="350000"/>
+              </a:schemeClr>
+            </a:gs>
+          </a:gsLst>
+          <a:lin ang="16200000" scaled="1"/>
+        </a:gradFill>
+        <a:gradFill rotWithShape="1">
+          <a:gsLst>
+            <a:gs pos="0">
+              <a:schemeClr val="phClr">
+                <a:tint val="100000"/>
+                <a:shade val="100000"/>
+                <a:satMod val="130000"/>
+              </a:schemeClr>
+            </a:gs>
+            <a:gs pos="100000">
+              <a:schemeClr val="phClr">
+                <a:tint val="50000"/>
+                <a:shade val="100000"/>
+                <a:satMod val="350000"/>
+              </a:schemeClr>
+            </a:gs>
+          </a:gsLst>
+          <a:lin ang="16200000" scaled="0"/>
+        </a:gradFill>
+      </a:fillStyleLst>
+      <a:lnStyleLst>
+        <a:ln w="9525" cap="flat" cmpd="sng" algn="ctr">
+          <a:solidFill>
+            <a:schemeClr val="phClr">
+              <a:shade val="95000"/>
+              <a:satMod val="105000"/>
+            </a:schemeClr>
+          </a:solidFill>
+          <a:prstDash val="solid"/>
+        </a:ln>
+        <a:ln w="25400" cap="flat" cmpd="sng" algn="ctr">
+          <a:solidFill>
+            <a:schemeClr val="phClr"/>
+          </a:solidFill>
+          <a:prstDash val="solid"/>
+        </a:ln>
+        <a:ln w="38100" cap="flat" cmpd="sng" algn="ctr">
+          <a:solidFill>
+            <a:schemeClr val="phClr"/>
+          </a:solidFill>
+          <a:prstDash val="solid"/>
+        </a:ln>
+      </a:lnStyleLst>
+      <a:effectStyleLst>
+        <a:effectStyle>
+          <a:effectLst>
+            <a:outerShdw blurRad="40000" dist="20000" dir="5400000" rotWithShape="0">
+              <a:srgbClr val="000000">
+                <a:alpha val="38000"/>
+              </a:srgbClr>
+            </a:outerShdw>
+          </a:effectLst>
+        </a:effectStyle>
+        <a:effectStyle>
+          <a:effectLst>
+            <a:outerShdw blurRad="40000" dist="23000" dir="5400000" rotWithShape="0">
+              <a:srgbClr val="000000">
+                <a:alpha val="35000"/>
+              </a:srgbClr>
+            </a:outerShdw>
+          </a:effectLst>
+        </a:effectStyle>
+        <a:effectStyle>
+          <a:effectLst>
+            <a:outerShdw blurRad="40000" dist="23000" dir="5400000" rotWithShape="0">
+              <a:srgbClr val="000000">
+                <a:alpha val="35000"/>
+              </a:srgbClr>
+            </a:outerShdw>
+          </a:effectLst>
+          <a:scene3d>
+            <a:camera prst="orthographicFront">
+              <a:rot lat="0" lon="0" rev="0"/>
+            </a:camera>
+            <a:lightRig rig="threePt" dir="t">
+              <a:rot lat="0" lon="0" rev="1200000"/>
+            </a:lightRig>
+          </a:scene3d>
+          <a:sp3d>
+            <a:bevelT w="63500" h="25400"/>
+          </a:sp3d>
+        </a:effectStyle>
+      </a:effectStyleLst>
+      <a:bgFillStyleLst>
+        <a:solidFill>
+          <a:schemeClr val="phClr"/>
+        </a:solidFill>
+        <a:gradFill rotWithShape="1">
+          <a:gsLst>
+            <a:gs pos="0">
+              <a:schemeClr val="phClr">
+                <a:tint val="40000"/>
+                <a:satMod val="350000"/>
+              </a:schemeClr>
+            </a:gs>
+            <a:gs pos="40000">
+              <a:schemeClr val="phClr">
+                <a:tint val="45000"/>
+                <a:shade val="99000"/>
+                <a:satMod val="350000"/>
+              </a:schemeClr>
+            </a:gs>
+            <a:gs pos="100000">
+              <a:schemeClr val="phClr">
+                <a:shade val="20000"/>
+                <a:satMod val="255000"/>
+              </a:schemeClr>
+            </a:gs>
+          </a:gsLst>
+          <a:path path="circle">
+            <a:fillToRect l="50000" t="-80000" r="50000" b="180000"/>
+          </a:path>
+        </a:gradFill>
+        <a:gradFill rotWithShape="1">
+          <a:gsLst>
+            <a:gs pos="0">
+              <a:schemeClr val="phClr">
+                <a:tint val="80000"/>
+                <a:satMod val="300000"/>
+              </a:schemeClr>
+            </a:gs>
+            <a:gs pos="100000">
+              <a:schemeClr val="phClr">
+                <a:shade val="30000"/>
+                <a:satMod val="200000"/>
+              </a:schemeClr>
+            </a:gs>
+          </a:gsLst>
+          <a:path path="circle">
+            <a:fillToRect l="50000" t="50000" r="50000" b="50000"/>
+          </a:path>
+        </a:gradFill>
+      </a:bgFillStyleLst>
+    </a:fmtScheme>
+  </a:themeElements>
+  <a:objectDefaults>
+    <a:spDef>
+      <a:spPr/>
+      <a:bodyPr/>
+      <a:lstStyle/>
+      <a:style>
+        <a:lnRef idx="1">
+          <a:schemeClr val="accent1"/>
+        </a:lnRef>
+        <a:fillRef idx="3">
+          <a:schemeClr val="accent1"/>
+        </a:fillRef>
+        <a:effectRef idx="2">
+          <a:schemeClr val="accent1"/>
+        </a:effectRef>
+        <a:fontRef idx="minor">
+          <a:schemeClr val="lt1"/>
+        </a:fontRef>
+      </a:style>
+    </a:spDef>
+    <a:lnDef>
+      <a:spPr/>
+      <a:bodyPr/>
+      <a:lstStyle/>
+      <a:style>
+        <a:lnRef idx="2">
+          <a:schemeClr val="accent1"/>
+        </a:lnRef>
+        <a:fillRef idx="0">
+          <a:schemeClr val="accent1"/>
+        </a:fillRef>
+        <a:effectRef idx="1">
+          <a:schemeClr val="accent1"/>
+        </a:effectRef>
+        <a:fontRef idx="minor">
+          <a:schemeClr val="tx1"/>
+        </a:fontRef>
+      </a:style>
+    </a:lnDef>
+  </a:objectDefaults>
+  <a:extraClrSchemeLst/>
+</a:theme>
 </file>
--- a/protected-downloads/praesentation/M17.pptx
+++ b/protected-downloads/praesentation/M17.pptx
@@ -5245,49 +5245,7 @@
       </p:sp>
       <p:sp>
         <p:nvSpPr>
-          <p:cNvPr id="8" name="TextBox 7"/>
-          <p:cNvSpPr txBox="1"/>
-          <p:nvPr/>
-        </p:nvSpPr>
-        <p:spPr>
-          <a:xfrm>
-            <a:off x="685800" y="1417320"/>
-            <a:ext cx="10817352" cy="5029200"/>
-          </a:xfrm>
-          <a:prstGeom prst="rect">
-            <a:avLst/>
-          </a:prstGeom>
-          <a:noFill/>
-        </p:spPr>
-        <p:txBody>
-          <a:bodyPr wrap="square">
-            <a:spAutoFit/>
-          </a:bodyPr>
-          <a:lstStyle/>
-          <a:p>
-            <a:pPr>
-              <a:spcBef>
-                <a:spcPts val="400"/>
-              </a:spcBef>
-              <a:spcAft>
-                <a:spcPts val="200"/>
-              </a:spcAft>
-            </a:pPr>
-            <a:r>
-              <a:rPr sz="1200">
-                <a:solidFill>
-                  <a:srgbClr val="3D5466"/>
-                </a:solidFill>
-                <a:latin typeface="Arial"/>
-              </a:rPr>
-              <a:t># 5. PRAXISTRANSFER</a:t>
-            </a:r>
-          </a:p>
-        </p:txBody>
-      </p:sp>
-      <p:sp>
-        <p:nvSpPr>
-          <p:cNvPr id="9" name="Rectangle 8"/>
+          <p:cNvPr id="8" name="Rectangle 7"/>
           <p:cNvSpPr/>
           <p:nvPr/>
         </p:nvSpPr>
@@ -5330,7 +5288,7 @@
       </p:sp>
       <p:sp>
         <p:nvSpPr>
-          <p:cNvPr id="10" name="TextBox 9"/>
+          <p:cNvPr id="9" name="TextBox 8"/>
           <p:cNvSpPr txBox="1"/>
           <p:nvPr/>
         </p:nvSpPr>

--- a/protected-downloads/praesentation/M17.pptx
+++ b/protected-downloads/praesentation/M17.pptx
@@ -8,7 +8,7 @@
     <p:sldId id="256" r:id="rId7"/>
     <p:sldId id="257" r:id="rId8"/>
     <p:sldId id="258" r:id="rId9"/>
-    <p:sldId id="259" r:id="rId11"/>
+    <p:sldId id="259" r:id="rId10"/>
     <p:sldId id="260" r:id="rId12"/>
     <p:sldId id="261" r:id="rId13"/>
     <p:sldId id="262" r:id="rId14"/>
@@ -16,6 +16,7 @@
     <p:sldId id="264" r:id="rId16"/>
     <p:sldId id="265" r:id="rId17"/>
     <p:sldId id="266" r:id="rId18"/>
+    <p:sldId id="267" r:id="rId19"/>
   </p:sldIdLst>
   <p:sldSz cx="12188952" cy="6858000" type="screen4x3"/>
   <p:notesSz cx="6858000" cy="9144000"/>
@@ -4820,7 +4821,7 @@
                 </a:solidFill>
                 <a:latin typeface="Source Serif 4"/>
               </a:rPr>
-              <a:t>Arbeitsblatt A: Mein agree-Selbstcheck</a:t>
+              <a:t>Dokumentationsstandards</a:t>
             </a:r>
           </a:p>
         </p:txBody>
@@ -4856,13 +4857,13 @@
               </a:spcAft>
             </a:pPr>
             <a:r>
-              <a:rPr sz="1200">
+              <a:rPr sz="1300">
                 <a:solidFill>
                   <a:srgbClr val="3D5466"/>
                 </a:solidFill>
                 <a:latin typeface="Arial"/>
               </a:rPr>
-              <a:t>Bewerten Sie Ihren aktuellen Umgang mit agree ehrlich (1 = nutze ich kaum / 5 = nutze ich routiniert):</a:t>
+              <a:t>▸  Datum, Teilnehmer, Gesprächsanlass</a:t>
             </a:r>
           </a:p>
           <a:p>
@@ -4875,13 +4876,13 @@
               </a:spcAft>
             </a:pPr>
             <a:r>
-              <a:rPr sz="1200">
+              <a:rPr sz="1300">
                 <a:solidFill>
                   <a:srgbClr val="3D5466"/>
                 </a:solidFill>
                 <a:latin typeface="Arial"/>
               </a:rPr>
-              <a:t>Meine zwei größten Zeitfresser im aktuellen Workflow:</a:t>
+              <a:t>▸  Besprochene Bedarfsdimensionen mit Ergebnis (Bedarf vorhanden / kein Bedarf / offen)</a:t>
             </a:r>
           </a:p>
           <a:p>
@@ -4894,13 +4895,184 @@
               </a:spcAft>
             </a:pPr>
             <a:r>
-              <a:rPr sz="1200">
+              <a:rPr sz="1300">
                 <a:solidFill>
                   <a:srgbClr val="3D5466"/>
                 </a:solidFill>
                 <a:latin typeface="Arial"/>
               </a:rPr>
-              <a:t>agree-Funktion, die ich morgen früh ausprobiere:</a:t>
+              <a:t>▸  Vereinbarte Maßnahmen mit Termin</a:t>
+            </a:r>
+          </a:p>
+          <a:p>
+            <a:pPr>
+              <a:spcBef>
+                <a:spcPts val="400"/>
+              </a:spcBef>
+              <a:spcAft>
+                <a:spcPts val="200"/>
+              </a:spcAft>
+            </a:pPr>
+            <a:r>
+              <a:rPr sz="1300">
+                <a:solidFill>
+                  <a:srgbClr val="3D5466"/>
+                </a:solidFill>
+                <a:latin typeface="Arial"/>
+              </a:rPr>
+              <a:t>▸  Folgeaktivitäten angelegt</a:t>
+            </a:r>
+          </a:p>
+          <a:p>
+            <a:pPr>
+              <a:spcBef>
+                <a:spcPts val="400"/>
+              </a:spcBef>
+              <a:spcAft>
+                <a:spcPts val="200"/>
+              </a:spcAft>
+            </a:pPr>
+            <a:r>
+              <a:rPr sz="1200">
+                <a:solidFill>
+                  <a:srgbClr val="3D5466"/>
+                </a:solidFill>
+                <a:latin typeface="Arial"/>
+              </a:rPr>
+              <a:t>## 4.4 Reporting-Cockpits: Was wann wozu?</a:t>
+            </a:r>
+          </a:p>
+          <a:p>
+            <a:pPr>
+              <a:spcBef>
+                <a:spcPts val="400"/>
+              </a:spcBef>
+              <a:spcAft>
+                <a:spcPts val="200"/>
+              </a:spcAft>
+            </a:pPr>
+            <a:r>
+              <a:rPr sz="1200">
+                <a:solidFill>
+                  <a:srgbClr val="3D5466"/>
+                </a:solidFill>
+                <a:latin typeface="Arial"/>
+              </a:rPr>
+              <a:t>Empfehlung – Die 15-Minuten-Morgenroutine:</a:t>
+            </a:r>
+          </a:p>
+          <a:p>
+            <a:pPr>
+              <a:spcBef>
+                <a:spcPts val="400"/>
+              </a:spcBef>
+              <a:spcAft>
+                <a:spcPts val="200"/>
+              </a:spcAft>
+            </a:pPr>
+            <a:r>
+              <a:rPr sz="1300">
+                <a:solidFill>
+                  <a:srgbClr val="3D5466"/>
+                </a:solidFill>
+                <a:latin typeface="Arial"/>
+              </a:rPr>
+              <a:t>▸  Aktivitätenübersicht: Welche Aufgaben sind heute fällig? (3 Min.)</a:t>
+            </a:r>
+          </a:p>
+          <a:p>
+            <a:pPr>
+              <a:spcBef>
+                <a:spcPts val="400"/>
+              </a:spcBef>
+              <a:spcAft>
+                <a:spcPts val="200"/>
+              </a:spcAft>
+            </a:pPr>
+            <a:r>
+              <a:rPr sz="1300">
+                <a:solidFill>
+                  <a:srgbClr val="3D5466"/>
+                </a:solidFill>
+                <a:latin typeface="Arial"/>
+              </a:rPr>
+              <a:t>▸  Frühwarnliste: Neue Hinweise? (5 Min.)</a:t>
+            </a:r>
+          </a:p>
+          <a:p>
+            <a:pPr>
+              <a:spcBef>
+                <a:spcPts val="400"/>
+              </a:spcBef>
+              <a:spcAft>
+                <a:spcPts val="200"/>
+              </a:spcAft>
+            </a:pPr>
+            <a:r>
+              <a:rPr sz="1300">
+                <a:solidFill>
+                  <a:srgbClr val="3D5466"/>
+                </a:solidFill>
+                <a:latin typeface="Arial"/>
+              </a:rPr>
+              <a:t>▸  Prolongationsübersicht: Fälligkeiten in den nächsten 30 Tagen? (3 Min.)</a:t>
+            </a:r>
+          </a:p>
+          <a:p>
+            <a:pPr>
+              <a:spcBef>
+                <a:spcPts val="400"/>
+              </a:spcBef>
+              <a:spcAft>
+                <a:spcPts val="200"/>
+              </a:spcAft>
+            </a:pPr>
+            <a:r>
+              <a:rPr sz="1300">
+                <a:solidFill>
+                  <a:srgbClr val="3D5466"/>
+                </a:solidFill>
+                <a:latin typeface="Arial"/>
+              </a:rPr>
+              <a:t>▸  E-Mail an Verbundpartner zu offenen Übergaben? (4 Min.)</a:t>
+            </a:r>
+          </a:p>
+          <a:p>
+            <a:pPr>
+              <a:spcBef>
+                <a:spcPts val="400"/>
+              </a:spcBef>
+              <a:spcAft>
+                <a:spcPts val="200"/>
+              </a:spcAft>
+            </a:pPr>
+            <a:r>
+              <a:rPr sz="1200">
+                <a:solidFill>
+                  <a:srgbClr val="3D5466"/>
+                </a:solidFill>
+                <a:latin typeface="Arial"/>
+              </a:rPr>
+              <a:t>Diese Routine hält den Bestand im Griff – ohne aufwendige Recherche.</a:t>
+            </a:r>
+          </a:p>
+          <a:p>
+            <a:pPr>
+              <a:spcBef>
+                <a:spcPts val="400"/>
+              </a:spcBef>
+              <a:spcAft>
+                <a:spcPts val="200"/>
+              </a:spcAft>
+            </a:pPr>
+            <a:r>
+              <a:rPr sz="1200">
+                <a:solidFill>
+                  <a:srgbClr val="3D5466"/>
+                </a:solidFill>
+                <a:latin typeface="Arial"/>
+              </a:rPr>
+              <a:t>## 4.5 VR-NetWorld und Verbundpartner-Systeme</a:t>
             </a:r>
           </a:p>
         </p:txBody>
@@ -5238,6 +5410,424 @@
                 </a:solidFill>
                 <a:latin typeface="Source Serif 4"/>
               </a:rPr>
+              <a:t>Arbeitsblatt A: Mein agree-Selbstcheck</a:t>
+            </a:r>
+          </a:p>
+        </p:txBody>
+      </p:sp>
+      <p:sp>
+        <p:nvSpPr>
+          <p:cNvPr id="8" name="TextBox 7"/>
+          <p:cNvSpPr txBox="1"/>
+          <p:nvPr/>
+        </p:nvSpPr>
+        <p:spPr>
+          <a:xfrm>
+            <a:off x="685800" y="1417320"/>
+            <a:ext cx="10817352" cy="5029200"/>
+          </a:xfrm>
+          <a:prstGeom prst="rect">
+            <a:avLst/>
+          </a:prstGeom>
+          <a:noFill/>
+        </p:spPr>
+        <p:txBody>
+          <a:bodyPr wrap="square">
+            <a:spAutoFit/>
+          </a:bodyPr>
+          <a:lstStyle/>
+          <a:p>
+            <a:pPr>
+              <a:spcBef>
+                <a:spcPts val="400"/>
+              </a:spcBef>
+              <a:spcAft>
+                <a:spcPts val="200"/>
+              </a:spcAft>
+            </a:pPr>
+            <a:r>
+              <a:rPr sz="1200">
+                <a:solidFill>
+                  <a:srgbClr val="3D5466"/>
+                </a:solidFill>
+                <a:latin typeface="Arial"/>
+              </a:rPr>
+              <a:t>Bewerten Sie Ihren aktuellen Umgang mit agree ehrlich (1 = nutze ich kaum / 5 = nutze ich routiniert):</a:t>
+            </a:r>
+          </a:p>
+          <a:p>
+            <a:pPr>
+              <a:spcBef>
+                <a:spcPts val="400"/>
+              </a:spcBef>
+              <a:spcAft>
+                <a:spcPts val="200"/>
+              </a:spcAft>
+            </a:pPr>
+            <a:r>
+              <a:rPr sz="1200">
+                <a:solidFill>
+                  <a:srgbClr val="3D5466"/>
+                </a:solidFill>
+                <a:latin typeface="Arial"/>
+              </a:rPr>
+              <a:t>Meine zwei größten Zeitfresser im aktuellen Workflow:</a:t>
+            </a:r>
+          </a:p>
+          <a:p>
+            <a:pPr>
+              <a:spcBef>
+                <a:spcPts val="400"/>
+              </a:spcBef>
+              <a:spcAft>
+                <a:spcPts val="200"/>
+              </a:spcAft>
+            </a:pPr>
+            <a:r>
+              <a:rPr sz="1200">
+                <a:solidFill>
+                  <a:srgbClr val="3D5466"/>
+                </a:solidFill>
+                <a:latin typeface="Arial"/>
+              </a:rPr>
+              <a:t>agree-Funktion, die ich morgen früh ausprobiere:</a:t>
+            </a:r>
+          </a:p>
+        </p:txBody>
+      </p:sp>
+      <p:sp>
+        <p:nvSpPr>
+          <p:cNvPr id="9" name="Rectangle 8"/>
+          <p:cNvSpPr/>
+          <p:nvPr/>
+        </p:nvSpPr>
+        <p:spPr>
+          <a:xfrm>
+            <a:off x="0" y="6510528"/>
+            <a:ext cx="12188952" cy="347472"/>
+          </a:xfrm>
+          <a:prstGeom prst="rect">
+            <a:avLst/>
+          </a:prstGeom>
+          <a:solidFill>
+            <a:srgbClr val="0A1937"/>
+          </a:solidFill>
+          <a:ln>
+            <a:noFill/>
+          </a:ln>
+        </p:spPr>
+        <p:style>
+          <a:lnRef idx="1">
+            <a:schemeClr val="accent1"/>
+          </a:lnRef>
+          <a:fillRef idx="3">
+            <a:schemeClr val="accent1"/>
+          </a:fillRef>
+          <a:effectRef idx="2">
+            <a:schemeClr val="accent1"/>
+          </a:effectRef>
+          <a:fontRef idx="minor">
+            <a:schemeClr val="lt1"/>
+          </a:fontRef>
+        </p:style>
+        <p:txBody>
+          <a:bodyPr rtlCol="0" anchor="ctr"/>
+          <a:lstStyle/>
+          <a:p>
+            <a:pPr algn="ctr"/>
+          </a:p>
+        </p:txBody>
+      </p:sp>
+      <p:sp>
+        <p:nvSpPr>
+          <p:cNvPr id="10" name="TextBox 9"/>
+          <p:cNvSpPr txBox="1"/>
+          <p:nvPr/>
+        </p:nvSpPr>
+        <p:spPr>
+          <a:xfrm>
+            <a:off x="685800" y="6583680"/>
+            <a:ext cx="6490411" cy="256032"/>
+          </a:xfrm>
+          <a:prstGeom prst="rect">
+            <a:avLst/>
+          </a:prstGeom>
+          <a:noFill/>
+        </p:spPr>
+        <p:txBody>
+          <a:bodyPr wrap="none">
+            <a:spAutoFit/>
+          </a:bodyPr>
+          <a:lstStyle/>
+          <a:p>
+            <a:pPr algn="l"/>
+            <a:r>
+              <a:rPr sz="700">
+                <a:solidFill>
+                  <a:srgbClr val="A0B4D2"/>
+                </a:solidFill>
+                <a:latin typeface="JetBrains Mono"/>
+              </a:rPr>
+              <a:t>Benedikt Zoller Coaching  ·  FKB Campus  ·  M17</a:t>
+            </a:r>
+          </a:p>
+        </p:txBody>
+      </p:sp>
+    </p:spTree>
+  </p:cSld>
+  <p:clrMapOvr>
+    <a:masterClrMapping/>
+  </p:clrMapOvr>
+</p:sld>
+</file>
+
+<file path=ppt/slides/slide12.xml><?xml version="1.0" encoding="utf-8"?>
+<p:sld xmlns:a="http://schemas.openxmlformats.org/drawingml/2006/main" xmlns:p="http://schemas.openxmlformats.org/presentationml/2006/main" xmlns:r="http://schemas.openxmlformats.org/officeDocument/2006/relationships">
+  <p:cSld>
+    <p:spTree>
+      <p:nvGrpSpPr>
+        <p:cNvPr id="1" name=""/>
+        <p:cNvGrpSpPr/>
+        <p:nvPr/>
+      </p:nvGrpSpPr>
+      <p:grpSpPr/>
+      <p:sp>
+        <p:nvSpPr>
+          <p:cNvPr id="2" name="Rectangle 1"/>
+          <p:cNvSpPr/>
+          <p:nvPr/>
+        </p:nvSpPr>
+        <p:spPr>
+          <a:xfrm>
+            <a:off x="0" y="0"/>
+            <a:ext cx="12188952" cy="6858000"/>
+          </a:xfrm>
+          <a:prstGeom prst="rect">
+            <a:avLst/>
+          </a:prstGeom>
+          <a:solidFill>
+            <a:srgbClr val="EDEDF3"/>
+          </a:solidFill>
+          <a:ln>
+            <a:noFill/>
+          </a:ln>
+        </p:spPr>
+        <p:style>
+          <a:lnRef idx="1">
+            <a:schemeClr val="accent1"/>
+          </a:lnRef>
+          <a:fillRef idx="3">
+            <a:schemeClr val="accent1"/>
+          </a:fillRef>
+          <a:effectRef idx="2">
+            <a:schemeClr val="accent1"/>
+          </a:effectRef>
+          <a:fontRef idx="minor">
+            <a:schemeClr val="lt1"/>
+          </a:fontRef>
+        </p:style>
+        <p:txBody>
+          <a:bodyPr rtlCol="0" anchor="ctr"/>
+          <a:lstStyle/>
+          <a:p>
+            <a:pPr algn="ctr"/>
+          </a:p>
+        </p:txBody>
+      </p:sp>
+      <p:sp>
+        <p:nvSpPr>
+          <p:cNvPr id="3" name="Rectangle 2"/>
+          <p:cNvSpPr/>
+          <p:nvPr/>
+        </p:nvSpPr>
+        <p:spPr>
+          <a:xfrm>
+            <a:off x="0" y="0"/>
+            <a:ext cx="12188952" cy="50292"/>
+          </a:xfrm>
+          <a:prstGeom prst="rect">
+            <a:avLst/>
+          </a:prstGeom>
+          <a:solidFill>
+            <a:srgbClr val="1F2C56"/>
+          </a:solidFill>
+          <a:ln>
+            <a:noFill/>
+          </a:ln>
+        </p:spPr>
+        <p:style>
+          <a:lnRef idx="1">
+            <a:schemeClr val="accent1"/>
+          </a:lnRef>
+          <a:fillRef idx="3">
+            <a:schemeClr val="accent1"/>
+          </a:fillRef>
+          <a:effectRef idx="2">
+            <a:schemeClr val="accent1"/>
+          </a:effectRef>
+          <a:fontRef idx="minor">
+            <a:schemeClr val="lt1"/>
+          </a:fontRef>
+        </p:style>
+        <p:txBody>
+          <a:bodyPr rtlCol="0" anchor="ctr"/>
+          <a:lstStyle/>
+          <a:p>
+            <a:pPr algn="ctr"/>
+          </a:p>
+        </p:txBody>
+      </p:sp>
+      <p:sp>
+        <p:nvSpPr>
+          <p:cNvPr id="4" name="TextBox 3"/>
+          <p:cNvSpPr txBox="1"/>
+          <p:nvPr/>
+        </p:nvSpPr>
+        <p:spPr>
+          <a:xfrm>
+            <a:off x="685800" y="109728"/>
+            <a:ext cx="10817352" cy="228600"/>
+          </a:xfrm>
+          <a:prstGeom prst="rect">
+            <a:avLst/>
+          </a:prstGeom>
+          <a:noFill/>
+        </p:spPr>
+        <p:txBody>
+          <a:bodyPr wrap="none">
+            <a:spAutoFit/>
+          </a:bodyPr>
+          <a:lstStyle/>
+          <a:p>
+            <a:pPr algn="l"/>
+            <a:r>
+              <a:rPr sz="750">
+                <a:solidFill>
+                  <a:srgbClr val="78808C"/>
+                </a:solidFill>
+                <a:latin typeface="JetBrains Mono"/>
+              </a:rPr>
+              <a:t>M17  ·  INHALT</a:t>
+            </a:r>
+          </a:p>
+        </p:txBody>
+      </p:sp>
+      <p:sp>
+        <p:nvSpPr>
+          <p:cNvPr id="5" name="Rectangle 4"/>
+          <p:cNvSpPr/>
+          <p:nvPr/>
+        </p:nvSpPr>
+        <p:spPr>
+          <a:xfrm>
+            <a:off x="0" y="1234440"/>
+            <a:ext cx="12188952" cy="12700"/>
+          </a:xfrm>
+          <a:prstGeom prst="rect">
+            <a:avLst/>
+          </a:prstGeom>
+          <a:solidFill>
+            <a:srgbClr val="D8DFE4"/>
+          </a:solidFill>
+          <a:ln>
+            <a:noFill/>
+          </a:ln>
+        </p:spPr>
+        <p:style>
+          <a:lnRef idx="1">
+            <a:schemeClr val="accent1"/>
+          </a:lnRef>
+          <a:fillRef idx="3">
+            <a:schemeClr val="accent1"/>
+          </a:fillRef>
+          <a:effectRef idx="2">
+            <a:schemeClr val="accent1"/>
+          </a:effectRef>
+          <a:fontRef idx="minor">
+            <a:schemeClr val="lt1"/>
+          </a:fontRef>
+        </p:style>
+        <p:txBody>
+          <a:bodyPr rtlCol="0" anchor="ctr"/>
+          <a:lstStyle/>
+          <a:p>
+            <a:pPr algn="ctr"/>
+          </a:p>
+        </p:txBody>
+      </p:sp>
+      <p:sp>
+        <p:nvSpPr>
+          <p:cNvPr id="6" name="Rectangle 5"/>
+          <p:cNvSpPr/>
+          <p:nvPr/>
+        </p:nvSpPr>
+        <p:spPr>
+          <a:xfrm>
+            <a:off x="685800" y="502920"/>
+            <a:ext cx="36576" cy="658368"/>
+          </a:xfrm>
+          <a:prstGeom prst="rect">
+            <a:avLst/>
+          </a:prstGeom>
+          <a:solidFill>
+            <a:srgbClr val="D9C089"/>
+          </a:solidFill>
+          <a:ln>
+            <a:noFill/>
+          </a:ln>
+        </p:spPr>
+        <p:style>
+          <a:lnRef idx="1">
+            <a:schemeClr val="accent1"/>
+          </a:lnRef>
+          <a:fillRef idx="3">
+            <a:schemeClr val="accent1"/>
+          </a:fillRef>
+          <a:effectRef idx="2">
+            <a:schemeClr val="accent1"/>
+          </a:effectRef>
+          <a:fontRef idx="minor">
+            <a:schemeClr val="lt1"/>
+          </a:fontRef>
+        </p:style>
+        <p:txBody>
+          <a:bodyPr rtlCol="0" anchor="ctr"/>
+          <a:lstStyle/>
+          <a:p>
+            <a:pPr algn="ctr"/>
+          </a:p>
+        </p:txBody>
+      </p:sp>
+      <p:sp>
+        <p:nvSpPr>
+          <p:cNvPr id="7" name="TextBox 6"/>
+          <p:cNvSpPr txBox="1"/>
+          <p:nvPr/>
+        </p:nvSpPr>
+        <p:spPr>
+          <a:xfrm>
+            <a:off x="813816" y="502920"/>
+            <a:ext cx="10634472" cy="685800"/>
+          </a:xfrm>
+          <a:prstGeom prst="rect">
+            <a:avLst/>
+          </a:prstGeom>
+          <a:noFill/>
+        </p:spPr>
+        <p:txBody>
+          <a:bodyPr wrap="square">
+            <a:spAutoFit/>
+          </a:bodyPr>
+          <a:lstStyle/>
+          <a:p>
+            <a:pPr algn="l"/>
+            <a:r>
+              <a:rPr sz="2400" b="1" i="0">
+                <a:solidFill>
+                  <a:srgbClr val="1F2C56"/>
+                </a:solidFill>
+                <a:latin typeface="Source Serif 4"/>
+              </a:rPr>
               <a:t>Arbeitsblatt B: Workflow-Optimierungsplan</a:t>
             </a:r>
           </a:p>
@@ -5455,7 +6045,7 @@
                 </a:solidFill>
                 <a:latin typeface="JetBrains Mono"/>
               </a:rPr>
-              <a:t>LERNZIELE  ·  M17</a:t>
+              <a:t>ÜBERBLICK  ·  M17</a:t>
             </a:r>
           </a:p>
         </p:txBody>
@@ -5533,7 +6123,7 @@
                 </a:solidFill>
                 <a:latin typeface="Source Serif 4"/>
               </a:rPr>
-              <a:t>Was Sie heute mitnehmen</a:t>
+              <a:t>Worum geht es heute</a:t>
             </a:r>
           </a:p>
         </p:txBody>
@@ -5546,8 +6136,8 @@
         </p:nvSpPr>
         <p:spPr>
           <a:xfrm>
-            <a:off x="685800" y="1371600"/>
-            <a:ext cx="10817352" cy="5120640"/>
+            <a:off x="685800" y="1737360"/>
+            <a:ext cx="9720072" cy="4206240"/>
           </a:xfrm>
           <a:prstGeom prst="rect">
             <a:avLst/>
@@ -5561,97 +6151,50 @@
           <a:lstStyle/>
           <a:p>
             <a:pPr>
-              <a:spcBef>
-                <a:spcPts val="800"/>
-              </a:spcBef>
               <a:spcAft>
-                <a:spcPts val="200"/>
+                <a:spcPts val="1200"/>
               </a:spcAft>
             </a:pPr>
             <a:r>
-              <a:rPr sz="1400">
+              <a:rPr sz="1700">
                 <a:solidFill>
                   <a:srgbClr val="3D5466"/>
                 </a:solidFill>
                 <a:latin typeface="Arial"/>
               </a:rPr>
-              <a:t>▸  Die fünf zentralen Funktionsbereiche von agree für Firmenkundenberater beschreiben und typische Aufgaben zuordnen</a:t>
+              <a:t>Die Werkzeuge sind da – aber Systembrüche und Umwege kosten täglich Zeit.</a:t>
             </a:r>
           </a:p>
           <a:p>
             <a:pPr>
-              <a:spcBef>
-                <a:spcPts val="800"/>
-              </a:spcBef>
               <a:spcAft>
-                <a:spcPts val="200"/>
+                <a:spcPts val="1200"/>
               </a:spcAft>
             </a:pPr>
             <a:r>
-              <a:rPr sz="1400">
+              <a:rPr sz="1700">
                 <a:solidFill>
                   <a:srgbClr val="3D5466"/>
                 </a:solidFill>
                 <a:latin typeface="Arial"/>
               </a:rPr>
-              <a:t>▸  Die digitale Gesprächsvorbereitung für ein Jahresgespräch vollständig in agree durchführen</a:t>
+              <a:t>In diesem Hands-on-Training arbeiten Sie die agree-Kernbereiche für das Firmenkundengeschäft effizient durch.</a:t>
             </a:r>
           </a:p>
           <a:p>
             <a:pPr>
-              <a:spcBef>
-                <a:spcPts val="800"/>
-              </a:spcBef>
               <a:spcAft>
-                <a:spcPts val="200"/>
+                <a:spcPts val="1200"/>
               </a:spcAft>
             </a:pPr>
             <a:r>
-              <a:rPr sz="1400">
+              <a:rPr sz="1700">
                 <a:solidFill>
                   <a:srgbClr val="3D5466"/>
                 </a:solidFill>
                 <a:latin typeface="Arial"/>
               </a:rPr>
-              <a:t>▸  Den UnternehmerDialog als strukturierten Gesprächsleitfaden nutzen und Bedarfe sowie Folgeaktivitäten unmittelbar dokumentieren</a:t>
-            </a:r>
-          </a:p>
-          <a:p>
-            <a:pPr>
-              <a:spcBef>
-                <a:spcPts val="800"/>
-              </a:spcBef>
-              <a:spcAft>
-                <a:spcPts val="200"/>
-              </a:spcAft>
-            </a:pPr>
-            <a:r>
-              <a:rPr sz="1400">
-                <a:solidFill>
-                  <a:srgbClr val="3D5466"/>
-                </a:solidFill>
-                <a:latin typeface="Arial"/>
-              </a:rPr>
-              <a:t>▸  Einen NMZ-Bestandsbericht und einen Frühwarnbericht aus agree erzeugen und die wichtigsten Kennzahlen interpretieren</a:t>
-            </a:r>
-          </a:p>
-          <a:p>
-            <a:pPr>
-              <a:spcBef>
-                <a:spcPts val="800"/>
-              </a:spcBef>
-              <a:spcAft>
-                <a:spcPts val="200"/>
-              </a:spcAft>
-            </a:pPr>
-            <a:r>
-              <a:rPr sz="1400">
-                <a:solidFill>
-                  <a:srgbClr val="3D5466"/>
-                </a:solidFill>
-                <a:latin typeface="Arial"/>
-              </a:rPr>
-              <a:t>▸  Den eigenen agree-Workflow analysieren und mindestens zwei Zeitfresser mit konkreten agree-Systemfunktionen identifizieren</a:t>
+              <a:t>Danach dokumentieren Sie Gespräche, Analysen und Wiedervorlagen direkt und vollständig im System.</a:t>
             </a:r>
           </a:p>
         </p:txBody>
@@ -5868,7 +6411,7 @@
                 </a:solidFill>
                 <a:latin typeface="JetBrains Mono"/>
               </a:rPr>
-              <a:t>M17  ·  INHALT</a:t>
+              <a:t>LERNZIELE  ·  M17</a:t>
             </a:r>
           </a:p>
         </p:txBody>
@@ -5918,57 +6461,14 @@
       </p:sp>
       <p:sp>
         <p:nvSpPr>
-          <p:cNvPr id="6" name="Rectangle 5"/>
-          <p:cNvSpPr/>
+          <p:cNvPr id="6" name="TextBox 5"/>
+          <p:cNvSpPr txBox="1"/>
           <p:nvPr/>
         </p:nvSpPr>
         <p:spPr>
           <a:xfrm>
             <a:off x="685800" y="502920"/>
-            <a:ext cx="36576" cy="658368"/>
-          </a:xfrm>
-          <a:prstGeom prst="rect">
-            <a:avLst/>
-          </a:prstGeom>
-          <a:solidFill>
-            <a:srgbClr val="D9C089"/>
-          </a:solidFill>
-          <a:ln>
-            <a:noFill/>
-          </a:ln>
-        </p:spPr>
-        <p:style>
-          <a:lnRef idx="1">
-            <a:schemeClr val="accent1"/>
-          </a:lnRef>
-          <a:fillRef idx="3">
-            <a:schemeClr val="accent1"/>
-          </a:fillRef>
-          <a:effectRef idx="2">
-            <a:schemeClr val="accent1"/>
-          </a:effectRef>
-          <a:fontRef idx="minor">
-            <a:schemeClr val="lt1"/>
-          </a:fontRef>
-        </p:style>
-        <p:txBody>
-          <a:bodyPr rtlCol="0" anchor="ctr"/>
-          <a:lstStyle/>
-          <a:p>
-            <a:pPr algn="ctr"/>
-          </a:p>
-        </p:txBody>
-      </p:sp>
-      <p:sp>
-        <p:nvSpPr>
-          <p:cNvPr id="7" name="TextBox 6"/>
-          <p:cNvSpPr txBox="1"/>
-          <p:nvPr/>
-        </p:nvSpPr>
-        <p:spPr>
-          <a:xfrm>
-            <a:off x="813816" y="502920"/>
-            <a:ext cx="10634472" cy="685800"/>
+            <a:ext cx="10817352" cy="658368"/>
           </a:xfrm>
           <a:prstGeom prst="rect">
             <a:avLst/>
@@ -5983,27 +6483,27 @@
           <a:p>
             <a:pPr algn="l"/>
             <a:r>
-              <a:rPr sz="2400" b="1" i="0">
+              <a:rPr sz="2600" b="1" i="0">
                 <a:solidFill>
                   <a:srgbClr val="1F2C56"/>
                 </a:solidFill>
                 <a:latin typeface="Source Serif 4"/>
               </a:rPr>
-              <a:t>Die häufigsten agree-Fehler im Firmenkundenalltag</a:t>
-            </a:r>
-          </a:p>
-        </p:txBody>
-      </p:sp>
-      <p:sp>
-        <p:nvSpPr>
-          <p:cNvPr id="8" name="TextBox 7"/>
+              <a:t>Was Sie heute mitnehmen</a:t>
+            </a:r>
+          </a:p>
+        </p:txBody>
+      </p:sp>
+      <p:sp>
+        <p:nvSpPr>
+          <p:cNvPr id="7" name="TextBox 6"/>
           <p:cNvSpPr txBox="1"/>
           <p:nvPr/>
         </p:nvSpPr>
         <p:spPr>
           <a:xfrm>
-            <a:off x="685800" y="1417320"/>
-            <a:ext cx="10817352" cy="5029200"/>
+            <a:off x="685800" y="1371600"/>
+            <a:ext cx="10817352" cy="5120640"/>
           </a:xfrm>
           <a:prstGeom prst="rect">
             <a:avLst/>
@@ -6018,46 +6518,103 @@
           <a:p>
             <a:pPr>
               <a:spcBef>
-                <a:spcPts val="400"/>
+                <a:spcPts val="800"/>
               </a:spcBef>
               <a:spcAft>
                 <a:spcPts val="200"/>
               </a:spcAft>
             </a:pPr>
             <a:r>
-              <a:rPr sz="1200">
+              <a:rPr sz="1400">
                 <a:solidFill>
                   <a:srgbClr val="3D5466"/>
                 </a:solidFill>
                 <a:latin typeface="Arial"/>
               </a:rPr>
-              <a:t>## 4.2 Effizienter Gesprächsworkflow: Vor – Während – Nach</a:t>
+              <a:t>▸  Die fünf zentralen Funktionsbereiche von agree für Firmenkundenberater beschreiben und typische Aufgaben zuordnen</a:t>
             </a:r>
           </a:p>
           <a:p>
             <a:pPr>
               <a:spcBef>
-                <a:spcPts val="400"/>
+                <a:spcPts val="800"/>
               </a:spcBef>
               <a:spcAft>
                 <a:spcPts val="200"/>
               </a:spcAft>
             </a:pPr>
             <a:r>
-              <a:rPr sz="1200">
+              <a:rPr sz="1400">
                 <a:solidFill>
                   <a:srgbClr val="3D5466"/>
                 </a:solidFill>
                 <a:latin typeface="Arial"/>
               </a:rPr>
-              <a:t>Der größte Effizienzgewinn entsteht nicht aus einzelnen Funktionen, sondern aus einem konsistenten Workflow, der agree konsequent in alle drei Gesprächsphasen einbindet.</a:t>
-            </a:r>
-          </a:p>
-        </p:txBody>
-      </p:sp>
-      <p:sp>
-        <p:nvSpPr>
-          <p:cNvPr id="9" name="Rectangle 8"/>
+              <a:t>▸  Die digitale Gesprächsvorbereitung für ein Jahresgespräch vollständig in agree durchführen</a:t>
+            </a:r>
+          </a:p>
+          <a:p>
+            <a:pPr>
+              <a:spcBef>
+                <a:spcPts val="800"/>
+              </a:spcBef>
+              <a:spcAft>
+                <a:spcPts val="200"/>
+              </a:spcAft>
+            </a:pPr>
+            <a:r>
+              <a:rPr sz="1400">
+                <a:solidFill>
+                  <a:srgbClr val="3D5466"/>
+                </a:solidFill>
+                <a:latin typeface="Arial"/>
+              </a:rPr>
+              <a:t>▸  Den UnternehmerDialog als strukturierten Gesprächsleitfaden nutzen und Bedarfe sowie Folgeaktivitäten unmittelbar dokumentieren</a:t>
+            </a:r>
+          </a:p>
+          <a:p>
+            <a:pPr>
+              <a:spcBef>
+                <a:spcPts val="800"/>
+              </a:spcBef>
+              <a:spcAft>
+                <a:spcPts val="200"/>
+              </a:spcAft>
+            </a:pPr>
+            <a:r>
+              <a:rPr sz="1400">
+                <a:solidFill>
+                  <a:srgbClr val="3D5466"/>
+                </a:solidFill>
+                <a:latin typeface="Arial"/>
+              </a:rPr>
+              <a:t>▸  Einen NMZ-Bestandsbericht und einen Frühwarnbericht aus agree erzeugen und die wichtigsten Kennzahlen interpretieren</a:t>
+            </a:r>
+          </a:p>
+          <a:p>
+            <a:pPr>
+              <a:spcBef>
+                <a:spcPts val="800"/>
+              </a:spcBef>
+              <a:spcAft>
+                <a:spcPts val="200"/>
+              </a:spcAft>
+            </a:pPr>
+            <a:r>
+              <a:rPr sz="1400">
+                <a:solidFill>
+                  <a:srgbClr val="3D5466"/>
+                </a:solidFill>
+                <a:latin typeface="Arial"/>
+              </a:rPr>
+              <a:t>▸  Den eigenen agree-Workflow analysieren und mindestens zwei Zeitfresser mit konkreten agree-Systemfunktionen identifizieren</a:t>
+            </a:r>
+          </a:p>
+        </p:txBody>
+      </p:sp>
+      <p:sp>
+        <p:nvSpPr>
+          <p:cNvPr id="8" name="Rectangle 7"/>
           <p:cNvSpPr/>
           <p:nvPr/>
         </p:nvSpPr>
@@ -6100,7 +6657,7 @@
       </p:sp>
       <p:sp>
         <p:nvSpPr>
-          <p:cNvPr id="10" name="TextBox 9"/>
+          <p:cNvPr id="9" name="TextBox 8"/>
           <p:cNvSpPr txBox="1"/>
           <p:nvPr/>
         </p:nvSpPr>
@@ -6166,7 +6723,7 @@
             <a:avLst/>
           </a:prstGeom>
           <a:solidFill>
-            <a:srgbClr val="FFFFFF"/>
+            <a:srgbClr val="EDEDF3"/>
           </a:solidFill>
           <a:ln>
             <a:noFill/>
@@ -6267,43 +6824,51 @@
                 </a:solidFill>
                 <a:latin typeface="JetBrains Mono"/>
               </a:rPr>
-              <a:t>M17  ·  SCHAUBILD</a:t>
-            </a:r>
-          </a:p>
-        </p:txBody>
-      </p:sp>
-      <p:sp>
-        <p:nvSpPr>
-          <p:cNvPr id="5" name="TextBox 4"/>
-          <p:cNvSpPr txBox="1"/>
-          <p:nvPr/>
-        </p:nvSpPr>
-        <p:spPr>
-          <a:xfrm>
-            <a:off x="685800" y="502920"/>
-            <a:ext cx="10817352" cy="594360"/>
-          </a:xfrm>
-          <a:prstGeom prst="rect">
-            <a:avLst/>
-          </a:prstGeom>
-          <a:noFill/>
-        </p:spPr>
-        <p:txBody>
-          <a:bodyPr wrap="square">
-            <a:spAutoFit/>
-          </a:bodyPr>
-          <a:lstStyle/>
-          <a:p>
-            <a:pPr algn="l"/>
-            <a:r>
-              <a:rPr sz="2000" b="1" i="0">
-                <a:solidFill>
-                  <a:srgbClr val="1F2C56"/>
-                </a:solidFill>
-                <a:latin typeface="Source Serif 4"/>
-              </a:rPr>
-              <a:t>agree21 Kernbereiche für Firmenkundenberater</a:t>
-            </a:r>
+              <a:t>M17  ·  INHALT</a:t>
+            </a:r>
+          </a:p>
+        </p:txBody>
+      </p:sp>
+      <p:sp>
+        <p:nvSpPr>
+          <p:cNvPr id="5" name="Rectangle 4"/>
+          <p:cNvSpPr/>
+          <p:nvPr/>
+        </p:nvSpPr>
+        <p:spPr>
+          <a:xfrm>
+            <a:off x="0" y="1234440"/>
+            <a:ext cx="12188952" cy="12700"/>
+          </a:xfrm>
+          <a:prstGeom prst="rect">
+            <a:avLst/>
+          </a:prstGeom>
+          <a:solidFill>
+            <a:srgbClr val="D8DFE4"/>
+          </a:solidFill>
+          <a:ln>
+            <a:noFill/>
+          </a:ln>
+        </p:spPr>
+        <p:style>
+          <a:lnRef idx="1">
+            <a:schemeClr val="accent1"/>
+          </a:lnRef>
+          <a:fillRef idx="3">
+            <a:schemeClr val="accent1"/>
+          </a:fillRef>
+          <a:effectRef idx="2">
+            <a:schemeClr val="accent1"/>
+          </a:effectRef>
+          <a:fontRef idx="minor">
+            <a:schemeClr val="lt1"/>
+          </a:fontRef>
+        </p:style>
+        <p:txBody>
+          <a:bodyPr rtlCol="0" anchor="ctr"/>
+          <a:lstStyle/>
+          <a:p>
+            <a:pPr algn="ctr"/>
           </a:p>
         </p:txBody>
       </p:sp>
@@ -6315,8 +6880,8 @@
         </p:nvSpPr>
         <p:spPr>
           <a:xfrm>
-            <a:off x="685800" y="1143000"/>
-            <a:ext cx="10817352" cy="25400"/>
+            <a:off x="685800" y="502920"/>
+            <a:ext cx="36576" cy="658368"/>
           </a:xfrm>
           <a:prstGeom prst="rect">
             <a:avLst/>
@@ -6350,33 +6915,105 @@
           </a:p>
         </p:txBody>
       </p:sp>
-      <p:pic>
-        <p:nvPicPr>
-          <p:cNvPr id="7" name="Picture 6" descr="image.png"/>
-          <p:cNvPicPr>
-            <a:picLocks noChangeAspect="1"/>
-          </p:cNvPicPr>
-          <p:nvPr/>
-        </p:nvPicPr>
-        <p:blipFill>
-          <a:blip r:embed="rId2"/>
-          <a:stretch>
-            <a:fillRect/>
-          </a:stretch>
-        </p:blipFill>
-        <p:spPr>
-          <a:xfrm>
-            <a:off x="2163921" y="1325880"/>
-            <a:ext cx="7861110" cy="4937760"/>
-          </a:xfrm>
-          <a:prstGeom prst="rect">
-            <a:avLst/>
-          </a:prstGeom>
-        </p:spPr>
-      </p:pic>
-      <p:sp>
-        <p:nvSpPr>
-          <p:cNvPr id="8" name="Rectangle 7"/>
+      <p:sp>
+        <p:nvSpPr>
+          <p:cNvPr id="7" name="TextBox 6"/>
+          <p:cNvSpPr txBox="1"/>
+          <p:nvPr/>
+        </p:nvSpPr>
+        <p:spPr>
+          <a:xfrm>
+            <a:off x="813816" y="502920"/>
+            <a:ext cx="10634472" cy="685800"/>
+          </a:xfrm>
+          <a:prstGeom prst="rect">
+            <a:avLst/>
+          </a:prstGeom>
+          <a:noFill/>
+        </p:spPr>
+        <p:txBody>
+          <a:bodyPr wrap="square">
+            <a:spAutoFit/>
+          </a:bodyPr>
+          <a:lstStyle/>
+          <a:p>
+            <a:pPr algn="l"/>
+            <a:r>
+              <a:rPr sz="2400" b="1" i="0">
+                <a:solidFill>
+                  <a:srgbClr val="1F2C56"/>
+                </a:solidFill>
+                <a:latin typeface="Source Serif 4"/>
+              </a:rPr>
+              <a:t>Die häufigsten agree-Fehler im Firmenkundenalltag</a:t>
+            </a:r>
+          </a:p>
+        </p:txBody>
+      </p:sp>
+      <p:sp>
+        <p:nvSpPr>
+          <p:cNvPr id="8" name="TextBox 7"/>
+          <p:cNvSpPr txBox="1"/>
+          <p:nvPr/>
+        </p:nvSpPr>
+        <p:spPr>
+          <a:xfrm>
+            <a:off x="685800" y="1417320"/>
+            <a:ext cx="10817352" cy="5029200"/>
+          </a:xfrm>
+          <a:prstGeom prst="rect">
+            <a:avLst/>
+          </a:prstGeom>
+          <a:noFill/>
+        </p:spPr>
+        <p:txBody>
+          <a:bodyPr wrap="square">
+            <a:spAutoFit/>
+          </a:bodyPr>
+          <a:lstStyle/>
+          <a:p>
+            <a:pPr>
+              <a:spcBef>
+                <a:spcPts val="400"/>
+              </a:spcBef>
+              <a:spcAft>
+                <a:spcPts val="200"/>
+              </a:spcAft>
+            </a:pPr>
+            <a:r>
+              <a:rPr sz="1200">
+                <a:solidFill>
+                  <a:srgbClr val="3D5466"/>
+                </a:solidFill>
+                <a:latin typeface="Arial"/>
+              </a:rPr>
+              <a:t>## 4.2 Effizienter Gesprächsworkflow: Vor – Während – Nach</a:t>
+            </a:r>
+          </a:p>
+          <a:p>
+            <a:pPr>
+              <a:spcBef>
+                <a:spcPts val="400"/>
+              </a:spcBef>
+              <a:spcAft>
+                <a:spcPts val="200"/>
+              </a:spcAft>
+            </a:pPr>
+            <a:r>
+              <a:rPr sz="1200">
+                <a:solidFill>
+                  <a:srgbClr val="3D5466"/>
+                </a:solidFill>
+                <a:latin typeface="Arial"/>
+              </a:rPr>
+              <a:t>Der größte Effizienzgewinn entsteht nicht aus einzelnen Funktionen, sondern aus einem konsistenten Workflow, der agree konsequent in alle drei Gesprächsphasen einbindet.</a:t>
+            </a:r>
+          </a:p>
+        </p:txBody>
+      </p:sp>
+      <p:sp>
+        <p:nvSpPr>
+          <p:cNvPr id="9" name="Rectangle 8"/>
           <p:cNvSpPr/>
           <p:nvPr/>
         </p:nvSpPr>
@@ -6419,7 +7056,7 @@
       </p:sp>
       <p:sp>
         <p:nvSpPr>
-          <p:cNvPr id="9" name="TextBox 8"/>
+          <p:cNvPr id="10" name="TextBox 9"/>
           <p:cNvSpPr txBox="1"/>
           <p:nvPr/>
         </p:nvSpPr>
@@ -6448,41 +7085,6 @@
                 <a:latin typeface="JetBrains Mono"/>
               </a:rPr>
               <a:t>Benedikt Zoller Coaching  ·  FKB Campus  ·  M17</a:t>
-            </a:r>
-          </a:p>
-        </p:txBody>
-      </p:sp>
-      <p:sp>
-        <p:nvSpPr>
-          <p:cNvPr id="10" name="TextBox 9"/>
-          <p:cNvSpPr txBox="1"/>
-          <p:nvPr/>
-        </p:nvSpPr>
-        <p:spPr>
-          <a:xfrm>
-            <a:off x="7176211" y="6583680"/>
-            <a:ext cx="4326940" cy="256032"/>
-          </a:xfrm>
-          <a:prstGeom prst="rect">
-            <a:avLst/>
-          </a:prstGeom>
-          <a:noFill/>
-        </p:spPr>
-        <p:txBody>
-          <a:bodyPr wrap="none">
-            <a:spAutoFit/>
-          </a:bodyPr>
-          <a:lstStyle/>
-          <a:p>
-            <a:pPr algn="r"/>
-            <a:r>
-              <a:rPr sz="700">
-                <a:solidFill>
-                  <a:srgbClr val="A0B4D2"/>
-                </a:solidFill>
-                <a:latin typeface="JetBrains Mono"/>
-              </a:rPr>
-              <a:t>Schaubild</a:t>
             </a:r>
           </a:p>
         </p:txBody>
@@ -6520,7 +7122,7 @@
             <a:avLst/>
           </a:prstGeom>
           <a:solidFill>
-            <a:srgbClr val="EDEDF3"/>
+            <a:srgbClr val="FFFFFF"/>
           </a:solidFill>
           <a:ln>
             <a:noFill/>
@@ -6621,51 +7223,43 @@
                 </a:solidFill>
                 <a:latin typeface="JetBrains Mono"/>
               </a:rPr>
-              <a:t>M17  ·  INHALT</a:t>
-            </a:r>
-          </a:p>
-        </p:txBody>
-      </p:sp>
-      <p:sp>
-        <p:nvSpPr>
-          <p:cNvPr id="5" name="Rectangle 4"/>
-          <p:cNvSpPr/>
-          <p:nvPr/>
-        </p:nvSpPr>
-        <p:spPr>
-          <a:xfrm>
-            <a:off x="0" y="1234440"/>
-            <a:ext cx="12188952" cy="12700"/>
-          </a:xfrm>
-          <a:prstGeom prst="rect">
-            <a:avLst/>
-          </a:prstGeom>
-          <a:solidFill>
-            <a:srgbClr val="D8DFE4"/>
-          </a:solidFill>
-          <a:ln>
-            <a:noFill/>
-          </a:ln>
-        </p:spPr>
-        <p:style>
-          <a:lnRef idx="1">
-            <a:schemeClr val="accent1"/>
-          </a:lnRef>
-          <a:fillRef idx="3">
-            <a:schemeClr val="accent1"/>
-          </a:fillRef>
-          <a:effectRef idx="2">
-            <a:schemeClr val="accent1"/>
-          </a:effectRef>
-          <a:fontRef idx="minor">
-            <a:schemeClr val="lt1"/>
-          </a:fontRef>
-        </p:style>
-        <p:txBody>
-          <a:bodyPr rtlCol="0" anchor="ctr"/>
-          <a:lstStyle/>
-          <a:p>
-            <a:pPr algn="ctr"/>
+              <a:t>M17  ·  SCHAUBILD</a:t>
+            </a:r>
+          </a:p>
+        </p:txBody>
+      </p:sp>
+      <p:sp>
+        <p:nvSpPr>
+          <p:cNvPr id="5" name="TextBox 4"/>
+          <p:cNvSpPr txBox="1"/>
+          <p:nvPr/>
+        </p:nvSpPr>
+        <p:spPr>
+          <a:xfrm>
+            <a:off x="685800" y="502920"/>
+            <a:ext cx="10817352" cy="594360"/>
+          </a:xfrm>
+          <a:prstGeom prst="rect">
+            <a:avLst/>
+          </a:prstGeom>
+          <a:noFill/>
+        </p:spPr>
+        <p:txBody>
+          <a:bodyPr wrap="square">
+            <a:spAutoFit/>
+          </a:bodyPr>
+          <a:lstStyle/>
+          <a:p>
+            <a:pPr algn="l"/>
+            <a:r>
+              <a:rPr sz="2000" b="1" i="0">
+                <a:solidFill>
+                  <a:srgbClr val="1F2C56"/>
+                </a:solidFill>
+                <a:latin typeface="Source Serif 4"/>
+              </a:rPr>
+              <a:t>agree21 Kernbereiche für Firmenkundenberater</a:t>
+            </a:r>
           </a:p>
         </p:txBody>
       </p:sp>
@@ -6677,8 +7271,8 @@
         </p:nvSpPr>
         <p:spPr>
           <a:xfrm>
-            <a:off x="685800" y="502920"/>
-            <a:ext cx="36576" cy="658368"/>
+            <a:off x="685800" y="1143000"/>
+            <a:ext cx="10817352" cy="25400"/>
           </a:xfrm>
           <a:prstGeom prst="rect">
             <a:avLst/>
@@ -6712,105 +7306,33 @@
           </a:p>
         </p:txBody>
       </p:sp>
-      <p:sp>
-        <p:nvSpPr>
-          <p:cNvPr id="7" name="TextBox 6"/>
-          <p:cNvSpPr txBox="1"/>
-          <p:nvPr/>
-        </p:nvSpPr>
-        <p:spPr>
-          <a:xfrm>
-            <a:off x="813816" y="502920"/>
-            <a:ext cx="10634472" cy="685800"/>
-          </a:xfrm>
-          <a:prstGeom prst="rect">
-            <a:avLst/>
-          </a:prstGeom>
-          <a:noFill/>
-        </p:spPr>
-        <p:txBody>
-          <a:bodyPr wrap="square">
-            <a:spAutoFit/>
-          </a:bodyPr>
-          <a:lstStyle/>
-          <a:p>
-            <a:pPr algn="l"/>
-            <a:r>
-              <a:rPr sz="2400" b="1" i="0">
-                <a:solidFill>
-                  <a:srgbClr val="1F2C56"/>
-                </a:solidFill>
-                <a:latin typeface="Source Serif 4"/>
-              </a:rPr>
-              <a:t>Phase 1: Vorbereitung (15–20 Minuten statt 45–60 Minuten)</a:t>
-            </a:r>
-          </a:p>
-        </p:txBody>
-      </p:sp>
-      <p:sp>
-        <p:nvSpPr>
-          <p:cNvPr id="8" name="TextBox 7"/>
-          <p:cNvSpPr txBox="1"/>
-          <p:nvPr/>
-        </p:nvSpPr>
-        <p:spPr>
-          <a:xfrm>
-            <a:off x="685800" y="1417320"/>
-            <a:ext cx="10817352" cy="5029200"/>
-          </a:xfrm>
-          <a:prstGeom prst="rect">
-            <a:avLst/>
-          </a:prstGeom>
-          <a:noFill/>
-        </p:spPr>
-        <p:txBody>
-          <a:bodyPr wrap="square">
-            <a:spAutoFit/>
-          </a:bodyPr>
-          <a:lstStyle/>
-          <a:p>
-            <a:pPr>
-              <a:spcBef>
-                <a:spcPts val="400"/>
-              </a:spcBef>
-              <a:spcAft>
-                <a:spcPts val="200"/>
-              </a:spcAft>
-            </a:pPr>
-            <a:r>
-              <a:rPr sz="1200">
-                <a:solidFill>
-                  <a:srgbClr val="3D5466"/>
-                </a:solidFill>
-                <a:latin typeface="Arial"/>
-              </a:rPr>
-              <a:t>agree-Checkliste Jahresgespräch:</a:t>
-            </a:r>
-          </a:p>
-          <a:p>
-            <a:pPr>
-              <a:spcBef>
-                <a:spcPts val="400"/>
-              </a:spcBef>
-              <a:spcAft>
-                <a:spcPts val="200"/>
-              </a:spcAft>
-            </a:pPr>
-            <a:r>
-              <a:rPr sz="1200">
-                <a:solidFill>
-                  <a:srgbClr val="3D5466"/>
-                </a:solidFill>
-                <a:latin typeface="Arial"/>
-              </a:rPr>
-              <a:t>Ergebnis: Sie gehen mit einem konkreten Bild in das Gespräch – statt im Gespräch zu blättern.</a:t>
-            </a:r>
-          </a:p>
-        </p:txBody>
-      </p:sp>
-      <p:sp>
-        <p:nvSpPr>
-          <p:cNvPr id="9" name="Rectangle 8"/>
+      <p:pic>
+        <p:nvPicPr>
+          <p:cNvPr id="7" name="Picture 6" descr="image.png"/>
+          <p:cNvPicPr>
+            <a:picLocks noChangeAspect="1"/>
+          </p:cNvPicPr>
+          <p:nvPr/>
+        </p:nvPicPr>
+        <p:blipFill>
+          <a:blip r:embed="rId2"/>
+          <a:stretch>
+            <a:fillRect/>
+          </a:stretch>
+        </p:blipFill>
+        <p:spPr>
+          <a:xfrm>
+            <a:off x="2163921" y="1325880"/>
+            <a:ext cx="7861110" cy="4937760"/>
+          </a:xfrm>
+          <a:prstGeom prst="rect">
+            <a:avLst/>
+          </a:prstGeom>
+        </p:spPr>
+      </p:pic>
+      <p:sp>
+        <p:nvSpPr>
+          <p:cNvPr id="8" name="Rectangle 7"/>
           <p:cNvSpPr/>
           <p:nvPr/>
         </p:nvSpPr>
@@ -6853,7 +7375,7 @@
       </p:sp>
       <p:sp>
         <p:nvSpPr>
-          <p:cNvPr id="10" name="TextBox 9"/>
+          <p:cNvPr id="9" name="TextBox 8"/>
           <p:cNvSpPr txBox="1"/>
           <p:nvPr/>
         </p:nvSpPr>
@@ -6882,6 +7404,41 @@
                 <a:latin typeface="JetBrains Mono"/>
               </a:rPr>
               <a:t>Benedikt Zoller Coaching  ·  FKB Campus  ·  M17</a:t>
+            </a:r>
+          </a:p>
+        </p:txBody>
+      </p:sp>
+      <p:sp>
+        <p:nvSpPr>
+          <p:cNvPr id="10" name="TextBox 9"/>
+          <p:cNvSpPr txBox="1"/>
+          <p:nvPr/>
+        </p:nvSpPr>
+        <p:spPr>
+          <a:xfrm>
+            <a:off x="7176211" y="6583680"/>
+            <a:ext cx="4326940" cy="256032"/>
+          </a:xfrm>
+          <a:prstGeom prst="rect">
+            <a:avLst/>
+          </a:prstGeom>
+          <a:noFill/>
+        </p:spPr>
+        <p:txBody>
+          <a:bodyPr wrap="none">
+            <a:spAutoFit/>
+          </a:bodyPr>
+          <a:lstStyle/>
+          <a:p>
+            <a:pPr algn="r"/>
+            <a:r>
+              <a:rPr sz="700">
+                <a:solidFill>
+                  <a:srgbClr val="A0B4D2"/>
+                </a:solidFill>
+                <a:latin typeface="JetBrains Mono"/>
+              </a:rPr>
+              <a:t>Schaubild</a:t>
             </a:r>
           </a:p>
         </p:txBody>
@@ -7141,7 +7698,7 @@
                 </a:solidFill>
                 <a:latin typeface="Source Serif 4"/>
               </a:rPr>
-              <a:t>Phase 2: Während des Gesprächs</a:t>
+              <a:t>Phase 1: Vorbereitung (15–20 Minuten statt 45–60 Minuten)</a:t>
             </a:r>
           </a:p>
         </p:txBody>
@@ -7177,13 +7734,13 @@
               </a:spcAft>
             </a:pPr>
             <a:r>
-              <a:rPr sz="1300">
+              <a:rPr sz="1200">
                 <a:solidFill>
                   <a:srgbClr val="3D5466"/>
                 </a:solidFill>
                 <a:latin typeface="Arial"/>
               </a:rPr>
-              <a:t>▸  Kein separates Notizheft – direkt in agree</a:t>
+              <a:t>agree-Checkliste Jahresgespräch:</a:t>
             </a:r>
           </a:p>
           <a:p>
@@ -7196,32 +7753,13 @@
               </a:spcAft>
             </a:pPr>
             <a:r>
-              <a:rPr sz="1300">
+              <a:rPr sz="1200">
                 <a:solidFill>
                   <a:srgbClr val="3D5466"/>
                 </a:solidFill>
                 <a:latin typeface="Arial"/>
               </a:rPr>
-              <a:t>▸  Vereinbarungen sofort als Aktivität/Aufgabe anlegen (mit Datum und Verantwortlichkeit)</a:t>
-            </a:r>
-          </a:p>
-          <a:p>
-            <a:pPr>
-              <a:spcBef>
-                <a:spcPts val="400"/>
-              </a:spcBef>
-              <a:spcAft>
-                <a:spcPts val="200"/>
-              </a:spcAft>
-            </a:pPr>
-            <a:r>
-              <a:rPr sz="1300">
-                <a:solidFill>
-                  <a:srgbClr val="3D5466"/>
-                </a:solidFill>
-                <a:latin typeface="Arial"/>
-              </a:rPr>
-              <a:t>▸  Bedarfe in den dafür vorgesehenen Bedarfsfeldern des UnternehmerDialogs erfassen</a:t>
+              <a:t>Ergebnis: Sie gehen mit einem konkreten Bild in das Gespräch – statt im Gespräch zu blättern.</a:t>
             </a:r>
           </a:p>
         </p:txBody>
@@ -7559,7 +8097,7 @@
                 </a:solidFill>
                 <a:latin typeface="Source Serif 4"/>
               </a:rPr>
-              <a:t>Phase 3: Nachbereitung (10 Minuten statt 30 Minuten)</a:t>
+              <a:t>Phase 2: Während des Gesprächs</a:t>
             </a:r>
           </a:p>
         </p:txBody>
@@ -7595,13 +8133,51 @@
               </a:spcAft>
             </a:pPr>
             <a:r>
-              <a:rPr sz="1200">
+              <a:rPr sz="1300">
                 <a:solidFill>
                   <a:srgbClr val="3D5466"/>
                 </a:solidFill>
                 <a:latin typeface="Arial"/>
               </a:rPr>
-              <a:t>## 4.3 UnternehmerDialog: Mehr als ein Formular</a:t>
+              <a:t>▸  Kein separates Notizheft – direkt in agree</a:t>
+            </a:r>
+          </a:p>
+          <a:p>
+            <a:pPr>
+              <a:spcBef>
+                <a:spcPts val="400"/>
+              </a:spcBef>
+              <a:spcAft>
+                <a:spcPts val="200"/>
+              </a:spcAft>
+            </a:pPr>
+            <a:r>
+              <a:rPr sz="1300">
+                <a:solidFill>
+                  <a:srgbClr val="3D5466"/>
+                </a:solidFill>
+                <a:latin typeface="Arial"/>
+              </a:rPr>
+              <a:t>▸  Vereinbarungen sofort als Aktivität/Aufgabe anlegen (mit Datum und Verantwortlichkeit)</a:t>
+            </a:r>
+          </a:p>
+          <a:p>
+            <a:pPr>
+              <a:spcBef>
+                <a:spcPts val="400"/>
+              </a:spcBef>
+              <a:spcAft>
+                <a:spcPts val="200"/>
+              </a:spcAft>
+            </a:pPr>
+            <a:r>
+              <a:rPr sz="1300">
+                <a:solidFill>
+                  <a:srgbClr val="3D5466"/>
+                </a:solidFill>
+                <a:latin typeface="Arial"/>
+              </a:rPr>
+              <a:t>▸  Bedarfe in den dafür vorgesehenen Bedarfsfeldern des UnternehmerDialogs erfassen</a:t>
             </a:r>
           </a:p>
         </p:txBody>
@@ -7939,7 +8515,7 @@
                 </a:solidFill>
                 <a:latin typeface="Source Serif 4"/>
               </a:rPr>
-              <a:t>Die Bedarfsdimensionen im UnternehmerDialog</a:t>
+              <a:t>Phase 3: Nachbereitung (10 Minuten statt 30 Minuten)</a:t>
             </a:r>
           </a:p>
         </p:txBody>
@@ -7981,26 +8557,7 @@
                 </a:solidFill>
                 <a:latin typeface="Arial"/>
               </a:rPr>
-              <a:t>(Bezeichnungen entsprechen der agree-Standardstruktur; in Ihrer Bankinstallation können einzelne Felder abweichend benannt sein)</a:t>
-            </a:r>
-          </a:p>
-          <a:p>
-            <a:pPr>
-              <a:spcBef>
-                <a:spcPts val="400"/>
-              </a:spcBef>
-              <a:spcAft>
-                <a:spcPts val="200"/>
-              </a:spcAft>
-            </a:pPr>
-            <a:r>
-              <a:rPr sz="1200">
-                <a:solidFill>
-                  <a:srgbClr val="3D5466"/>
-                </a:solidFill>
-                <a:latin typeface="Arial"/>
-              </a:rPr>
-              <a:t>Wichtig: Nicht alle Dimensionen in jedem Gespräch vollständig abarbeiten. Priorität setzen – zwei oder drei Dimensionen pro Gespräch vertiefen.</a:t>
+              <a:t>## 4.3 UnternehmerDialog: Mehr als ein Formular</a:t>
             </a:r>
           </a:p>
         </p:txBody>
@@ -8338,7 +8895,7 @@
                 </a:solidFill>
                 <a:latin typeface="Source Serif 4"/>
               </a:rPr>
-              <a:t>Dokumentationsstandards</a:t>
+              <a:t>Die Bedarfsdimensionen im UnternehmerDialog</a:t>
             </a:r>
           </a:p>
         </p:txBody>
@@ -8374,13 +8931,13 @@
               </a:spcAft>
             </a:pPr>
             <a:r>
-              <a:rPr sz="1300">
+              <a:rPr sz="1200">
                 <a:solidFill>
                   <a:srgbClr val="3D5466"/>
                 </a:solidFill>
                 <a:latin typeface="Arial"/>
               </a:rPr>
-              <a:t>▸  Datum, Teilnehmer, Gesprächsanlass</a:t>
+              <a:t>(Bezeichnungen entsprechen der agree-Standardstruktur; in Ihrer Bankinstallation können einzelne Felder abweichend benannt sein)</a:t>
             </a:r>
           </a:p>
           <a:p>
@@ -8393,203 +8950,13 @@
               </a:spcAft>
             </a:pPr>
             <a:r>
-              <a:rPr sz="1300">
+              <a:rPr sz="1200">
                 <a:solidFill>
                   <a:srgbClr val="3D5466"/>
                 </a:solidFill>
                 <a:latin typeface="Arial"/>
               </a:rPr>
-              <a:t>▸  Besprochene Bedarfsdimensionen mit Ergebnis (Bedarf vorhanden / kein Bedarf / offen)</a:t>
-            </a:r>
-          </a:p>
-          <a:p>
-            <a:pPr>
-              <a:spcBef>
-                <a:spcPts val="400"/>
-              </a:spcBef>
-              <a:spcAft>
-                <a:spcPts val="200"/>
-              </a:spcAft>
-            </a:pPr>
-            <a:r>
-              <a:rPr sz="1300">
-                <a:solidFill>
-                  <a:srgbClr val="3D5466"/>
-                </a:solidFill>
-                <a:latin typeface="Arial"/>
-              </a:rPr>
-              <a:t>▸  Vereinbarte Maßnahmen mit Termin</a:t>
-            </a:r>
-          </a:p>
-          <a:p>
-            <a:pPr>
-              <a:spcBef>
-                <a:spcPts val="400"/>
-              </a:spcBef>
-              <a:spcAft>
-                <a:spcPts val="200"/>
-              </a:spcAft>
-            </a:pPr>
-            <a:r>
-              <a:rPr sz="1300">
-                <a:solidFill>
-                  <a:srgbClr val="3D5466"/>
-                </a:solidFill>
-                <a:latin typeface="Arial"/>
-              </a:rPr>
-              <a:t>▸  Folgeaktivitäten angelegt</a:t>
-            </a:r>
-          </a:p>
-          <a:p>
-            <a:pPr>
-              <a:spcBef>
-                <a:spcPts val="400"/>
-              </a:spcBef>
-              <a:spcAft>
-                <a:spcPts val="200"/>
-              </a:spcAft>
-            </a:pPr>
-            <a:r>
-              <a:rPr sz="1200">
-                <a:solidFill>
-                  <a:srgbClr val="3D5466"/>
-                </a:solidFill>
-                <a:latin typeface="Arial"/>
-              </a:rPr>
-              <a:t>## 4.4 Reporting-Cockpits: Was wann wozu?</a:t>
-            </a:r>
-          </a:p>
-          <a:p>
-            <a:pPr>
-              <a:spcBef>
-                <a:spcPts val="400"/>
-              </a:spcBef>
-              <a:spcAft>
-                <a:spcPts val="200"/>
-              </a:spcAft>
-            </a:pPr>
-            <a:r>
-              <a:rPr sz="1200">
-                <a:solidFill>
-                  <a:srgbClr val="3D5466"/>
-                </a:solidFill>
-                <a:latin typeface="Arial"/>
-              </a:rPr>
-              <a:t>Empfehlung – Die 15-Minuten-Morgenroutine:</a:t>
-            </a:r>
-          </a:p>
-          <a:p>
-            <a:pPr>
-              <a:spcBef>
-                <a:spcPts val="400"/>
-              </a:spcBef>
-              <a:spcAft>
-                <a:spcPts val="200"/>
-              </a:spcAft>
-            </a:pPr>
-            <a:r>
-              <a:rPr sz="1300">
-                <a:solidFill>
-                  <a:srgbClr val="3D5466"/>
-                </a:solidFill>
-                <a:latin typeface="Arial"/>
-              </a:rPr>
-              <a:t>▸  Aktivitätenübersicht: Welche Aufgaben sind heute fällig? (3 Min.)</a:t>
-            </a:r>
-          </a:p>
-          <a:p>
-            <a:pPr>
-              <a:spcBef>
-                <a:spcPts val="400"/>
-              </a:spcBef>
-              <a:spcAft>
-                <a:spcPts val="200"/>
-              </a:spcAft>
-            </a:pPr>
-            <a:r>
-              <a:rPr sz="1300">
-                <a:solidFill>
-                  <a:srgbClr val="3D5466"/>
-                </a:solidFill>
-                <a:latin typeface="Arial"/>
-              </a:rPr>
-              <a:t>▸  Frühwarnliste: Neue Hinweise? (5 Min.)</a:t>
-            </a:r>
-          </a:p>
-          <a:p>
-            <a:pPr>
-              <a:spcBef>
-                <a:spcPts val="400"/>
-              </a:spcBef>
-              <a:spcAft>
-                <a:spcPts val="200"/>
-              </a:spcAft>
-            </a:pPr>
-            <a:r>
-              <a:rPr sz="1300">
-                <a:solidFill>
-                  <a:srgbClr val="3D5466"/>
-                </a:solidFill>
-                <a:latin typeface="Arial"/>
-              </a:rPr>
-              <a:t>▸  Prolongationsübersicht: Fälligkeiten in den nächsten 30 Tagen? (3 Min.)</a:t>
-            </a:r>
-          </a:p>
-          <a:p>
-            <a:pPr>
-              <a:spcBef>
-                <a:spcPts val="400"/>
-              </a:spcBef>
-              <a:spcAft>
-                <a:spcPts val="200"/>
-              </a:spcAft>
-            </a:pPr>
-            <a:r>
-              <a:rPr sz="1300">
-                <a:solidFill>
-                  <a:srgbClr val="3D5466"/>
-                </a:solidFill>
-                <a:latin typeface="Arial"/>
-              </a:rPr>
-              <a:t>▸  E-Mail an Verbundpartner zu offenen Übergaben? (4 Min.)</a:t>
-            </a:r>
-          </a:p>
-          <a:p>
-            <a:pPr>
-              <a:spcBef>
-                <a:spcPts val="400"/>
-              </a:spcBef>
-              <a:spcAft>
-                <a:spcPts val="200"/>
-              </a:spcAft>
-            </a:pPr>
-            <a:r>
-              <a:rPr sz="1200">
-                <a:solidFill>
-                  <a:srgbClr val="3D5466"/>
-                </a:solidFill>
-                <a:latin typeface="Arial"/>
-              </a:rPr>
-              <a:t>Diese Routine hält den Bestand im Griff – ohne aufwendige Recherche.</a:t>
-            </a:r>
-          </a:p>
-          <a:p>
-            <a:pPr>
-              <a:spcBef>
-                <a:spcPts val="400"/>
-              </a:spcBef>
-              <a:spcAft>
-                <a:spcPts val="200"/>
-              </a:spcAft>
-            </a:pPr>
-            <a:r>
-              <a:rPr sz="1200">
-                <a:solidFill>
-                  <a:srgbClr val="3D5466"/>
-                </a:solidFill>
-                <a:latin typeface="Arial"/>
-              </a:rPr>
-              <a:t>## 4.5 VR-NetWorld und Verbundpartner-Systeme</a:t>
+              <a:t>Wichtig: Nicht alle Dimensionen in jedem Gespräch vollständig abarbeiten. Priorität setzen – zwei oder drei Dimensionen pro Gespräch vertiefen.</a:t>
             </a:r>
           </a:p>
         </p:txBody>

--- a/protected-downloads/praesentation/M17.pptx
+++ b/protected-downloads/praesentation/M17.pptx
@@ -17,6 +17,8 @@
     <p:sldId id="265" r:id="rId17"/>
     <p:sldId id="266" r:id="rId18"/>
     <p:sldId id="267" r:id="rId19"/>
+    <p:sldId id="268" r:id="rId20"/>
+    <p:sldId id="269" r:id="rId21"/>
   </p:sldIdLst>
   <p:sldSz cx="12188952" cy="6858000" type="screen4x3"/>
   <p:notesSz cx="6858000" cy="9144000"/>
@@ -513,7 +515,7 @@
           <a:lstStyle/>
           <a:p>
             <a:r>
-              <a:t>Siehe Trainerhandbuch (Sektion 3) für Moderationshinweise, Timing und erwartete Teilnehmerreaktionen.</a:t>
+              <a:t>Agenda aus dem Ablaufplan (Sektion 3.1). Timing und Pausen siehe Trainerhandbuch.</a:t>
             </a:r>
           </a:p>
         </p:txBody>
@@ -4821,7 +4823,7 @@
                 </a:solidFill>
                 <a:latin typeface="Source Serif 4"/>
               </a:rPr>
-              <a:t>Dokumentationsstandards</a:t>
+              <a:t>Die Bedarfsdimensionen im UnternehmerDialog</a:t>
             </a:r>
           </a:p>
         </p:txBody>
@@ -4863,7 +4865,7 @@
                 </a:solidFill>
                 <a:latin typeface="Arial"/>
               </a:rPr>
-              <a:t>▸  Datum, Teilnehmer, Gesprächsanlass</a:t>
+              <a:t>▸  (Bezeichnungen entsprechen der agree-Standardstruktur; in Ihrer Bankinstallation können einzelne Felder abweichend benannt sein)</a:t>
             </a:r>
           </a:p>
           <a:p>
@@ -4882,197 +4884,7 @@
                 </a:solidFill>
                 <a:latin typeface="Arial"/>
               </a:rPr>
-              <a:t>▸  Besprochene Bedarfsdimensionen mit Ergebnis (Bedarf vorhanden / kein Bedarf / offen)</a:t>
-            </a:r>
-          </a:p>
-          <a:p>
-            <a:pPr>
-              <a:spcBef>
-                <a:spcPts val="400"/>
-              </a:spcBef>
-              <a:spcAft>
-                <a:spcPts val="200"/>
-              </a:spcAft>
-            </a:pPr>
-            <a:r>
-              <a:rPr sz="1300">
-                <a:solidFill>
-                  <a:srgbClr val="3D5466"/>
-                </a:solidFill>
-                <a:latin typeface="Arial"/>
-              </a:rPr>
-              <a:t>▸  Vereinbarte Maßnahmen mit Termin</a:t>
-            </a:r>
-          </a:p>
-          <a:p>
-            <a:pPr>
-              <a:spcBef>
-                <a:spcPts val="400"/>
-              </a:spcBef>
-              <a:spcAft>
-                <a:spcPts val="200"/>
-              </a:spcAft>
-            </a:pPr>
-            <a:r>
-              <a:rPr sz="1300">
-                <a:solidFill>
-                  <a:srgbClr val="3D5466"/>
-                </a:solidFill>
-                <a:latin typeface="Arial"/>
-              </a:rPr>
-              <a:t>▸  Folgeaktivitäten angelegt</a:t>
-            </a:r>
-          </a:p>
-          <a:p>
-            <a:pPr>
-              <a:spcBef>
-                <a:spcPts val="400"/>
-              </a:spcBef>
-              <a:spcAft>
-                <a:spcPts val="200"/>
-              </a:spcAft>
-            </a:pPr>
-            <a:r>
-              <a:rPr sz="1200">
-                <a:solidFill>
-                  <a:srgbClr val="3D5466"/>
-                </a:solidFill>
-                <a:latin typeface="Arial"/>
-              </a:rPr>
-              <a:t>## 4.4 Reporting-Cockpits: Was wann wozu?</a:t>
-            </a:r>
-          </a:p>
-          <a:p>
-            <a:pPr>
-              <a:spcBef>
-                <a:spcPts val="400"/>
-              </a:spcBef>
-              <a:spcAft>
-                <a:spcPts val="200"/>
-              </a:spcAft>
-            </a:pPr>
-            <a:r>
-              <a:rPr sz="1200">
-                <a:solidFill>
-                  <a:srgbClr val="3D5466"/>
-                </a:solidFill>
-                <a:latin typeface="Arial"/>
-              </a:rPr>
-              <a:t>Empfehlung – Die 15-Minuten-Morgenroutine:</a:t>
-            </a:r>
-          </a:p>
-          <a:p>
-            <a:pPr>
-              <a:spcBef>
-                <a:spcPts val="400"/>
-              </a:spcBef>
-              <a:spcAft>
-                <a:spcPts val="200"/>
-              </a:spcAft>
-            </a:pPr>
-            <a:r>
-              <a:rPr sz="1300">
-                <a:solidFill>
-                  <a:srgbClr val="3D5466"/>
-                </a:solidFill>
-                <a:latin typeface="Arial"/>
-              </a:rPr>
-              <a:t>▸  Aktivitätenübersicht: Welche Aufgaben sind heute fällig? (3 Min.)</a:t>
-            </a:r>
-          </a:p>
-          <a:p>
-            <a:pPr>
-              <a:spcBef>
-                <a:spcPts val="400"/>
-              </a:spcBef>
-              <a:spcAft>
-                <a:spcPts val="200"/>
-              </a:spcAft>
-            </a:pPr>
-            <a:r>
-              <a:rPr sz="1300">
-                <a:solidFill>
-                  <a:srgbClr val="3D5466"/>
-                </a:solidFill>
-                <a:latin typeface="Arial"/>
-              </a:rPr>
-              <a:t>▸  Frühwarnliste: Neue Hinweise? (5 Min.)</a:t>
-            </a:r>
-          </a:p>
-          <a:p>
-            <a:pPr>
-              <a:spcBef>
-                <a:spcPts val="400"/>
-              </a:spcBef>
-              <a:spcAft>
-                <a:spcPts val="200"/>
-              </a:spcAft>
-            </a:pPr>
-            <a:r>
-              <a:rPr sz="1300">
-                <a:solidFill>
-                  <a:srgbClr val="3D5466"/>
-                </a:solidFill>
-                <a:latin typeface="Arial"/>
-              </a:rPr>
-              <a:t>▸  Prolongationsübersicht: Fälligkeiten in den nächsten 30 Tagen? (3 Min.)</a:t>
-            </a:r>
-          </a:p>
-          <a:p>
-            <a:pPr>
-              <a:spcBef>
-                <a:spcPts val="400"/>
-              </a:spcBef>
-              <a:spcAft>
-                <a:spcPts val="200"/>
-              </a:spcAft>
-            </a:pPr>
-            <a:r>
-              <a:rPr sz="1300">
-                <a:solidFill>
-                  <a:srgbClr val="3D5466"/>
-                </a:solidFill>
-                <a:latin typeface="Arial"/>
-              </a:rPr>
-              <a:t>▸  E-Mail an Verbundpartner zu offenen Übergaben? (4 Min.)</a:t>
-            </a:r>
-          </a:p>
-          <a:p>
-            <a:pPr>
-              <a:spcBef>
-                <a:spcPts val="400"/>
-              </a:spcBef>
-              <a:spcAft>
-                <a:spcPts val="200"/>
-              </a:spcAft>
-            </a:pPr>
-            <a:r>
-              <a:rPr sz="1200">
-                <a:solidFill>
-                  <a:srgbClr val="3D5466"/>
-                </a:solidFill>
-                <a:latin typeface="Arial"/>
-              </a:rPr>
-              <a:t>Diese Routine hält den Bestand im Griff – ohne aufwendige Recherche.</a:t>
-            </a:r>
-          </a:p>
-          <a:p>
-            <a:pPr>
-              <a:spcBef>
-                <a:spcPts val="400"/>
-              </a:spcBef>
-              <a:spcAft>
-                <a:spcPts val="200"/>
-              </a:spcAft>
-            </a:pPr>
-            <a:r>
-              <a:rPr sz="1200">
-                <a:solidFill>
-                  <a:srgbClr val="3D5466"/>
-                </a:solidFill>
-                <a:latin typeface="Arial"/>
-              </a:rPr>
-              <a:t>## 4.5 VR-NetWorld und Verbundpartner-Systeme</a:t>
+              <a:t>▸  Wichtig: Nicht alle Dimensionen in jedem Gespräch vollständig abarbeiten. Priorität setzen – zwei oder drei Dimensionen pro Gespräch vertiefen.</a:t>
             </a:r>
           </a:p>
         </p:txBody>
@@ -5410,7 +5222,7 @@
                 </a:solidFill>
                 <a:latin typeface="Source Serif 4"/>
               </a:rPr>
-              <a:t>Arbeitsblatt A: Mein agree-Selbstcheck</a:t>
+              <a:t>Dokumentationsstandards</a:t>
             </a:r>
           </a:p>
         </p:txBody>
@@ -5446,13 +5258,13 @@
               </a:spcAft>
             </a:pPr>
             <a:r>
-              <a:rPr sz="1200">
+              <a:rPr sz="1300">
                 <a:solidFill>
                   <a:srgbClr val="3D5466"/>
                 </a:solidFill>
                 <a:latin typeface="Arial"/>
               </a:rPr>
-              <a:t>Bewerten Sie Ihren aktuellen Umgang mit agree ehrlich (1 = nutze ich kaum / 5 = nutze ich routiniert):</a:t>
+              <a:t>▸  Datum, Teilnehmer, Gesprächsanlass</a:t>
             </a:r>
           </a:p>
           <a:p>
@@ -5465,13 +5277,13 @@
               </a:spcAft>
             </a:pPr>
             <a:r>
-              <a:rPr sz="1200">
+              <a:rPr sz="1300">
                 <a:solidFill>
                   <a:srgbClr val="3D5466"/>
                 </a:solidFill>
                 <a:latin typeface="Arial"/>
               </a:rPr>
-              <a:t>Meine zwei größten Zeitfresser im aktuellen Workflow:</a:t>
+              <a:t>▸  Besprochene Bedarfsdimensionen mit Ergebnis (Bedarf vorhanden / kein Bedarf / offen)</a:t>
             </a:r>
           </a:p>
           <a:p>
@@ -5484,13 +5296,184 @@
               </a:spcAft>
             </a:pPr>
             <a:r>
-              <a:rPr sz="1200">
+              <a:rPr sz="1300">
                 <a:solidFill>
                   <a:srgbClr val="3D5466"/>
                 </a:solidFill>
                 <a:latin typeface="Arial"/>
               </a:rPr>
-              <a:t>agree-Funktion, die ich morgen früh ausprobiere:</a:t>
+              <a:t>▸  Vereinbarte Maßnahmen mit Termin</a:t>
+            </a:r>
+          </a:p>
+          <a:p>
+            <a:pPr>
+              <a:spcBef>
+                <a:spcPts val="400"/>
+              </a:spcBef>
+              <a:spcAft>
+                <a:spcPts val="200"/>
+              </a:spcAft>
+            </a:pPr>
+            <a:r>
+              <a:rPr sz="1300">
+                <a:solidFill>
+                  <a:srgbClr val="3D5466"/>
+                </a:solidFill>
+                <a:latin typeface="Arial"/>
+              </a:rPr>
+              <a:t>▸  Folgeaktivitäten angelegt</a:t>
+            </a:r>
+          </a:p>
+          <a:p>
+            <a:pPr>
+              <a:spcBef>
+                <a:spcPts val="400"/>
+              </a:spcBef>
+              <a:spcAft>
+                <a:spcPts val="200"/>
+              </a:spcAft>
+            </a:pPr>
+            <a:r>
+              <a:rPr sz="1300">
+                <a:solidFill>
+                  <a:srgbClr val="3D5466"/>
+                </a:solidFill>
+                <a:latin typeface="Arial"/>
+              </a:rPr>
+              <a:t>▸  ## 4.4 Reporting-Cockpits: Was wann wozu?</a:t>
+            </a:r>
+          </a:p>
+          <a:p>
+            <a:pPr>
+              <a:spcBef>
+                <a:spcPts val="400"/>
+              </a:spcBef>
+              <a:spcAft>
+                <a:spcPts val="200"/>
+              </a:spcAft>
+            </a:pPr>
+            <a:r>
+              <a:rPr sz="1300">
+                <a:solidFill>
+                  <a:srgbClr val="3D5466"/>
+                </a:solidFill>
+                <a:latin typeface="Arial"/>
+              </a:rPr>
+              <a:t>▸  Empfehlung – Die 15-Minuten-Morgenroutine:</a:t>
+            </a:r>
+          </a:p>
+          <a:p>
+            <a:pPr>
+              <a:spcBef>
+                <a:spcPts val="400"/>
+              </a:spcBef>
+              <a:spcAft>
+                <a:spcPts val="200"/>
+              </a:spcAft>
+            </a:pPr>
+            <a:r>
+              <a:rPr sz="1300">
+                <a:solidFill>
+                  <a:srgbClr val="3D5466"/>
+                </a:solidFill>
+                <a:latin typeface="Arial"/>
+              </a:rPr>
+              <a:t>▸  Aktivitätenübersicht: Welche Aufgaben sind heute fällig? (3 Min.)</a:t>
+            </a:r>
+          </a:p>
+          <a:p>
+            <a:pPr>
+              <a:spcBef>
+                <a:spcPts val="400"/>
+              </a:spcBef>
+              <a:spcAft>
+                <a:spcPts val="200"/>
+              </a:spcAft>
+            </a:pPr>
+            <a:r>
+              <a:rPr sz="1300">
+                <a:solidFill>
+                  <a:srgbClr val="3D5466"/>
+                </a:solidFill>
+                <a:latin typeface="Arial"/>
+              </a:rPr>
+              <a:t>▸  Frühwarnliste: Neue Hinweise? (5 Min.)</a:t>
+            </a:r>
+          </a:p>
+          <a:p>
+            <a:pPr>
+              <a:spcBef>
+                <a:spcPts val="400"/>
+              </a:spcBef>
+              <a:spcAft>
+                <a:spcPts val="200"/>
+              </a:spcAft>
+            </a:pPr>
+            <a:r>
+              <a:rPr sz="1300">
+                <a:solidFill>
+                  <a:srgbClr val="3D5466"/>
+                </a:solidFill>
+                <a:latin typeface="Arial"/>
+              </a:rPr>
+              <a:t>▸  Prolongationsübersicht: Fälligkeiten in den nächsten 30 Tagen? (3 Min.)</a:t>
+            </a:r>
+          </a:p>
+          <a:p>
+            <a:pPr>
+              <a:spcBef>
+                <a:spcPts val="400"/>
+              </a:spcBef>
+              <a:spcAft>
+                <a:spcPts val="200"/>
+              </a:spcAft>
+            </a:pPr>
+            <a:r>
+              <a:rPr sz="1300">
+                <a:solidFill>
+                  <a:srgbClr val="3D5466"/>
+                </a:solidFill>
+                <a:latin typeface="Arial"/>
+              </a:rPr>
+              <a:t>▸  E-Mail an Verbundpartner zu offenen Übergaben? (4 Min.)</a:t>
+            </a:r>
+          </a:p>
+          <a:p>
+            <a:pPr>
+              <a:spcBef>
+                <a:spcPts val="400"/>
+              </a:spcBef>
+              <a:spcAft>
+                <a:spcPts val="200"/>
+              </a:spcAft>
+            </a:pPr>
+            <a:r>
+              <a:rPr sz="1300">
+                <a:solidFill>
+                  <a:srgbClr val="3D5466"/>
+                </a:solidFill>
+                <a:latin typeface="Arial"/>
+              </a:rPr>
+              <a:t>▸  Diese Routine hält den Bestand im Griff – ohne aufwendige Recherche.</a:t>
+            </a:r>
+          </a:p>
+          <a:p>
+            <a:pPr>
+              <a:spcBef>
+                <a:spcPts val="400"/>
+              </a:spcBef>
+              <a:spcAft>
+                <a:spcPts val="200"/>
+              </a:spcAft>
+            </a:pPr>
+            <a:r>
+              <a:rPr sz="1300">
+                <a:solidFill>
+                  <a:srgbClr val="3D5466"/>
+                </a:solidFill>
+                <a:latin typeface="Arial"/>
+              </a:rPr>
+              <a:t>▸  ## 4.5 VR-NetWorld und Verbundpartner-Systeme</a:t>
             </a:r>
           </a:p>
         </p:txBody>
@@ -5828,14 +5811,94 @@
                 </a:solidFill>
                 <a:latin typeface="Source Serif 4"/>
               </a:rPr>
-              <a:t>Arbeitsblatt B: Workflow-Optimierungsplan</a:t>
-            </a:r>
-          </a:p>
-        </p:txBody>
-      </p:sp>
-      <p:sp>
-        <p:nvSpPr>
-          <p:cNvPr id="8" name="Rectangle 7"/>
+              <a:t>Arbeitsblatt A: Mein agree-Selbstcheck</a:t>
+            </a:r>
+          </a:p>
+        </p:txBody>
+      </p:sp>
+      <p:sp>
+        <p:nvSpPr>
+          <p:cNvPr id="8" name="TextBox 7"/>
+          <p:cNvSpPr txBox="1"/>
+          <p:nvPr/>
+        </p:nvSpPr>
+        <p:spPr>
+          <a:xfrm>
+            <a:off x="685800" y="1417320"/>
+            <a:ext cx="10817352" cy="5029200"/>
+          </a:xfrm>
+          <a:prstGeom prst="rect">
+            <a:avLst/>
+          </a:prstGeom>
+          <a:noFill/>
+        </p:spPr>
+        <p:txBody>
+          <a:bodyPr wrap="square">
+            <a:spAutoFit/>
+          </a:bodyPr>
+          <a:lstStyle/>
+          <a:p>
+            <a:pPr>
+              <a:spcBef>
+                <a:spcPts val="400"/>
+              </a:spcBef>
+              <a:spcAft>
+                <a:spcPts val="200"/>
+              </a:spcAft>
+            </a:pPr>
+            <a:r>
+              <a:rPr sz="1300">
+                <a:solidFill>
+                  <a:srgbClr val="3D5466"/>
+                </a:solidFill>
+                <a:latin typeface="Arial"/>
+              </a:rPr>
+              <a:t>▸  Bewerten Sie Ihren aktuellen Umgang mit agree ehrlich (1 = nutze ich kaum / 5 = nutze ich routiniert):</a:t>
+            </a:r>
+          </a:p>
+          <a:p>
+            <a:pPr>
+              <a:spcBef>
+                <a:spcPts val="400"/>
+              </a:spcBef>
+              <a:spcAft>
+                <a:spcPts val="200"/>
+              </a:spcAft>
+            </a:pPr>
+            <a:r>
+              <a:rPr sz="1300">
+                <a:solidFill>
+                  <a:srgbClr val="3D5466"/>
+                </a:solidFill>
+                <a:latin typeface="Arial"/>
+              </a:rPr>
+              <a:t>▸  Meine zwei größten Zeitfresser im aktuellen Workflow:</a:t>
+            </a:r>
+          </a:p>
+          <a:p>
+            <a:pPr>
+              <a:spcBef>
+                <a:spcPts val="400"/>
+              </a:spcBef>
+              <a:spcAft>
+                <a:spcPts val="200"/>
+              </a:spcAft>
+            </a:pPr>
+            <a:r>
+              <a:rPr sz="1300">
+                <a:solidFill>
+                  <a:srgbClr val="3D5466"/>
+                </a:solidFill>
+                <a:latin typeface="Arial"/>
+              </a:rPr>
+              <a:t>▸  agree-Funktion, die ich morgen früh ausprobiere:</a:t>
+            </a:r>
+          </a:p>
+        </p:txBody>
+      </p:sp>
+      <p:sp>
+        <p:nvSpPr>
+          <p:cNvPr id="9" name="Rectangle 8"/>
           <p:cNvSpPr/>
           <p:nvPr/>
         </p:nvSpPr>
@@ -5878,7 +5941,7 @@
       </p:sp>
       <p:sp>
         <p:nvSpPr>
-          <p:cNvPr id="9" name="TextBox 8"/>
+          <p:cNvPr id="10" name="TextBox 9"/>
           <p:cNvSpPr txBox="1"/>
           <p:nvPr/>
         </p:nvSpPr>
@@ -5907,6 +5970,1263 @@
                 <a:latin typeface="JetBrains Mono"/>
               </a:rPr>
               <a:t>Benedikt Zoller Coaching  ·  FKB Campus  ·  M17</a:t>
+            </a:r>
+          </a:p>
+        </p:txBody>
+      </p:sp>
+    </p:spTree>
+  </p:cSld>
+  <p:clrMapOvr>
+    <a:masterClrMapping/>
+  </p:clrMapOvr>
+</p:sld>
+</file>
+
+<file path=ppt/slides/slide13.xml><?xml version="1.0" encoding="utf-8"?>
+<p:sld xmlns:a="http://schemas.openxmlformats.org/drawingml/2006/main" xmlns:p="http://schemas.openxmlformats.org/presentationml/2006/main" xmlns:r="http://schemas.openxmlformats.org/officeDocument/2006/relationships">
+  <p:cSld>
+    <p:spTree>
+      <p:nvGrpSpPr>
+        <p:cNvPr id="1" name=""/>
+        <p:cNvGrpSpPr/>
+        <p:nvPr/>
+      </p:nvGrpSpPr>
+      <p:grpSpPr/>
+      <p:sp>
+        <p:nvSpPr>
+          <p:cNvPr id="2" name="Rectangle 1"/>
+          <p:cNvSpPr/>
+          <p:nvPr/>
+        </p:nvSpPr>
+        <p:spPr>
+          <a:xfrm>
+            <a:off x="0" y="0"/>
+            <a:ext cx="12188952" cy="6858000"/>
+          </a:xfrm>
+          <a:prstGeom prst="rect">
+            <a:avLst/>
+          </a:prstGeom>
+          <a:solidFill>
+            <a:srgbClr val="FFFFFF"/>
+          </a:solidFill>
+          <a:ln>
+            <a:noFill/>
+          </a:ln>
+        </p:spPr>
+        <p:style>
+          <a:lnRef idx="1">
+            <a:schemeClr val="accent1"/>
+          </a:lnRef>
+          <a:fillRef idx="3">
+            <a:schemeClr val="accent1"/>
+          </a:fillRef>
+          <a:effectRef idx="2">
+            <a:schemeClr val="accent1"/>
+          </a:effectRef>
+          <a:fontRef idx="minor">
+            <a:schemeClr val="lt1"/>
+          </a:fontRef>
+        </p:style>
+        <p:txBody>
+          <a:bodyPr rtlCol="0" anchor="ctr"/>
+          <a:lstStyle/>
+          <a:p>
+            <a:pPr algn="ctr"/>
+          </a:p>
+        </p:txBody>
+      </p:sp>
+      <p:sp>
+        <p:nvSpPr>
+          <p:cNvPr id="3" name="Rectangle 2"/>
+          <p:cNvSpPr/>
+          <p:nvPr/>
+        </p:nvSpPr>
+        <p:spPr>
+          <a:xfrm>
+            <a:off x="0" y="0"/>
+            <a:ext cx="12188952" cy="50292"/>
+          </a:xfrm>
+          <a:prstGeom prst="rect">
+            <a:avLst/>
+          </a:prstGeom>
+          <a:solidFill>
+            <a:srgbClr val="1F2C56"/>
+          </a:solidFill>
+          <a:ln>
+            <a:noFill/>
+          </a:ln>
+        </p:spPr>
+        <p:style>
+          <a:lnRef idx="1">
+            <a:schemeClr val="accent1"/>
+          </a:lnRef>
+          <a:fillRef idx="3">
+            <a:schemeClr val="accent1"/>
+          </a:fillRef>
+          <a:effectRef idx="2">
+            <a:schemeClr val="accent1"/>
+          </a:effectRef>
+          <a:fontRef idx="minor">
+            <a:schemeClr val="lt1"/>
+          </a:fontRef>
+        </p:style>
+        <p:txBody>
+          <a:bodyPr rtlCol="0" anchor="ctr"/>
+          <a:lstStyle/>
+          <a:p>
+            <a:pPr algn="ctr"/>
+          </a:p>
+        </p:txBody>
+      </p:sp>
+      <p:sp>
+        <p:nvSpPr>
+          <p:cNvPr id="4" name="TextBox 3"/>
+          <p:cNvSpPr txBox="1"/>
+          <p:nvPr/>
+        </p:nvSpPr>
+        <p:spPr>
+          <a:xfrm>
+            <a:off x="685800" y="109728"/>
+            <a:ext cx="10817352" cy="228600"/>
+          </a:xfrm>
+          <a:prstGeom prst="rect">
+            <a:avLst/>
+          </a:prstGeom>
+          <a:noFill/>
+        </p:spPr>
+        <p:txBody>
+          <a:bodyPr wrap="none">
+            <a:spAutoFit/>
+          </a:bodyPr>
+          <a:lstStyle/>
+          <a:p>
+            <a:pPr algn="l"/>
+            <a:r>
+              <a:rPr sz="750">
+                <a:solidFill>
+                  <a:srgbClr val="78808C"/>
+                </a:solidFill>
+                <a:latin typeface="JetBrains Mono"/>
+              </a:rPr>
+              <a:t>M17  ·  ÜBERSICHT</a:t>
+            </a:r>
+          </a:p>
+        </p:txBody>
+      </p:sp>
+      <p:sp>
+        <p:nvSpPr>
+          <p:cNvPr id="5" name="TextBox 4"/>
+          <p:cNvSpPr txBox="1"/>
+          <p:nvPr/>
+        </p:nvSpPr>
+        <p:spPr>
+          <a:xfrm>
+            <a:off x="685800" y="502920"/>
+            <a:ext cx="10817352" cy="594360"/>
+          </a:xfrm>
+          <a:prstGeom prst="rect">
+            <a:avLst/>
+          </a:prstGeom>
+          <a:noFill/>
+        </p:spPr>
+        <p:txBody>
+          <a:bodyPr wrap="square">
+            <a:spAutoFit/>
+          </a:bodyPr>
+          <a:lstStyle/>
+          <a:p>
+            <a:pPr algn="l"/>
+            <a:r>
+              <a:rPr sz="2000" b="1" i="0">
+                <a:solidFill>
+                  <a:srgbClr val="1F2C56"/>
+                </a:solidFill>
+                <a:latin typeface="Source Serif 4"/>
+              </a:rPr>
+              <a:t>Arbeitsblatt A: Mein agree-Selbstcheck</a:t>
+            </a:r>
+          </a:p>
+        </p:txBody>
+      </p:sp>
+      <p:sp>
+        <p:nvSpPr>
+          <p:cNvPr id="6" name="Rectangle 5"/>
+          <p:cNvSpPr/>
+          <p:nvPr/>
+        </p:nvSpPr>
+        <p:spPr>
+          <a:xfrm>
+            <a:off x="685800" y="1143000"/>
+            <a:ext cx="10817352" cy="25400"/>
+          </a:xfrm>
+          <a:prstGeom prst="rect">
+            <a:avLst/>
+          </a:prstGeom>
+          <a:solidFill>
+            <a:srgbClr val="D9C089"/>
+          </a:solidFill>
+          <a:ln>
+            <a:noFill/>
+          </a:ln>
+        </p:spPr>
+        <p:style>
+          <a:lnRef idx="1">
+            <a:schemeClr val="accent1"/>
+          </a:lnRef>
+          <a:fillRef idx="3">
+            <a:schemeClr val="accent1"/>
+          </a:fillRef>
+          <a:effectRef idx="2">
+            <a:schemeClr val="accent1"/>
+          </a:effectRef>
+          <a:fontRef idx="minor">
+            <a:schemeClr val="lt1"/>
+          </a:fontRef>
+        </p:style>
+        <p:txBody>
+          <a:bodyPr rtlCol="0" anchor="ctr"/>
+          <a:lstStyle/>
+          <a:p>
+            <a:pPr algn="ctr"/>
+          </a:p>
+        </p:txBody>
+      </p:sp>
+      <p:graphicFrame>
+        <p:nvGraphicFramePr>
+          <p:cNvPr id="7" name="Table 6"/>
+          <p:cNvGraphicFramePr>
+            <a:graphicFrameLocks noGrp="1"/>
+          </p:cNvGraphicFramePr>
+          <p:nvPr/>
+        </p:nvGraphicFramePr>
+        <p:xfrm>
+          <a:off x="685800" y="1417320"/>
+          <a:ext cx="10817352" cy="3072384"/>
+        </p:xfrm>
+        <a:graphic>
+          <a:graphicData uri="http://schemas.openxmlformats.org/drawingml/2006/table">
+            <a:tbl>
+              <a:tblPr firstRow="1" bandRow="1">
+                <a:tableStyleId>{5C22544A-7EE6-4342-B048-85BDC9FD1C3A}</a:tableStyleId>
+              </a:tblPr>
+              <a:tblGrid>
+                <a:gridCol w="3605784"/>
+                <a:gridCol w="3605784"/>
+                <a:gridCol w="3605784"/>
+              </a:tblGrid>
+              <a:tr h="384048">
+                <a:tc>
+                  <a:txBody>
+                    <a:bodyPr/>
+                    <a:lstStyle/>
+                    <a:p>
+                      <a:r>
+                        <a:rPr sz="1100" b="1">
+                          <a:solidFill>
+                            <a:srgbClr val="FFFFFF"/>
+                          </a:solidFill>
+                          <a:latin typeface="Arial"/>
+                        </a:rPr>
+                        <a:t>agree-Bereich</a:t>
+                      </a:r>
+                    </a:p>
+                  </a:txBody>
+                  <a:tcPr>
+                    <a:solidFill>
+                      <a:srgbClr val="1F2C56"/>
+                    </a:solidFill>
+                  </a:tcPr>
+                </a:tc>
+                <a:tc>
+                  <a:txBody>
+                    <a:bodyPr/>
+                    <a:lstStyle/>
+                    <a:p>
+                      <a:r>
+                        <a:rPr sz="1100" b="1">
+                          <a:solidFill>
+                            <a:srgbClr val="FFFFFF"/>
+                          </a:solidFill>
+                          <a:latin typeface="Arial"/>
+                        </a:rPr>
+                        <a:t>Meine Nutzung (1–5)</a:t>
+                      </a:r>
+                    </a:p>
+                  </a:txBody>
+                  <a:tcPr>
+                    <a:solidFill>
+                      <a:srgbClr val="1F2C56"/>
+                    </a:solidFill>
+                  </a:tcPr>
+                </a:tc>
+                <a:tc>
+                  <a:txBody>
+                    <a:bodyPr/>
+                    <a:lstStyle/>
+                    <a:p>
+                      <a:r>
+                        <a:rPr sz="1100" b="1">
+                          <a:solidFill>
+                            <a:srgbClr val="FFFFFF"/>
+                          </a:solidFill>
+                          <a:latin typeface="Arial"/>
+                        </a:rPr>
+                        <a:t>Wichtigste Verbesserung</a:t>
+                      </a:r>
+                    </a:p>
+                  </a:txBody>
+                  <a:tcPr>
+                    <a:solidFill>
+                      <a:srgbClr val="1F2C56"/>
+                    </a:solidFill>
+                  </a:tcPr>
+                </a:tc>
+              </a:tr>
+              <a:tr h="384048">
+                <a:tc>
+                  <a:txBody>
+                    <a:bodyPr/>
+                    <a:lstStyle/>
+                    <a:p>
+                      <a:r>
+                        <a:rPr sz="1050">
+                          <a:solidFill>
+                            <a:srgbClr val="3D5466"/>
+                          </a:solidFill>
+                          <a:latin typeface="Arial"/>
+                        </a:rPr>
+                        <a:t>CRM / Kundenprofil</a:t>
+                      </a:r>
+                    </a:p>
+                  </a:txBody>
+                  <a:tcPr/>
+                </a:tc>
+                <a:tc>
+                  <a:txBody>
+                    <a:bodyPr/>
+                    <a:lstStyle/>
+                    <a:p/>
+                  </a:txBody>
+                  <a:tcPr/>
+                </a:tc>
+                <a:tc>
+                  <a:txBody>
+                    <a:bodyPr/>
+                    <a:lstStyle/>
+                    <a:p/>
+                  </a:txBody>
+                  <a:tcPr/>
+                </a:tc>
+              </a:tr>
+              <a:tr h="384048">
+                <a:tc>
+                  <a:txBody>
+                    <a:bodyPr/>
+                    <a:lstStyle/>
+                    <a:p>
+                      <a:r>
+                        <a:rPr sz="1050">
+                          <a:solidFill>
+                            <a:srgbClr val="3D5466"/>
+                          </a:solidFill>
+                          <a:latin typeface="Arial"/>
+                        </a:rPr>
+                        <a:t>UnternehmerDialog</a:t>
+                      </a:r>
+                    </a:p>
+                  </a:txBody>
+                  <a:tcPr/>
+                </a:tc>
+                <a:tc>
+                  <a:txBody>
+                    <a:bodyPr/>
+                    <a:lstStyle/>
+                    <a:p/>
+                  </a:txBody>
+                  <a:tcPr/>
+                </a:tc>
+                <a:tc>
+                  <a:txBody>
+                    <a:bodyPr/>
+                    <a:lstStyle/>
+                    <a:p/>
+                  </a:txBody>
+                  <a:tcPr/>
+                </a:tc>
+              </a:tr>
+              <a:tr h="384048">
+                <a:tc>
+                  <a:txBody>
+                    <a:bodyPr/>
+                    <a:lstStyle/>
+                    <a:p>
+                      <a:r>
+                        <a:rPr sz="1050">
+                          <a:solidFill>
+                            <a:srgbClr val="3D5466"/>
+                          </a:solidFill>
+                          <a:latin typeface="Arial"/>
+                        </a:rPr>
+                        <a:t>Kreditbearbeitung / Prolongation</a:t>
+                      </a:r>
+                    </a:p>
+                  </a:txBody>
+                  <a:tcPr/>
+                </a:tc>
+                <a:tc>
+                  <a:txBody>
+                    <a:bodyPr/>
+                    <a:lstStyle/>
+                    <a:p/>
+                  </a:txBody>
+                  <a:tcPr/>
+                </a:tc>
+                <a:tc>
+                  <a:txBody>
+                    <a:bodyPr/>
+                    <a:lstStyle/>
+                    <a:p/>
+                  </a:txBody>
+                  <a:tcPr/>
+                </a:tc>
+              </a:tr>
+              <a:tr h="384048">
+                <a:tc>
+                  <a:txBody>
+                    <a:bodyPr/>
+                    <a:lstStyle/>
+                    <a:p>
+                      <a:r>
+                        <a:rPr sz="1050">
+                          <a:solidFill>
+                            <a:srgbClr val="3D5466"/>
+                          </a:solidFill>
+                          <a:latin typeface="Arial"/>
+                        </a:rPr>
+                        <a:t>Controlling (NMZ, DB-Cockpit)</a:t>
+                      </a:r>
+                    </a:p>
+                  </a:txBody>
+                  <a:tcPr/>
+                </a:tc>
+                <a:tc>
+                  <a:txBody>
+                    <a:bodyPr/>
+                    <a:lstStyle/>
+                    <a:p/>
+                  </a:txBody>
+                  <a:tcPr/>
+                </a:tc>
+                <a:tc>
+                  <a:txBody>
+                    <a:bodyPr/>
+                    <a:lstStyle/>
+                    <a:p/>
+                  </a:txBody>
+                  <a:tcPr/>
+                </a:tc>
+              </a:tr>
+              <a:tr h="384048">
+                <a:tc>
+                  <a:txBody>
+                    <a:bodyPr/>
+                    <a:lstStyle/>
+                    <a:p>
+                      <a:r>
+                        <a:rPr sz="1050">
+                          <a:solidFill>
+                            <a:srgbClr val="3D5466"/>
+                          </a:solidFill>
+                          <a:latin typeface="Arial"/>
+                        </a:rPr>
+                        <a:t>Verbundpartner-Cockpit</a:t>
+                      </a:r>
+                    </a:p>
+                  </a:txBody>
+                  <a:tcPr/>
+                </a:tc>
+                <a:tc>
+                  <a:txBody>
+                    <a:bodyPr/>
+                    <a:lstStyle/>
+                    <a:p/>
+                  </a:txBody>
+                  <a:tcPr/>
+                </a:tc>
+                <a:tc>
+                  <a:txBody>
+                    <a:bodyPr/>
+                    <a:lstStyle/>
+                    <a:p/>
+                  </a:txBody>
+                  <a:tcPr/>
+                </a:tc>
+              </a:tr>
+              <a:tr h="384048">
+                <a:tc>
+                  <a:txBody>
+                    <a:bodyPr/>
+                    <a:lstStyle/>
+                    <a:p>
+                      <a:r>
+                        <a:rPr sz="1050">
+                          <a:solidFill>
+                            <a:srgbClr val="3D5466"/>
+                          </a:solidFill>
+                          <a:latin typeface="Arial"/>
+                        </a:rPr>
+                        <a:t>Frühwarnliste</a:t>
+                      </a:r>
+                    </a:p>
+                  </a:txBody>
+                  <a:tcPr/>
+                </a:tc>
+                <a:tc>
+                  <a:txBody>
+                    <a:bodyPr/>
+                    <a:lstStyle/>
+                    <a:p/>
+                  </a:txBody>
+                  <a:tcPr/>
+                </a:tc>
+                <a:tc>
+                  <a:txBody>
+                    <a:bodyPr/>
+                    <a:lstStyle/>
+                    <a:p/>
+                  </a:txBody>
+                  <a:tcPr/>
+                </a:tc>
+              </a:tr>
+              <a:tr h="384048">
+                <a:tc>
+                  <a:txBody>
+                    <a:bodyPr/>
+                    <a:lstStyle/>
+                    <a:p>
+                      <a:r>
+                        <a:rPr sz="1050">
+                          <a:solidFill>
+                            <a:srgbClr val="3D5466"/>
+                          </a:solidFill>
+                          <a:latin typeface="Arial"/>
+                        </a:rPr>
+                        <a:t>Aktivitäten / Aufgabenverwaltung</a:t>
+                      </a:r>
+                    </a:p>
+                  </a:txBody>
+                  <a:tcPr/>
+                </a:tc>
+                <a:tc>
+                  <a:txBody>
+                    <a:bodyPr/>
+                    <a:lstStyle/>
+                    <a:p/>
+                  </a:txBody>
+                  <a:tcPr/>
+                </a:tc>
+                <a:tc>
+                  <a:txBody>
+                    <a:bodyPr/>
+                    <a:lstStyle/>
+                    <a:p/>
+                  </a:txBody>
+                  <a:tcPr/>
+                </a:tc>
+              </a:tr>
+            </a:tbl>
+          </a:graphicData>
+        </a:graphic>
+      </p:graphicFrame>
+      <p:sp>
+        <p:nvSpPr>
+          <p:cNvPr id="8" name="Rectangle 7"/>
+          <p:cNvSpPr/>
+          <p:nvPr/>
+        </p:nvSpPr>
+        <p:spPr>
+          <a:xfrm>
+            <a:off x="0" y="6510528"/>
+            <a:ext cx="12188952" cy="347472"/>
+          </a:xfrm>
+          <a:prstGeom prst="rect">
+            <a:avLst/>
+          </a:prstGeom>
+          <a:solidFill>
+            <a:srgbClr val="0A1937"/>
+          </a:solidFill>
+          <a:ln>
+            <a:noFill/>
+          </a:ln>
+        </p:spPr>
+        <p:style>
+          <a:lnRef idx="1">
+            <a:schemeClr val="accent1"/>
+          </a:lnRef>
+          <a:fillRef idx="3">
+            <a:schemeClr val="accent1"/>
+          </a:fillRef>
+          <a:effectRef idx="2">
+            <a:schemeClr val="accent1"/>
+          </a:effectRef>
+          <a:fontRef idx="minor">
+            <a:schemeClr val="lt1"/>
+          </a:fontRef>
+        </p:style>
+        <p:txBody>
+          <a:bodyPr rtlCol="0" anchor="ctr"/>
+          <a:lstStyle/>
+          <a:p>
+            <a:pPr algn="ctr"/>
+          </a:p>
+        </p:txBody>
+      </p:sp>
+      <p:sp>
+        <p:nvSpPr>
+          <p:cNvPr id="9" name="TextBox 8"/>
+          <p:cNvSpPr txBox="1"/>
+          <p:nvPr/>
+        </p:nvSpPr>
+        <p:spPr>
+          <a:xfrm>
+            <a:off x="685800" y="6583680"/>
+            <a:ext cx="6490411" cy="256032"/>
+          </a:xfrm>
+          <a:prstGeom prst="rect">
+            <a:avLst/>
+          </a:prstGeom>
+          <a:noFill/>
+        </p:spPr>
+        <p:txBody>
+          <a:bodyPr wrap="none">
+            <a:spAutoFit/>
+          </a:bodyPr>
+          <a:lstStyle/>
+          <a:p>
+            <a:pPr algn="l"/>
+            <a:r>
+              <a:rPr sz="700">
+                <a:solidFill>
+                  <a:srgbClr val="A0B4D2"/>
+                </a:solidFill>
+                <a:latin typeface="JetBrains Mono"/>
+              </a:rPr>
+              <a:t>Benedikt Zoller Coaching  ·  FKB Campus  ·  M17</a:t>
+            </a:r>
+          </a:p>
+        </p:txBody>
+      </p:sp>
+      <p:sp>
+        <p:nvSpPr>
+          <p:cNvPr id="10" name="TextBox 9"/>
+          <p:cNvSpPr txBox="1"/>
+          <p:nvPr/>
+        </p:nvSpPr>
+        <p:spPr>
+          <a:xfrm>
+            <a:off x="7176211" y="6583680"/>
+            <a:ext cx="4326940" cy="256032"/>
+          </a:xfrm>
+          <a:prstGeom prst="rect">
+            <a:avLst/>
+          </a:prstGeom>
+          <a:noFill/>
+        </p:spPr>
+        <p:txBody>
+          <a:bodyPr wrap="none">
+            <a:spAutoFit/>
+          </a:bodyPr>
+          <a:lstStyle/>
+          <a:p>
+            <a:pPr algn="r"/>
+            <a:r>
+              <a:rPr sz="700">
+                <a:solidFill>
+                  <a:srgbClr val="A0B4D2"/>
+                </a:solidFill>
+                <a:latin typeface="JetBrains Mono"/>
+              </a:rPr>
+              <a:t>Übersicht</a:t>
+            </a:r>
+          </a:p>
+        </p:txBody>
+      </p:sp>
+    </p:spTree>
+  </p:cSld>
+  <p:clrMapOvr>
+    <a:masterClrMapping/>
+  </p:clrMapOvr>
+</p:sld>
+</file>
+
+<file path=ppt/slides/slide14.xml><?xml version="1.0" encoding="utf-8"?>
+<p:sld xmlns:a="http://schemas.openxmlformats.org/drawingml/2006/main" xmlns:p="http://schemas.openxmlformats.org/presentationml/2006/main" xmlns:r="http://schemas.openxmlformats.org/officeDocument/2006/relationships">
+  <p:cSld>
+    <p:spTree>
+      <p:nvGrpSpPr>
+        <p:cNvPr id="1" name=""/>
+        <p:cNvGrpSpPr/>
+        <p:nvPr/>
+      </p:nvGrpSpPr>
+      <p:grpSpPr/>
+      <p:sp>
+        <p:nvSpPr>
+          <p:cNvPr id="2" name="Rectangle 1"/>
+          <p:cNvSpPr/>
+          <p:nvPr/>
+        </p:nvSpPr>
+        <p:spPr>
+          <a:xfrm>
+            <a:off x="0" y="0"/>
+            <a:ext cx="12188952" cy="6858000"/>
+          </a:xfrm>
+          <a:prstGeom prst="rect">
+            <a:avLst/>
+          </a:prstGeom>
+          <a:solidFill>
+            <a:srgbClr val="FFFFFF"/>
+          </a:solidFill>
+          <a:ln>
+            <a:noFill/>
+          </a:ln>
+        </p:spPr>
+        <p:style>
+          <a:lnRef idx="1">
+            <a:schemeClr val="accent1"/>
+          </a:lnRef>
+          <a:fillRef idx="3">
+            <a:schemeClr val="accent1"/>
+          </a:fillRef>
+          <a:effectRef idx="2">
+            <a:schemeClr val="accent1"/>
+          </a:effectRef>
+          <a:fontRef idx="minor">
+            <a:schemeClr val="lt1"/>
+          </a:fontRef>
+        </p:style>
+        <p:txBody>
+          <a:bodyPr rtlCol="0" anchor="ctr"/>
+          <a:lstStyle/>
+          <a:p>
+            <a:pPr algn="ctr"/>
+          </a:p>
+        </p:txBody>
+      </p:sp>
+      <p:sp>
+        <p:nvSpPr>
+          <p:cNvPr id="3" name="Rectangle 2"/>
+          <p:cNvSpPr/>
+          <p:nvPr/>
+        </p:nvSpPr>
+        <p:spPr>
+          <a:xfrm>
+            <a:off x="0" y="0"/>
+            <a:ext cx="12188952" cy="50292"/>
+          </a:xfrm>
+          <a:prstGeom prst="rect">
+            <a:avLst/>
+          </a:prstGeom>
+          <a:solidFill>
+            <a:srgbClr val="1F2C56"/>
+          </a:solidFill>
+          <a:ln>
+            <a:noFill/>
+          </a:ln>
+        </p:spPr>
+        <p:style>
+          <a:lnRef idx="1">
+            <a:schemeClr val="accent1"/>
+          </a:lnRef>
+          <a:fillRef idx="3">
+            <a:schemeClr val="accent1"/>
+          </a:fillRef>
+          <a:effectRef idx="2">
+            <a:schemeClr val="accent1"/>
+          </a:effectRef>
+          <a:fontRef idx="minor">
+            <a:schemeClr val="lt1"/>
+          </a:fontRef>
+        </p:style>
+        <p:txBody>
+          <a:bodyPr rtlCol="0" anchor="ctr"/>
+          <a:lstStyle/>
+          <a:p>
+            <a:pPr algn="ctr"/>
+          </a:p>
+        </p:txBody>
+      </p:sp>
+      <p:sp>
+        <p:nvSpPr>
+          <p:cNvPr id="4" name="TextBox 3"/>
+          <p:cNvSpPr txBox="1"/>
+          <p:nvPr/>
+        </p:nvSpPr>
+        <p:spPr>
+          <a:xfrm>
+            <a:off x="685800" y="109728"/>
+            <a:ext cx="10817352" cy="228600"/>
+          </a:xfrm>
+          <a:prstGeom prst="rect">
+            <a:avLst/>
+          </a:prstGeom>
+          <a:noFill/>
+        </p:spPr>
+        <p:txBody>
+          <a:bodyPr wrap="none">
+            <a:spAutoFit/>
+          </a:bodyPr>
+          <a:lstStyle/>
+          <a:p>
+            <a:pPr algn="l"/>
+            <a:r>
+              <a:rPr sz="750">
+                <a:solidFill>
+                  <a:srgbClr val="78808C"/>
+                </a:solidFill>
+                <a:latin typeface="JetBrains Mono"/>
+              </a:rPr>
+              <a:t>M17  ·  ÜBERSICHT</a:t>
+            </a:r>
+          </a:p>
+        </p:txBody>
+      </p:sp>
+      <p:sp>
+        <p:nvSpPr>
+          <p:cNvPr id="5" name="TextBox 4"/>
+          <p:cNvSpPr txBox="1"/>
+          <p:nvPr/>
+        </p:nvSpPr>
+        <p:spPr>
+          <a:xfrm>
+            <a:off x="685800" y="502920"/>
+            <a:ext cx="10817352" cy="594360"/>
+          </a:xfrm>
+          <a:prstGeom prst="rect">
+            <a:avLst/>
+          </a:prstGeom>
+          <a:noFill/>
+        </p:spPr>
+        <p:txBody>
+          <a:bodyPr wrap="square">
+            <a:spAutoFit/>
+          </a:bodyPr>
+          <a:lstStyle/>
+          <a:p>
+            <a:pPr algn="l"/>
+            <a:r>
+              <a:rPr sz="2000" b="1" i="0">
+                <a:solidFill>
+                  <a:srgbClr val="1F2C56"/>
+                </a:solidFill>
+                <a:latin typeface="Source Serif 4"/>
+              </a:rPr>
+              <a:t>Arbeitsblatt B: Workflow-Optimierungsplan</a:t>
+            </a:r>
+          </a:p>
+        </p:txBody>
+      </p:sp>
+      <p:sp>
+        <p:nvSpPr>
+          <p:cNvPr id="6" name="Rectangle 5"/>
+          <p:cNvSpPr/>
+          <p:nvPr/>
+        </p:nvSpPr>
+        <p:spPr>
+          <a:xfrm>
+            <a:off x="685800" y="1143000"/>
+            <a:ext cx="10817352" cy="25400"/>
+          </a:xfrm>
+          <a:prstGeom prst="rect">
+            <a:avLst/>
+          </a:prstGeom>
+          <a:solidFill>
+            <a:srgbClr val="D9C089"/>
+          </a:solidFill>
+          <a:ln>
+            <a:noFill/>
+          </a:ln>
+        </p:spPr>
+        <p:style>
+          <a:lnRef idx="1">
+            <a:schemeClr val="accent1"/>
+          </a:lnRef>
+          <a:fillRef idx="3">
+            <a:schemeClr val="accent1"/>
+          </a:fillRef>
+          <a:effectRef idx="2">
+            <a:schemeClr val="accent1"/>
+          </a:effectRef>
+          <a:fontRef idx="minor">
+            <a:schemeClr val="lt1"/>
+          </a:fontRef>
+        </p:style>
+        <p:txBody>
+          <a:bodyPr rtlCol="0" anchor="ctr"/>
+          <a:lstStyle/>
+          <a:p>
+            <a:pPr algn="ctr"/>
+          </a:p>
+        </p:txBody>
+      </p:sp>
+      <p:graphicFrame>
+        <p:nvGraphicFramePr>
+          <p:cNvPr id="7" name="Table 6"/>
+          <p:cNvGraphicFramePr>
+            <a:graphicFrameLocks noGrp="1"/>
+          </p:cNvGraphicFramePr>
+          <p:nvPr/>
+        </p:nvGraphicFramePr>
+        <p:xfrm>
+          <a:off x="685800" y="1417320"/>
+          <a:ext cx="10817352" cy="1536192"/>
+        </p:xfrm>
+        <a:graphic>
+          <a:graphicData uri="http://schemas.openxmlformats.org/drawingml/2006/table">
+            <a:tbl>
+              <a:tblPr firstRow="1" bandRow="1">
+                <a:tableStyleId>{5C22544A-7EE6-4342-B048-85BDC9FD1C3A}</a:tableStyleId>
+              </a:tblPr>
+              <a:tblGrid>
+                <a:gridCol w="2704338"/>
+                <a:gridCol w="2704338"/>
+                <a:gridCol w="2704338"/>
+                <a:gridCol w="2704338"/>
+              </a:tblGrid>
+              <a:tr h="384048">
+                <a:tc>
+                  <a:txBody>
+                    <a:bodyPr/>
+                    <a:lstStyle/>
+                    <a:p>
+                      <a:r>
+                        <a:rPr sz="1100" b="1">
+                          <a:solidFill>
+                            <a:srgbClr val="FFFFFF"/>
+                          </a:solidFill>
+                          <a:latin typeface="Arial"/>
+                        </a:rPr>
+                        <a:t>Phase</a:t>
+                      </a:r>
+                    </a:p>
+                  </a:txBody>
+                  <a:tcPr>
+                    <a:solidFill>
+                      <a:srgbClr val="1F2C56"/>
+                    </a:solidFill>
+                  </a:tcPr>
+                </a:tc>
+                <a:tc>
+                  <a:txBody>
+                    <a:bodyPr/>
+                    <a:lstStyle/>
+                    <a:p>
+                      <a:r>
+                        <a:rPr sz="1100" b="1">
+                          <a:solidFill>
+                            <a:srgbClr val="FFFFFF"/>
+                          </a:solidFill>
+                          <a:latin typeface="Arial"/>
+                        </a:rPr>
+                        <a:t>Aktuell</a:t>
+                      </a:r>
+                    </a:p>
+                  </a:txBody>
+                  <a:tcPr>
+                    <a:solidFill>
+                      <a:srgbClr val="1F2C56"/>
+                    </a:solidFill>
+                  </a:tcPr>
+                </a:tc>
+                <a:tc>
+                  <a:txBody>
+                    <a:bodyPr/>
+                    <a:lstStyle/>
+                    <a:p>
+                      <a:r>
+                        <a:rPr sz="1100" b="1">
+                          <a:solidFill>
+                            <a:srgbClr val="FFFFFF"/>
+                          </a:solidFill>
+                          <a:latin typeface="Arial"/>
+                        </a:rPr>
+                        <a:t>Ziel nach Optimierung</a:t>
+                      </a:r>
+                    </a:p>
+                  </a:txBody>
+                  <a:tcPr>
+                    <a:solidFill>
+                      <a:srgbClr val="1F2C56"/>
+                    </a:solidFill>
+                  </a:tcPr>
+                </a:tc>
+                <a:tc>
+                  <a:txBody>
+                    <a:bodyPr/>
+                    <a:lstStyle/>
+                    <a:p>
+                      <a:r>
+                        <a:rPr sz="1100" b="1">
+                          <a:solidFill>
+                            <a:srgbClr val="FFFFFF"/>
+                          </a:solidFill>
+                          <a:latin typeface="Arial"/>
+                        </a:rPr>
+                        <a:t>Maßnahme</a:t>
+                      </a:r>
+                    </a:p>
+                  </a:txBody>
+                  <a:tcPr>
+                    <a:solidFill>
+                      <a:srgbClr val="1F2C56"/>
+                    </a:solidFill>
+                  </a:tcPr>
+                </a:tc>
+              </a:tr>
+              <a:tr h="384048">
+                <a:tc>
+                  <a:txBody>
+                    <a:bodyPr/>
+                    <a:lstStyle/>
+                    <a:p>
+                      <a:r>
+                        <a:rPr sz="1050">
+                          <a:solidFill>
+                            <a:srgbClr val="3D5466"/>
+                          </a:solidFill>
+                          <a:latin typeface="Arial"/>
+                        </a:rPr>
+                        <a:t>Vorbereitung</a:t>
+                      </a:r>
+                    </a:p>
+                  </a:txBody>
+                  <a:tcPr/>
+                </a:tc>
+                <a:tc>
+                  <a:txBody>
+                    <a:bodyPr/>
+                    <a:lstStyle/>
+                    <a:p/>
+                  </a:txBody>
+                  <a:tcPr/>
+                </a:tc>
+                <a:tc>
+                  <a:txBody>
+                    <a:bodyPr/>
+                    <a:lstStyle/>
+                    <a:p/>
+                  </a:txBody>
+                  <a:tcPr/>
+                </a:tc>
+                <a:tc>
+                  <a:txBody>
+                    <a:bodyPr/>
+                    <a:lstStyle/>
+                    <a:p/>
+                  </a:txBody>
+                  <a:tcPr/>
+                </a:tc>
+              </a:tr>
+              <a:tr h="384048">
+                <a:tc>
+                  <a:txBody>
+                    <a:bodyPr/>
+                    <a:lstStyle/>
+                    <a:p>
+                      <a:r>
+                        <a:rPr sz="1050">
+                          <a:solidFill>
+                            <a:srgbClr val="3D5466"/>
+                          </a:solidFill>
+                          <a:latin typeface="Arial"/>
+                        </a:rPr>
+                        <a:t>Nachbereitung</a:t>
+                      </a:r>
+                    </a:p>
+                  </a:txBody>
+                  <a:tcPr/>
+                </a:tc>
+                <a:tc>
+                  <a:txBody>
+                    <a:bodyPr/>
+                    <a:lstStyle/>
+                    <a:p/>
+                  </a:txBody>
+                  <a:tcPr/>
+                </a:tc>
+                <a:tc>
+                  <a:txBody>
+                    <a:bodyPr/>
+                    <a:lstStyle/>
+                    <a:p/>
+                  </a:txBody>
+                  <a:tcPr/>
+                </a:tc>
+                <a:tc>
+                  <a:txBody>
+                    <a:bodyPr/>
+                    <a:lstStyle/>
+                    <a:p/>
+                  </a:txBody>
+                  <a:tcPr/>
+                </a:tc>
+              </a:tr>
+              <a:tr h="384048">
+                <a:tc>
+                  <a:txBody>
+                    <a:bodyPr/>
+                    <a:lstStyle/>
+                    <a:p>
+                      <a:r>
+                        <a:rPr sz="1050">
+                          <a:solidFill>
+                            <a:srgbClr val="3D5466"/>
+                          </a:solidFill>
+                          <a:latin typeface="Arial"/>
+                        </a:rPr>
+                        <a:t>Reporting-Routine</a:t>
+                      </a:r>
+                    </a:p>
+                  </a:txBody>
+                  <a:tcPr/>
+                </a:tc>
+                <a:tc>
+                  <a:txBody>
+                    <a:bodyPr/>
+                    <a:lstStyle/>
+                    <a:p/>
+                  </a:txBody>
+                  <a:tcPr/>
+                </a:tc>
+                <a:tc>
+                  <a:txBody>
+                    <a:bodyPr/>
+                    <a:lstStyle/>
+                    <a:p/>
+                  </a:txBody>
+                  <a:tcPr/>
+                </a:tc>
+                <a:tc>
+                  <a:txBody>
+                    <a:bodyPr/>
+                    <a:lstStyle/>
+                    <a:p/>
+                  </a:txBody>
+                  <a:tcPr/>
+                </a:tc>
+              </a:tr>
+            </a:tbl>
+          </a:graphicData>
+        </a:graphic>
+      </p:graphicFrame>
+      <p:sp>
+        <p:nvSpPr>
+          <p:cNvPr id="8" name="Rectangle 7"/>
+          <p:cNvSpPr/>
+          <p:nvPr/>
+        </p:nvSpPr>
+        <p:spPr>
+          <a:xfrm>
+            <a:off x="0" y="6510528"/>
+            <a:ext cx="12188952" cy="347472"/>
+          </a:xfrm>
+          <a:prstGeom prst="rect">
+            <a:avLst/>
+          </a:prstGeom>
+          <a:solidFill>
+            <a:srgbClr val="0A1937"/>
+          </a:solidFill>
+          <a:ln>
+            <a:noFill/>
+          </a:ln>
+        </p:spPr>
+        <p:style>
+          <a:lnRef idx="1">
+            <a:schemeClr val="accent1"/>
+          </a:lnRef>
+          <a:fillRef idx="3">
+            <a:schemeClr val="accent1"/>
+          </a:fillRef>
+          <a:effectRef idx="2">
+            <a:schemeClr val="accent1"/>
+          </a:effectRef>
+          <a:fontRef idx="minor">
+            <a:schemeClr val="lt1"/>
+          </a:fontRef>
+        </p:style>
+        <p:txBody>
+          <a:bodyPr rtlCol="0" anchor="ctr"/>
+          <a:lstStyle/>
+          <a:p>
+            <a:pPr algn="ctr"/>
+          </a:p>
+        </p:txBody>
+      </p:sp>
+      <p:sp>
+        <p:nvSpPr>
+          <p:cNvPr id="9" name="TextBox 8"/>
+          <p:cNvSpPr txBox="1"/>
+          <p:nvPr/>
+        </p:nvSpPr>
+        <p:spPr>
+          <a:xfrm>
+            <a:off x="685800" y="6583680"/>
+            <a:ext cx="6490411" cy="256032"/>
+          </a:xfrm>
+          <a:prstGeom prst="rect">
+            <a:avLst/>
+          </a:prstGeom>
+          <a:noFill/>
+        </p:spPr>
+        <p:txBody>
+          <a:bodyPr wrap="none">
+            <a:spAutoFit/>
+          </a:bodyPr>
+          <a:lstStyle/>
+          <a:p>
+            <a:pPr algn="l"/>
+            <a:r>
+              <a:rPr sz="700">
+                <a:solidFill>
+                  <a:srgbClr val="A0B4D2"/>
+                </a:solidFill>
+                <a:latin typeface="JetBrains Mono"/>
+              </a:rPr>
+              <a:t>Benedikt Zoller Coaching  ·  FKB Campus  ·  M17</a:t>
+            </a:r>
+          </a:p>
+        </p:txBody>
+      </p:sp>
+      <p:sp>
+        <p:nvSpPr>
+          <p:cNvPr id="10" name="TextBox 9"/>
+          <p:cNvSpPr txBox="1"/>
+          <p:nvPr/>
+        </p:nvSpPr>
+        <p:spPr>
+          <a:xfrm>
+            <a:off x="7176211" y="6583680"/>
+            <a:ext cx="4326940" cy="256032"/>
+          </a:xfrm>
+          <a:prstGeom prst="rect">
+            <a:avLst/>
+          </a:prstGeom>
+          <a:noFill/>
+        </p:spPr>
+        <p:txBody>
+          <a:bodyPr wrap="none">
+            <a:spAutoFit/>
+          </a:bodyPr>
+          <a:lstStyle/>
+          <a:p>
+            <a:pPr algn="r"/>
+            <a:r>
+              <a:rPr sz="700">
+                <a:solidFill>
+                  <a:srgbClr val="A0B4D2"/>
+                </a:solidFill>
+                <a:latin typeface="JetBrains Mono"/>
+              </a:rPr>
+              <a:t>Übersicht</a:t>
             </a:r>
           </a:p>
         </p:txBody>
@@ -6824,7 +8144,7 @@
                 </a:solidFill>
                 <a:latin typeface="JetBrains Mono"/>
               </a:rPr>
-              <a:t>M17  ·  INHALT</a:t>
+              <a:t>AGENDA  ·  M17</a:t>
             </a:r>
           </a:p>
         </p:txBody>
@@ -6874,57 +8194,14 @@
       </p:sp>
       <p:sp>
         <p:nvSpPr>
-          <p:cNvPr id="6" name="Rectangle 5"/>
-          <p:cNvSpPr/>
+          <p:cNvPr id="6" name="TextBox 5"/>
+          <p:cNvSpPr txBox="1"/>
           <p:nvPr/>
         </p:nvSpPr>
         <p:spPr>
           <a:xfrm>
             <a:off x="685800" y="502920"/>
-            <a:ext cx="36576" cy="658368"/>
-          </a:xfrm>
-          <a:prstGeom prst="rect">
-            <a:avLst/>
-          </a:prstGeom>
-          <a:solidFill>
-            <a:srgbClr val="D9C089"/>
-          </a:solidFill>
-          <a:ln>
-            <a:noFill/>
-          </a:ln>
-        </p:spPr>
-        <p:style>
-          <a:lnRef idx="1">
-            <a:schemeClr val="accent1"/>
-          </a:lnRef>
-          <a:fillRef idx="3">
-            <a:schemeClr val="accent1"/>
-          </a:fillRef>
-          <a:effectRef idx="2">
-            <a:schemeClr val="accent1"/>
-          </a:effectRef>
-          <a:fontRef idx="minor">
-            <a:schemeClr val="lt1"/>
-          </a:fontRef>
-        </p:style>
-        <p:txBody>
-          <a:bodyPr rtlCol="0" anchor="ctr"/>
-          <a:lstStyle/>
-          <a:p>
-            <a:pPr algn="ctr"/>
-          </a:p>
-        </p:txBody>
-      </p:sp>
-      <p:sp>
-        <p:nvSpPr>
-          <p:cNvPr id="7" name="TextBox 6"/>
-          <p:cNvSpPr txBox="1"/>
-          <p:nvPr/>
-        </p:nvSpPr>
-        <p:spPr>
-          <a:xfrm>
-            <a:off x="813816" y="502920"/>
-            <a:ext cx="10634472" cy="685800"/>
+            <a:ext cx="10817352" cy="658368"/>
           </a:xfrm>
           <a:prstGeom prst="rect">
             <a:avLst/>
@@ -6939,27 +8216,27 @@
           <a:p>
             <a:pPr algn="l"/>
             <a:r>
-              <a:rPr sz="2400" b="1" i="0">
+              <a:rPr sz="2600" b="1" i="0">
                 <a:solidFill>
                   <a:srgbClr val="1F2C56"/>
                 </a:solidFill>
                 <a:latin typeface="Source Serif 4"/>
               </a:rPr>
-              <a:t>Die häufigsten agree-Fehler im Firmenkundenalltag</a:t>
-            </a:r>
-          </a:p>
-        </p:txBody>
-      </p:sp>
-      <p:sp>
-        <p:nvSpPr>
-          <p:cNvPr id="8" name="TextBox 7"/>
+              <a:t>So läuft das Modul</a:t>
+            </a:r>
+          </a:p>
+        </p:txBody>
+      </p:sp>
+      <p:sp>
+        <p:nvSpPr>
+          <p:cNvPr id="7" name="TextBox 6"/>
           <p:cNvSpPr txBox="1"/>
           <p:nvPr/>
         </p:nvSpPr>
         <p:spPr>
           <a:xfrm>
-            <a:off x="685800" y="1417320"/>
-            <a:ext cx="10817352" cy="5029200"/>
+            <a:off x="685800" y="1463040"/>
+            <a:ext cx="10817352" cy="4937760"/>
           </a:xfrm>
           <a:prstGeom prst="rect">
             <a:avLst/>
@@ -6977,17 +8254,35 @@
                 <a:spcPts val="400"/>
               </a:spcBef>
               <a:spcAft>
-                <a:spcPts val="200"/>
+                <a:spcPts val="100"/>
               </a:spcAft>
             </a:pPr>
             <a:r>
-              <a:rPr sz="1200">
+              <a:rPr sz="900">
+                <a:solidFill>
+                  <a:srgbClr val="78808C"/>
+                </a:solidFill>
+                <a:latin typeface="Consolas"/>
+              </a:rPr>
+              <a:t>00:00       </a:t>
+            </a:r>
+            <a:r>
+              <a:rPr sz="1200" b="1">
                 <a:solidFill>
                   <a:srgbClr val="3D5466"/>
                 </a:solidFill>
                 <a:latin typeface="Arial"/>
               </a:rPr>
-              <a:t>## 4.2 Effizienter Gesprächsworkflow: Vor – Während – Nach</a:t>
+              <a:t>  Einstieg: Zeitfresser-Umfrage</a:t>
+            </a:r>
+            <a:r>
+              <a:rPr sz="900">
+                <a:solidFill>
+                  <a:srgbClr val="78808C"/>
+                </a:solidFill>
+                <a:latin typeface="Arial"/>
+              </a:rPr>
+              <a:t>  ·  Blitzlicht</a:t>
             </a:r>
           </a:p>
           <a:p>
@@ -6996,24 +8291,366 @@
                 <a:spcPts val="400"/>
               </a:spcBef>
               <a:spcAft>
-                <a:spcPts val="200"/>
+                <a:spcPts val="100"/>
               </a:spcAft>
             </a:pPr>
             <a:r>
-              <a:rPr sz="1200">
+              <a:rPr sz="900">
+                <a:solidFill>
+                  <a:srgbClr val="78808C"/>
+                </a:solidFill>
+                <a:latin typeface="Consolas"/>
+              </a:rPr>
+              <a:t>00:10       </a:t>
+            </a:r>
+            <a:r>
+              <a:rPr sz="1200" b="1">
                 <a:solidFill>
                   <a:srgbClr val="3D5466"/>
                 </a:solidFill>
                 <a:latin typeface="Arial"/>
               </a:rPr>
-              <a:t>Der größte Effizienzgewinn entsteht nicht aus einzelnen Funktionen, sondern aus einem konsistenten Workflow, der agree konsequent in alle drei Gesprächsphasen einbindet.</a:t>
-            </a:r>
-          </a:p>
-        </p:txBody>
-      </p:sp>
-      <p:sp>
-        <p:nvSpPr>
-          <p:cNvPr id="9" name="Rectangle 8"/>
+              <a:t>  Theorie-Block</a:t>
+            </a:r>
+            <a:r>
+              <a:rPr sz="900">
+                <a:solidFill>
+                  <a:srgbClr val="78808C"/>
+                </a:solidFill>
+                <a:latin typeface="Arial"/>
+              </a:rPr>
+              <a:t>  ·  Vortrag + Folie</a:t>
+            </a:r>
+          </a:p>
+          <a:p>
+            <a:pPr>
+              <a:spcBef>
+                <a:spcPts val="400"/>
+              </a:spcBef>
+              <a:spcAft>
+                <a:spcPts val="100"/>
+              </a:spcAft>
+            </a:pPr>
+            <a:r>
+              <a:rPr sz="900">
+                <a:solidFill>
+                  <a:srgbClr val="78808C"/>
+                </a:solidFill>
+                <a:latin typeface="Consolas"/>
+              </a:rPr>
+              <a:t>00:25       </a:t>
+            </a:r>
+            <a:r>
+              <a:rPr sz="1200" b="1">
+                <a:solidFill>
+                  <a:srgbClr val="3D5466"/>
+                </a:solidFill>
+                <a:latin typeface="Arial"/>
+              </a:rPr>
+              <a:t>  Live-Demo I</a:t>
+            </a:r>
+            <a:r>
+              <a:rPr sz="900">
+                <a:solidFill>
+                  <a:srgbClr val="78808C"/>
+                </a:solidFill>
+                <a:latin typeface="Arial"/>
+              </a:rPr>
+              <a:t>  ·  Beamer-Demo</a:t>
+            </a:r>
+          </a:p>
+          <a:p>
+            <a:pPr>
+              <a:spcBef>
+                <a:spcPts val="400"/>
+              </a:spcBef>
+              <a:spcAft>
+                <a:spcPts val="100"/>
+              </a:spcAft>
+            </a:pPr>
+            <a:r>
+              <a:rPr sz="900">
+                <a:solidFill>
+                  <a:srgbClr val="78808C"/>
+                </a:solidFill>
+                <a:latin typeface="Consolas"/>
+              </a:rPr>
+              <a:t>00:40       </a:t>
+            </a:r>
+            <a:r>
+              <a:rPr sz="1200" b="1">
+                <a:solidFill>
+                  <a:srgbClr val="3D5466"/>
+                </a:solidFill>
+                <a:latin typeface="Arial"/>
+              </a:rPr>
+              <a:t>  Einzelübung I</a:t>
+            </a:r>
+            <a:r>
+              <a:rPr sz="900">
+                <a:solidFill>
+                  <a:srgbClr val="78808C"/>
+                </a:solidFill>
+                <a:latin typeface="Arial"/>
+              </a:rPr>
+              <a:t>  ·  agree-Einzelarbeit</a:t>
+            </a:r>
+          </a:p>
+          <a:p>
+            <a:pPr>
+              <a:spcBef>
+                <a:spcPts val="400"/>
+              </a:spcBef>
+              <a:spcAft>
+                <a:spcPts val="100"/>
+              </a:spcAft>
+            </a:pPr>
+            <a:r>
+              <a:rPr sz="900">
+                <a:solidFill>
+                  <a:srgbClr val="78808C"/>
+                </a:solidFill>
+                <a:latin typeface="Consolas"/>
+              </a:rPr>
+              <a:t>01:00       </a:t>
+            </a:r>
+            <a:r>
+              <a:rPr sz="1200" b="1">
+                <a:solidFill>
+                  <a:srgbClr val="3D5466"/>
+                </a:solidFill>
+                <a:latin typeface="Arial"/>
+              </a:rPr>
+              <a:t>  Pause</a:t>
+            </a:r>
+            <a:r>
+              <a:rPr sz="900">
+                <a:solidFill>
+                  <a:srgbClr val="78808C"/>
+                </a:solidFill>
+                <a:latin typeface="Arial"/>
+              </a:rPr>
+              <a:t>  ·  Pause</a:t>
+            </a:r>
+          </a:p>
+          <a:p>
+            <a:pPr>
+              <a:spcBef>
+                <a:spcPts val="400"/>
+              </a:spcBef>
+              <a:spcAft>
+                <a:spcPts val="100"/>
+              </a:spcAft>
+            </a:pPr>
+            <a:r>
+              <a:rPr sz="900">
+                <a:solidFill>
+                  <a:srgbClr val="78808C"/>
+                </a:solidFill>
+                <a:latin typeface="Consolas"/>
+              </a:rPr>
+              <a:t>01:05       </a:t>
+            </a:r>
+            <a:r>
+              <a:rPr sz="1200" b="1">
+                <a:solidFill>
+                  <a:srgbClr val="3D5466"/>
+                </a:solidFill>
+                <a:latin typeface="Arial"/>
+              </a:rPr>
+              <a:t>  Live-Demo II</a:t>
+            </a:r>
+            <a:r>
+              <a:rPr sz="900">
+                <a:solidFill>
+                  <a:srgbClr val="78808C"/>
+                </a:solidFill>
+                <a:latin typeface="Arial"/>
+              </a:rPr>
+              <a:t>  ·  Beamer-Demo</a:t>
+            </a:r>
+          </a:p>
+          <a:p>
+            <a:pPr>
+              <a:spcBef>
+                <a:spcPts val="400"/>
+              </a:spcBef>
+              <a:spcAft>
+                <a:spcPts val="100"/>
+              </a:spcAft>
+            </a:pPr>
+            <a:r>
+              <a:rPr sz="900">
+                <a:solidFill>
+                  <a:srgbClr val="78808C"/>
+                </a:solidFill>
+                <a:latin typeface="Consolas"/>
+              </a:rPr>
+              <a:t>01:15       </a:t>
+            </a:r>
+            <a:r>
+              <a:rPr sz="1200" b="1">
+                <a:solidFill>
+                  <a:srgbClr val="3D5466"/>
+                </a:solidFill>
+                <a:latin typeface="Arial"/>
+              </a:rPr>
+              <a:t>  Einzelübung II</a:t>
+            </a:r>
+            <a:r>
+              <a:rPr sz="900">
+                <a:solidFill>
+                  <a:srgbClr val="78808C"/>
+                </a:solidFill>
+                <a:latin typeface="Arial"/>
+              </a:rPr>
+              <a:t>  ·  agree-Einzelarbeit</a:t>
+            </a:r>
+          </a:p>
+          <a:p>
+            <a:pPr>
+              <a:spcBef>
+                <a:spcPts val="400"/>
+              </a:spcBef>
+              <a:spcAft>
+                <a:spcPts val="100"/>
+              </a:spcAft>
+            </a:pPr>
+            <a:r>
+              <a:rPr sz="900">
+                <a:solidFill>
+                  <a:srgbClr val="78808C"/>
+                </a:solidFill>
+                <a:latin typeface="Consolas"/>
+              </a:rPr>
+              <a:t>01:30       </a:t>
+            </a:r>
+            <a:r>
+              <a:rPr sz="1200" b="1">
+                <a:solidFill>
+                  <a:srgbClr val="3D5466"/>
+                </a:solidFill>
+                <a:latin typeface="Arial"/>
+              </a:rPr>
+              <a:t>  Reflexion: Meine Zeitfresser</a:t>
+            </a:r>
+            <a:r>
+              <a:rPr sz="900">
+                <a:solidFill>
+                  <a:srgbClr val="78808C"/>
+                </a:solidFill>
+                <a:latin typeface="Arial"/>
+              </a:rPr>
+              <a:t>  ·  Einzelarbeit</a:t>
+            </a:r>
+          </a:p>
+          <a:p>
+            <a:pPr>
+              <a:spcBef>
+                <a:spcPts val="400"/>
+              </a:spcBef>
+              <a:spcAft>
+                <a:spcPts val="100"/>
+              </a:spcAft>
+            </a:pPr>
+            <a:r>
+              <a:rPr sz="900">
+                <a:solidFill>
+                  <a:srgbClr val="78808C"/>
+                </a:solidFill>
+                <a:latin typeface="Consolas"/>
+              </a:rPr>
+              <a:t>01:35       </a:t>
+            </a:r>
+            <a:r>
+              <a:rPr sz="1200" b="1">
+                <a:solidFill>
+                  <a:srgbClr val="3D5466"/>
+                </a:solidFill>
+                <a:latin typeface="Arial"/>
+              </a:rPr>
+              <a:t>  Abschluss &amp; Transfer</a:t>
+            </a:r>
+            <a:r>
+              <a:rPr sz="900">
+                <a:solidFill>
+                  <a:srgbClr val="78808C"/>
+                </a:solidFill>
+                <a:latin typeface="Arial"/>
+              </a:rPr>
+              <a:t>  ·  Plenum</a:t>
+            </a:r>
+          </a:p>
+          <a:p>
+            <a:pPr>
+              <a:spcBef>
+                <a:spcPts val="400"/>
+              </a:spcBef>
+              <a:spcAft>
+                <a:spcPts val="100"/>
+              </a:spcAft>
+            </a:pPr>
+            <a:r>
+              <a:rPr sz="900">
+                <a:solidFill>
+                  <a:srgbClr val="78808C"/>
+                </a:solidFill>
+                <a:latin typeface="Consolas"/>
+              </a:rPr>
+              <a:t>01:42       </a:t>
+            </a:r>
+            <a:r>
+              <a:rPr sz="1200" b="1">
+                <a:solidFill>
+                  <a:srgbClr val="3D5466"/>
+                </a:solidFill>
+                <a:latin typeface="Arial"/>
+              </a:rPr>
+              <a:t>  Feedbackbogen</a:t>
+            </a:r>
+            <a:r>
+              <a:rPr sz="900">
+                <a:solidFill>
+                  <a:srgbClr val="78808C"/>
+                </a:solidFill>
+                <a:latin typeface="Arial"/>
+              </a:rPr>
+              <a:t>  ·  Einzeln</a:t>
+            </a:r>
+          </a:p>
+          <a:p>
+            <a:pPr>
+              <a:spcBef>
+                <a:spcPts val="400"/>
+              </a:spcBef>
+              <a:spcAft>
+                <a:spcPts val="100"/>
+              </a:spcAft>
+            </a:pPr>
+            <a:r>
+              <a:rPr sz="900">
+                <a:solidFill>
+                  <a:srgbClr val="78808C"/>
+                </a:solidFill>
+                <a:latin typeface="Consolas"/>
+              </a:rPr>
+              <a:t>01:45       </a:t>
+            </a:r>
+            <a:r>
+              <a:rPr sz="1200" b="1">
+                <a:solidFill>
+                  <a:srgbClr val="3D5466"/>
+                </a:solidFill>
+                <a:latin typeface="Arial"/>
+              </a:rPr>
+              <a:t>  Ende</a:t>
+            </a:r>
+          </a:p>
+        </p:txBody>
+      </p:sp>
+      <p:sp>
+        <p:nvSpPr>
+          <p:cNvPr id="8" name="Rectangle 7"/>
           <p:cNvSpPr/>
           <p:nvPr/>
         </p:nvSpPr>
@@ -7056,7 +8693,7 @@
       </p:sp>
       <p:sp>
         <p:nvSpPr>
-          <p:cNvPr id="10" name="TextBox 9"/>
+          <p:cNvPr id="9" name="TextBox 8"/>
           <p:cNvSpPr txBox="1"/>
           <p:nvPr/>
         </p:nvSpPr>
@@ -7122,7 +8759,7 @@
             <a:avLst/>
           </a:prstGeom>
           <a:solidFill>
-            <a:srgbClr val="FFFFFF"/>
+            <a:srgbClr val="EDEDF3"/>
           </a:solidFill>
           <a:ln>
             <a:noFill/>
@@ -7223,43 +8860,51 @@
                 </a:solidFill>
                 <a:latin typeface="JetBrains Mono"/>
               </a:rPr>
-              <a:t>M17  ·  SCHAUBILD</a:t>
-            </a:r>
-          </a:p>
-        </p:txBody>
-      </p:sp>
-      <p:sp>
-        <p:nvSpPr>
-          <p:cNvPr id="5" name="TextBox 4"/>
-          <p:cNvSpPr txBox="1"/>
-          <p:nvPr/>
-        </p:nvSpPr>
-        <p:spPr>
-          <a:xfrm>
-            <a:off x="685800" y="502920"/>
-            <a:ext cx="10817352" cy="594360"/>
-          </a:xfrm>
-          <a:prstGeom prst="rect">
-            <a:avLst/>
-          </a:prstGeom>
-          <a:noFill/>
-        </p:spPr>
-        <p:txBody>
-          <a:bodyPr wrap="square">
-            <a:spAutoFit/>
-          </a:bodyPr>
-          <a:lstStyle/>
-          <a:p>
-            <a:pPr algn="l"/>
-            <a:r>
-              <a:rPr sz="2000" b="1" i="0">
-                <a:solidFill>
-                  <a:srgbClr val="1F2C56"/>
-                </a:solidFill>
-                <a:latin typeface="Source Serif 4"/>
-              </a:rPr>
-              <a:t>agree21 Kernbereiche für Firmenkundenberater</a:t>
-            </a:r>
+              <a:t>M17  ·  INHALT</a:t>
+            </a:r>
+          </a:p>
+        </p:txBody>
+      </p:sp>
+      <p:sp>
+        <p:nvSpPr>
+          <p:cNvPr id="5" name="Rectangle 4"/>
+          <p:cNvSpPr/>
+          <p:nvPr/>
+        </p:nvSpPr>
+        <p:spPr>
+          <a:xfrm>
+            <a:off x="0" y="1234440"/>
+            <a:ext cx="12188952" cy="12700"/>
+          </a:xfrm>
+          <a:prstGeom prst="rect">
+            <a:avLst/>
+          </a:prstGeom>
+          <a:solidFill>
+            <a:srgbClr val="D8DFE4"/>
+          </a:solidFill>
+          <a:ln>
+            <a:noFill/>
+          </a:ln>
+        </p:spPr>
+        <p:style>
+          <a:lnRef idx="1">
+            <a:schemeClr val="accent1"/>
+          </a:lnRef>
+          <a:fillRef idx="3">
+            <a:schemeClr val="accent1"/>
+          </a:fillRef>
+          <a:effectRef idx="2">
+            <a:schemeClr val="accent1"/>
+          </a:effectRef>
+          <a:fontRef idx="minor">
+            <a:schemeClr val="lt1"/>
+          </a:fontRef>
+        </p:style>
+        <p:txBody>
+          <a:bodyPr rtlCol="0" anchor="ctr"/>
+          <a:lstStyle/>
+          <a:p>
+            <a:pPr algn="ctr"/>
           </a:p>
         </p:txBody>
       </p:sp>
@@ -7271,8 +8916,8 @@
         </p:nvSpPr>
         <p:spPr>
           <a:xfrm>
-            <a:off x="685800" y="1143000"/>
-            <a:ext cx="10817352" cy="25400"/>
+            <a:off x="685800" y="502920"/>
+            <a:ext cx="36576" cy="658368"/>
           </a:xfrm>
           <a:prstGeom prst="rect">
             <a:avLst/>
@@ -7306,33 +8951,105 @@
           </a:p>
         </p:txBody>
       </p:sp>
-      <p:pic>
-        <p:nvPicPr>
-          <p:cNvPr id="7" name="Picture 6" descr="image.png"/>
-          <p:cNvPicPr>
-            <a:picLocks noChangeAspect="1"/>
-          </p:cNvPicPr>
-          <p:nvPr/>
-        </p:nvPicPr>
-        <p:blipFill>
-          <a:blip r:embed="rId2"/>
-          <a:stretch>
-            <a:fillRect/>
-          </a:stretch>
-        </p:blipFill>
-        <p:spPr>
-          <a:xfrm>
-            <a:off x="2163921" y="1325880"/>
-            <a:ext cx="7861110" cy="4937760"/>
-          </a:xfrm>
-          <a:prstGeom prst="rect">
-            <a:avLst/>
-          </a:prstGeom>
-        </p:spPr>
-      </p:pic>
-      <p:sp>
-        <p:nvSpPr>
-          <p:cNvPr id="8" name="Rectangle 7"/>
+      <p:sp>
+        <p:nvSpPr>
+          <p:cNvPr id="7" name="TextBox 6"/>
+          <p:cNvSpPr txBox="1"/>
+          <p:nvPr/>
+        </p:nvSpPr>
+        <p:spPr>
+          <a:xfrm>
+            <a:off x="813816" y="502920"/>
+            <a:ext cx="10634472" cy="685800"/>
+          </a:xfrm>
+          <a:prstGeom prst="rect">
+            <a:avLst/>
+          </a:prstGeom>
+          <a:noFill/>
+        </p:spPr>
+        <p:txBody>
+          <a:bodyPr wrap="square">
+            <a:spAutoFit/>
+          </a:bodyPr>
+          <a:lstStyle/>
+          <a:p>
+            <a:pPr algn="l"/>
+            <a:r>
+              <a:rPr sz="2400" b="1" i="0">
+                <a:solidFill>
+                  <a:srgbClr val="1F2C56"/>
+                </a:solidFill>
+                <a:latin typeface="Source Serif 4"/>
+              </a:rPr>
+              <a:t>Die häufigsten agree-Fehler im Firmenkundenalltag</a:t>
+            </a:r>
+          </a:p>
+        </p:txBody>
+      </p:sp>
+      <p:sp>
+        <p:nvSpPr>
+          <p:cNvPr id="8" name="TextBox 7"/>
+          <p:cNvSpPr txBox="1"/>
+          <p:nvPr/>
+        </p:nvSpPr>
+        <p:spPr>
+          <a:xfrm>
+            <a:off x="685800" y="1417320"/>
+            <a:ext cx="10817352" cy="5029200"/>
+          </a:xfrm>
+          <a:prstGeom prst="rect">
+            <a:avLst/>
+          </a:prstGeom>
+          <a:noFill/>
+        </p:spPr>
+        <p:txBody>
+          <a:bodyPr wrap="square">
+            <a:spAutoFit/>
+          </a:bodyPr>
+          <a:lstStyle/>
+          <a:p>
+            <a:pPr>
+              <a:spcBef>
+                <a:spcPts val="400"/>
+              </a:spcBef>
+              <a:spcAft>
+                <a:spcPts val="200"/>
+              </a:spcAft>
+            </a:pPr>
+            <a:r>
+              <a:rPr sz="1300">
+                <a:solidFill>
+                  <a:srgbClr val="3D5466"/>
+                </a:solidFill>
+                <a:latin typeface="Arial"/>
+              </a:rPr>
+              <a:t>▸  ## 4.2 Effizienter Gesprächsworkflow: Vor – Während – Nach</a:t>
+            </a:r>
+          </a:p>
+          <a:p>
+            <a:pPr>
+              <a:spcBef>
+                <a:spcPts val="400"/>
+              </a:spcBef>
+              <a:spcAft>
+                <a:spcPts val="200"/>
+              </a:spcAft>
+            </a:pPr>
+            <a:r>
+              <a:rPr sz="1300">
+                <a:solidFill>
+                  <a:srgbClr val="3D5466"/>
+                </a:solidFill>
+                <a:latin typeface="Arial"/>
+              </a:rPr>
+              <a:t>▸  Der größte Effizienzgewinn entsteht nicht aus einzelnen Funktionen, sondern aus einem konsistenten Workflow, der agree konsequent in alle drei Gesprächsphasen einbindet.</a:t>
+            </a:r>
+          </a:p>
+        </p:txBody>
+      </p:sp>
+      <p:sp>
+        <p:nvSpPr>
+          <p:cNvPr id="9" name="Rectangle 8"/>
           <p:cNvSpPr/>
           <p:nvPr/>
         </p:nvSpPr>
@@ -7375,7 +9092,7 @@
       </p:sp>
       <p:sp>
         <p:nvSpPr>
-          <p:cNvPr id="9" name="TextBox 8"/>
+          <p:cNvPr id="10" name="TextBox 9"/>
           <p:cNvSpPr txBox="1"/>
           <p:nvPr/>
         </p:nvSpPr>
@@ -7404,41 +9121,6 @@
                 <a:latin typeface="JetBrains Mono"/>
               </a:rPr>
               <a:t>Benedikt Zoller Coaching  ·  FKB Campus  ·  M17</a:t>
-            </a:r>
-          </a:p>
-        </p:txBody>
-      </p:sp>
-      <p:sp>
-        <p:nvSpPr>
-          <p:cNvPr id="10" name="TextBox 9"/>
-          <p:cNvSpPr txBox="1"/>
-          <p:nvPr/>
-        </p:nvSpPr>
-        <p:spPr>
-          <a:xfrm>
-            <a:off x="7176211" y="6583680"/>
-            <a:ext cx="4326940" cy="256032"/>
-          </a:xfrm>
-          <a:prstGeom prst="rect">
-            <a:avLst/>
-          </a:prstGeom>
-          <a:noFill/>
-        </p:spPr>
-        <p:txBody>
-          <a:bodyPr wrap="none">
-            <a:spAutoFit/>
-          </a:bodyPr>
-          <a:lstStyle/>
-          <a:p>
-            <a:pPr algn="r"/>
-            <a:r>
-              <a:rPr sz="700">
-                <a:solidFill>
-                  <a:srgbClr val="A0B4D2"/>
-                </a:solidFill>
-                <a:latin typeface="JetBrains Mono"/>
-              </a:rPr>
-              <a:t>Schaubild</a:t>
             </a:r>
           </a:p>
         </p:txBody>
@@ -7476,7 +9158,7 @@
             <a:avLst/>
           </a:prstGeom>
           <a:solidFill>
-            <a:srgbClr val="EDEDF3"/>
+            <a:srgbClr val="FFFFFF"/>
           </a:solidFill>
           <a:ln>
             <a:noFill/>
@@ -7577,51 +9259,43 @@
                 </a:solidFill>
                 <a:latin typeface="JetBrains Mono"/>
               </a:rPr>
-              <a:t>M17  ·  INHALT</a:t>
-            </a:r>
-          </a:p>
-        </p:txBody>
-      </p:sp>
-      <p:sp>
-        <p:nvSpPr>
-          <p:cNvPr id="5" name="Rectangle 4"/>
-          <p:cNvSpPr/>
-          <p:nvPr/>
-        </p:nvSpPr>
-        <p:spPr>
-          <a:xfrm>
-            <a:off x="0" y="1234440"/>
-            <a:ext cx="12188952" cy="12700"/>
-          </a:xfrm>
-          <a:prstGeom prst="rect">
-            <a:avLst/>
-          </a:prstGeom>
-          <a:solidFill>
-            <a:srgbClr val="D8DFE4"/>
-          </a:solidFill>
-          <a:ln>
-            <a:noFill/>
-          </a:ln>
-        </p:spPr>
-        <p:style>
-          <a:lnRef idx="1">
-            <a:schemeClr val="accent1"/>
-          </a:lnRef>
-          <a:fillRef idx="3">
-            <a:schemeClr val="accent1"/>
-          </a:fillRef>
-          <a:effectRef idx="2">
-            <a:schemeClr val="accent1"/>
-          </a:effectRef>
-          <a:fontRef idx="minor">
-            <a:schemeClr val="lt1"/>
-          </a:fontRef>
-        </p:style>
-        <p:txBody>
-          <a:bodyPr rtlCol="0" anchor="ctr"/>
-          <a:lstStyle/>
-          <a:p>
-            <a:pPr algn="ctr"/>
+              <a:t>M17  ·  SCHAUBILD</a:t>
+            </a:r>
+          </a:p>
+        </p:txBody>
+      </p:sp>
+      <p:sp>
+        <p:nvSpPr>
+          <p:cNvPr id="5" name="TextBox 4"/>
+          <p:cNvSpPr txBox="1"/>
+          <p:nvPr/>
+        </p:nvSpPr>
+        <p:spPr>
+          <a:xfrm>
+            <a:off x="685800" y="502920"/>
+            <a:ext cx="10817352" cy="594360"/>
+          </a:xfrm>
+          <a:prstGeom prst="rect">
+            <a:avLst/>
+          </a:prstGeom>
+          <a:noFill/>
+        </p:spPr>
+        <p:txBody>
+          <a:bodyPr wrap="square">
+            <a:spAutoFit/>
+          </a:bodyPr>
+          <a:lstStyle/>
+          <a:p>
+            <a:pPr algn="l"/>
+            <a:r>
+              <a:rPr sz="2000" b="1" i="0">
+                <a:solidFill>
+                  <a:srgbClr val="1F2C56"/>
+                </a:solidFill>
+                <a:latin typeface="Source Serif 4"/>
+              </a:rPr>
+              <a:t>agree21 Kernbereiche für Firmenkundenberater</a:t>
+            </a:r>
           </a:p>
         </p:txBody>
       </p:sp>
@@ -7633,8 +9307,8 @@
         </p:nvSpPr>
         <p:spPr>
           <a:xfrm>
-            <a:off x="685800" y="502920"/>
-            <a:ext cx="36576" cy="658368"/>
+            <a:off x="685800" y="1143000"/>
+            <a:ext cx="10817352" cy="25400"/>
           </a:xfrm>
           <a:prstGeom prst="rect">
             <a:avLst/>
@@ -7668,105 +9342,33 @@
           </a:p>
         </p:txBody>
       </p:sp>
-      <p:sp>
-        <p:nvSpPr>
-          <p:cNvPr id="7" name="TextBox 6"/>
-          <p:cNvSpPr txBox="1"/>
-          <p:nvPr/>
-        </p:nvSpPr>
-        <p:spPr>
-          <a:xfrm>
-            <a:off x="813816" y="502920"/>
-            <a:ext cx="10634472" cy="685800"/>
-          </a:xfrm>
-          <a:prstGeom prst="rect">
-            <a:avLst/>
-          </a:prstGeom>
-          <a:noFill/>
-        </p:spPr>
-        <p:txBody>
-          <a:bodyPr wrap="square">
-            <a:spAutoFit/>
-          </a:bodyPr>
-          <a:lstStyle/>
-          <a:p>
-            <a:pPr algn="l"/>
-            <a:r>
-              <a:rPr sz="2400" b="1" i="0">
-                <a:solidFill>
-                  <a:srgbClr val="1F2C56"/>
-                </a:solidFill>
-                <a:latin typeface="Source Serif 4"/>
-              </a:rPr>
-              <a:t>Phase 1: Vorbereitung (15–20 Minuten statt 45–60 Minuten)</a:t>
-            </a:r>
-          </a:p>
-        </p:txBody>
-      </p:sp>
-      <p:sp>
-        <p:nvSpPr>
-          <p:cNvPr id="8" name="TextBox 7"/>
-          <p:cNvSpPr txBox="1"/>
-          <p:nvPr/>
-        </p:nvSpPr>
-        <p:spPr>
-          <a:xfrm>
-            <a:off x="685800" y="1417320"/>
-            <a:ext cx="10817352" cy="5029200"/>
-          </a:xfrm>
-          <a:prstGeom prst="rect">
-            <a:avLst/>
-          </a:prstGeom>
-          <a:noFill/>
-        </p:spPr>
-        <p:txBody>
-          <a:bodyPr wrap="square">
-            <a:spAutoFit/>
-          </a:bodyPr>
-          <a:lstStyle/>
-          <a:p>
-            <a:pPr>
-              <a:spcBef>
-                <a:spcPts val="400"/>
-              </a:spcBef>
-              <a:spcAft>
-                <a:spcPts val="200"/>
-              </a:spcAft>
-            </a:pPr>
-            <a:r>
-              <a:rPr sz="1200">
-                <a:solidFill>
-                  <a:srgbClr val="3D5466"/>
-                </a:solidFill>
-                <a:latin typeface="Arial"/>
-              </a:rPr>
-              <a:t>agree-Checkliste Jahresgespräch:</a:t>
-            </a:r>
-          </a:p>
-          <a:p>
-            <a:pPr>
-              <a:spcBef>
-                <a:spcPts val="400"/>
-              </a:spcBef>
-              <a:spcAft>
-                <a:spcPts val="200"/>
-              </a:spcAft>
-            </a:pPr>
-            <a:r>
-              <a:rPr sz="1200">
-                <a:solidFill>
-                  <a:srgbClr val="3D5466"/>
-                </a:solidFill>
-                <a:latin typeface="Arial"/>
-              </a:rPr>
-              <a:t>Ergebnis: Sie gehen mit einem konkreten Bild in das Gespräch – statt im Gespräch zu blättern.</a:t>
-            </a:r>
-          </a:p>
-        </p:txBody>
-      </p:sp>
-      <p:sp>
-        <p:nvSpPr>
-          <p:cNvPr id="9" name="Rectangle 8"/>
+      <p:pic>
+        <p:nvPicPr>
+          <p:cNvPr id="7" name="Picture 6" descr="image.png"/>
+          <p:cNvPicPr>
+            <a:picLocks noChangeAspect="1"/>
+          </p:cNvPicPr>
+          <p:nvPr/>
+        </p:nvPicPr>
+        <p:blipFill>
+          <a:blip r:embed="rId2"/>
+          <a:stretch>
+            <a:fillRect/>
+          </a:stretch>
+        </p:blipFill>
+        <p:spPr>
+          <a:xfrm>
+            <a:off x="2163921" y="1325880"/>
+            <a:ext cx="7861110" cy="4937760"/>
+          </a:xfrm>
+          <a:prstGeom prst="rect">
+            <a:avLst/>
+          </a:prstGeom>
+        </p:spPr>
+      </p:pic>
+      <p:sp>
+        <p:nvSpPr>
+          <p:cNvPr id="8" name="Rectangle 7"/>
           <p:cNvSpPr/>
           <p:nvPr/>
         </p:nvSpPr>
@@ -7809,7 +9411,7 @@
       </p:sp>
       <p:sp>
         <p:nvSpPr>
-          <p:cNvPr id="10" name="TextBox 9"/>
+          <p:cNvPr id="9" name="TextBox 8"/>
           <p:cNvSpPr txBox="1"/>
           <p:nvPr/>
         </p:nvSpPr>
@@ -7838,6 +9440,41 @@
                 <a:latin typeface="JetBrains Mono"/>
               </a:rPr>
               <a:t>Benedikt Zoller Coaching  ·  FKB Campus  ·  M17</a:t>
+            </a:r>
+          </a:p>
+        </p:txBody>
+      </p:sp>
+      <p:sp>
+        <p:nvSpPr>
+          <p:cNvPr id="10" name="TextBox 9"/>
+          <p:cNvSpPr txBox="1"/>
+          <p:nvPr/>
+        </p:nvSpPr>
+        <p:spPr>
+          <a:xfrm>
+            <a:off x="7176211" y="6583680"/>
+            <a:ext cx="4326940" cy="256032"/>
+          </a:xfrm>
+          <a:prstGeom prst="rect">
+            <a:avLst/>
+          </a:prstGeom>
+          <a:noFill/>
+        </p:spPr>
+        <p:txBody>
+          <a:bodyPr wrap="none">
+            <a:spAutoFit/>
+          </a:bodyPr>
+          <a:lstStyle/>
+          <a:p>
+            <a:pPr algn="r"/>
+            <a:r>
+              <a:rPr sz="700">
+                <a:solidFill>
+                  <a:srgbClr val="A0B4D2"/>
+                </a:solidFill>
+                <a:latin typeface="JetBrains Mono"/>
+              </a:rPr>
+              <a:t>Schaubild</a:t>
             </a:r>
           </a:p>
         </p:txBody>
@@ -8097,7 +9734,7 @@
                 </a:solidFill>
                 <a:latin typeface="Source Serif 4"/>
               </a:rPr>
-              <a:t>Phase 2: Während des Gesprächs</a:t>
+              <a:t>Phase 1: Vorbereitung (15–20 Minuten statt 45–60 Minuten)</a:t>
             </a:r>
           </a:p>
         </p:txBody>
@@ -8139,7 +9776,7 @@
                 </a:solidFill>
                 <a:latin typeface="Arial"/>
               </a:rPr>
-              <a:t>▸  Kein separates Notizheft – direkt in agree</a:t>
+              <a:t>▸  agree-Checkliste Jahresgespräch:</a:t>
             </a:r>
           </a:p>
           <a:p>
@@ -8158,26 +9795,7 @@
                 </a:solidFill>
                 <a:latin typeface="Arial"/>
               </a:rPr>
-              <a:t>▸  Vereinbarungen sofort als Aktivität/Aufgabe anlegen (mit Datum und Verantwortlichkeit)</a:t>
-            </a:r>
-          </a:p>
-          <a:p>
-            <a:pPr>
-              <a:spcBef>
-                <a:spcPts val="400"/>
-              </a:spcBef>
-              <a:spcAft>
-                <a:spcPts val="200"/>
-              </a:spcAft>
-            </a:pPr>
-            <a:r>
-              <a:rPr sz="1300">
-                <a:solidFill>
-                  <a:srgbClr val="3D5466"/>
-                </a:solidFill>
-                <a:latin typeface="Arial"/>
-              </a:rPr>
-              <a:t>▸  Bedarfe in den dafür vorgesehenen Bedarfsfeldern des UnternehmerDialogs erfassen</a:t>
+              <a:t>▸  Ergebnis: Sie gehen mit einem konkreten Bild in das Gespräch – statt im Gespräch zu blättern.</a:t>
             </a:r>
           </a:p>
         </p:txBody>
@@ -8515,7 +10133,7 @@
                 </a:solidFill>
                 <a:latin typeface="Source Serif 4"/>
               </a:rPr>
-              <a:t>Phase 3: Nachbereitung (10 Minuten statt 30 Minuten)</a:t>
+              <a:t>Phase 2: Während des Gesprächs</a:t>
             </a:r>
           </a:p>
         </p:txBody>
@@ -8551,13 +10169,51 @@
               </a:spcAft>
             </a:pPr>
             <a:r>
-              <a:rPr sz="1200">
+              <a:rPr sz="1300">
                 <a:solidFill>
                   <a:srgbClr val="3D5466"/>
                 </a:solidFill>
                 <a:latin typeface="Arial"/>
               </a:rPr>
-              <a:t>## 4.3 UnternehmerDialog: Mehr als ein Formular</a:t>
+              <a:t>▸  Kein separates Notizheft – direkt in agree</a:t>
+            </a:r>
+          </a:p>
+          <a:p>
+            <a:pPr>
+              <a:spcBef>
+                <a:spcPts val="400"/>
+              </a:spcBef>
+              <a:spcAft>
+                <a:spcPts val="200"/>
+              </a:spcAft>
+            </a:pPr>
+            <a:r>
+              <a:rPr sz="1300">
+                <a:solidFill>
+                  <a:srgbClr val="3D5466"/>
+                </a:solidFill>
+                <a:latin typeface="Arial"/>
+              </a:rPr>
+              <a:t>▸  Vereinbarungen sofort als Aktivität/Aufgabe anlegen (mit Datum und Verantwortlichkeit)</a:t>
+            </a:r>
+          </a:p>
+          <a:p>
+            <a:pPr>
+              <a:spcBef>
+                <a:spcPts val="400"/>
+              </a:spcBef>
+              <a:spcAft>
+                <a:spcPts val="200"/>
+              </a:spcAft>
+            </a:pPr>
+            <a:r>
+              <a:rPr sz="1300">
+                <a:solidFill>
+                  <a:srgbClr val="3D5466"/>
+                </a:solidFill>
+                <a:latin typeface="Arial"/>
+              </a:rPr>
+              <a:t>▸  Bedarfe in den dafür vorgesehenen Bedarfsfeldern des UnternehmerDialogs erfassen</a:t>
             </a:r>
           </a:p>
         </p:txBody>
@@ -8895,7 +10551,7 @@
                 </a:solidFill>
                 <a:latin typeface="Source Serif 4"/>
               </a:rPr>
-              <a:t>Die Bedarfsdimensionen im UnternehmerDialog</a:t>
+              <a:t>Phase 3: Nachbereitung (10 Minuten statt 30 Minuten)</a:t>
             </a:r>
           </a:p>
         </p:txBody>
@@ -8931,32 +10587,13 @@
               </a:spcAft>
             </a:pPr>
             <a:r>
-              <a:rPr sz="1200">
+              <a:rPr sz="1300">
                 <a:solidFill>
                   <a:srgbClr val="3D5466"/>
                 </a:solidFill>
                 <a:latin typeface="Arial"/>
               </a:rPr>
-              <a:t>(Bezeichnungen entsprechen der agree-Standardstruktur; in Ihrer Bankinstallation können einzelne Felder abweichend benannt sein)</a:t>
-            </a:r>
-          </a:p>
-          <a:p>
-            <a:pPr>
-              <a:spcBef>
-                <a:spcPts val="400"/>
-              </a:spcBef>
-              <a:spcAft>
-                <a:spcPts val="200"/>
-              </a:spcAft>
-            </a:pPr>
-            <a:r>
-              <a:rPr sz="1200">
-                <a:solidFill>
-                  <a:srgbClr val="3D5466"/>
-                </a:solidFill>
-                <a:latin typeface="Arial"/>
-              </a:rPr>
-              <a:t>Wichtig: Nicht alle Dimensionen in jedem Gespräch vollständig abarbeiten. Priorität setzen – zwei oder drei Dimensionen pro Gespräch vertiefen.</a:t>
+              <a:t>▸  ## 4.3 UnternehmerDialog: Mehr als ein Formular</a:t>
             </a:r>
           </a:p>
         </p:txBody>

--- a/protected-downloads/praesentation/M17.pptx
+++ b/protected-downloads/praesentation/M17.pptx
@@ -4528,7 +4528,7 @@
                 </a:solidFill>
                 <a:latin typeface="JetBrains Mono"/>
               </a:rPr>
-              <a:t>Benedikt Zoller Coaching  ·  FKB Campus  ·  2026</a:t>
+              <a:t>FKB Campus  ·  2026</a:t>
             </a:r>
           </a:p>
         </p:txBody>
@@ -4962,7 +4962,7 @@
                 </a:solidFill>
                 <a:latin typeface="JetBrains Mono"/>
               </a:rPr>
-              <a:t>Benedikt Zoller Coaching  ·  FKB Campus  ·  M17</a:t>
+              <a:t>FKB Campus  ·  M17</a:t>
             </a:r>
           </a:p>
         </p:txBody>
@@ -5551,7 +5551,7 @@
                 </a:solidFill>
                 <a:latin typeface="JetBrains Mono"/>
               </a:rPr>
-              <a:t>Benedikt Zoller Coaching  ·  FKB Campus  ·  M17</a:t>
+              <a:t>FKB Campus  ·  M17</a:t>
             </a:r>
           </a:p>
         </p:txBody>
@@ -5969,7 +5969,7 @@
                 </a:solidFill>
                 <a:latin typeface="JetBrains Mono"/>
               </a:rPr>
-              <a:t>Benedikt Zoller Coaching  ·  FKB Campus  ·  M17</a:t>
+              <a:t>FKB Campus  ·  M17</a:t>
             </a:r>
           </a:p>
         </p:txBody>
@@ -6611,7 +6611,7 @@
                 </a:solidFill>
                 <a:latin typeface="JetBrains Mono"/>
               </a:rPr>
-              <a:t>Benedikt Zoller Coaching  ·  FKB Campus  ·  M17</a:t>
+              <a:t>FKB Campus  ·  M17</a:t>
             </a:r>
           </a:p>
         </p:txBody>
@@ -7191,7 +7191,7 @@
                 </a:solidFill>
                 <a:latin typeface="JetBrains Mono"/>
               </a:rPr>
-              <a:t>Benedikt Zoller Coaching  ·  FKB Campus  ·  M17</a:t>
+              <a:t>FKB Campus  ·  M17</a:t>
             </a:r>
           </a:p>
         </p:txBody>
@@ -7592,7 +7592,7 @@
                 </a:solidFill>
                 <a:latin typeface="JetBrains Mono"/>
               </a:rPr>
-              <a:t>Benedikt Zoller Coaching  ·  FKB Campus  ·  M17</a:t>
+              <a:t>FKB Campus  ·  M17</a:t>
             </a:r>
           </a:p>
         </p:txBody>
@@ -8005,7 +8005,7 @@
                 </a:solidFill>
                 <a:latin typeface="JetBrains Mono"/>
               </a:rPr>
-              <a:t>Benedikt Zoller Coaching  ·  FKB Campus  ·  M17</a:t>
+              <a:t>FKB Campus  ·  M17</a:t>
             </a:r>
           </a:p>
         </p:txBody>
@@ -8721,7 +8721,7 @@
                 </a:solidFill>
                 <a:latin typeface="JetBrains Mono"/>
               </a:rPr>
-              <a:t>Benedikt Zoller Coaching  ·  FKB Campus  ·  M17</a:t>
+              <a:t>FKB Campus  ·  M17</a:t>
             </a:r>
           </a:p>
         </p:txBody>
@@ -9120,7 +9120,7 @@
                 </a:solidFill>
                 <a:latin typeface="JetBrains Mono"/>
               </a:rPr>
-              <a:t>Benedikt Zoller Coaching  ·  FKB Campus  ·  M17</a:t>
+              <a:t>FKB Campus  ·  M17</a:t>
             </a:r>
           </a:p>
         </p:txBody>
@@ -9439,7 +9439,7 @@
                 </a:solidFill>
                 <a:latin typeface="JetBrains Mono"/>
               </a:rPr>
-              <a:t>Benedikt Zoller Coaching  ·  FKB Campus  ·  M17</a:t>
+              <a:t>FKB Campus  ·  M17</a:t>
             </a:r>
           </a:p>
         </p:txBody>
@@ -9873,7 +9873,7 @@
                 </a:solidFill>
                 <a:latin typeface="JetBrains Mono"/>
               </a:rPr>
-              <a:t>Benedikt Zoller Coaching  ·  FKB Campus  ·  M17</a:t>
+              <a:t>FKB Campus  ·  M17</a:t>
             </a:r>
           </a:p>
         </p:txBody>
@@ -10291,7 +10291,7 @@
                 </a:solidFill>
                 <a:latin typeface="JetBrains Mono"/>
               </a:rPr>
-              <a:t>Benedikt Zoller Coaching  ·  FKB Campus  ·  M17</a:t>
+              <a:t>FKB Campus  ·  M17</a:t>
             </a:r>
           </a:p>
         </p:txBody>
@@ -10671,7 +10671,7 @@
                 </a:solidFill>
                 <a:latin typeface="JetBrains Mono"/>
               </a:rPr>
-              <a:t>Benedikt Zoller Coaching  ·  FKB Campus  ·  M17</a:t>
+              <a:t>FKB Campus  ·  M17</a:t>
             </a:r>
           </a:p>
         </p:txBody>

--- a/protected-downloads/praesentation/M17.pptx
+++ b/protected-downloads/praesentation/M17.pptx
@@ -8458,7 +8458,7 @@
                 </a:solidFill>
                 <a:latin typeface="Arial"/>
               </a:rPr>
-              <a:t>  Live-Demo II</a:t>
+              <a:t>  Offene Fragen aus Übung I (Puffer)</a:t>
             </a:r>
             <a:r>
               <a:rPr sz="900">
@@ -8467,7 +8467,7 @@
                 </a:solidFill>
                 <a:latin typeface="Arial"/>
               </a:rPr>
-              <a:t>  ·  Beamer-Demo</a:t>
+              <a:t>  ·  Plenum</a:t>
             </a:r>
           </a:p>
           <a:p>
@@ -8486,7 +8486,7 @@
                 </a:solidFill>
                 <a:latin typeface="Consolas"/>
               </a:rPr>
-              <a:t>01:15       </a:t>
+              <a:t>01:10       </a:t>
             </a:r>
             <a:r>
               <a:rPr sz="1200" b="1">
@@ -8495,7 +8495,7 @@
                 </a:solidFill>
                 <a:latin typeface="Arial"/>
               </a:rPr>
-              <a:t>  Einzelübung II</a:t>
+              <a:t>  Live-Demo II</a:t>
             </a:r>
             <a:r>
               <a:rPr sz="900">
@@ -8504,7 +8504,7 @@
                 </a:solidFill>
                 <a:latin typeface="Arial"/>
               </a:rPr>
-              <a:t>  ·  agree-Einzelarbeit</a:t>
+              <a:t>  ·  Beamer-Demo</a:t>
             </a:r>
           </a:p>
           <a:p>
@@ -8523,7 +8523,7 @@
                 </a:solidFill>
                 <a:latin typeface="Consolas"/>
               </a:rPr>
-              <a:t>01:30       </a:t>
+              <a:t>01:20       </a:t>
             </a:r>
             <a:r>
               <a:rPr sz="1200" b="1">
@@ -8532,7 +8532,7 @@
                 </a:solidFill>
                 <a:latin typeface="Arial"/>
               </a:rPr>
-              <a:t>  Reflexion: Meine Zeitfresser</a:t>
+              <a:t>  Einzelübung II</a:t>
             </a:r>
             <a:r>
               <a:rPr sz="900">
@@ -8541,7 +8541,7 @@
                 </a:solidFill>
                 <a:latin typeface="Arial"/>
               </a:rPr>
-              <a:t>  ·  Einzelarbeit</a:t>
+              <a:t>  ·  agree-Einzelarbeit</a:t>
             </a:r>
           </a:p>
           <a:p>
@@ -8569,7 +8569,7 @@
                 </a:solidFill>
                 <a:latin typeface="Arial"/>
               </a:rPr>
-              <a:t>  Abschluss &amp; Transfer</a:t>
+              <a:t>  Reflexion: Meine Zeitfresser</a:t>
             </a:r>
             <a:r>
               <a:rPr sz="900">
@@ -8578,7 +8578,7 @@
                 </a:solidFill>
                 <a:latin typeface="Arial"/>
               </a:rPr>
-              <a:t>  ·  Plenum</a:t>
+              <a:t>  ·  Einzelarbeit</a:t>
             </a:r>
           </a:p>
           <a:p>
@@ -8597,7 +8597,7 @@
                 </a:solidFill>
                 <a:latin typeface="Consolas"/>
               </a:rPr>
-              <a:t>01:42       </a:t>
+              <a:t>01:40       </a:t>
             </a:r>
             <a:r>
               <a:rPr sz="1200" b="1">
@@ -8606,7 +8606,7 @@
                 </a:solidFill>
                 <a:latin typeface="Arial"/>
               </a:rPr>
-              <a:t>  Feedbackbogen</a:t>
+              <a:t>  Abschluss &amp; Transfer</a:t>
             </a:r>
             <a:r>
               <a:rPr sz="900">
@@ -8615,7 +8615,7 @@
                 </a:solidFill>
                 <a:latin typeface="Arial"/>
               </a:rPr>
-              <a:t>  ·  Einzeln</a:t>
+              <a:t>  ·  Plenum</a:t>
             </a:r>
           </a:p>
           <a:p>
@@ -8634,7 +8634,44 @@
                 </a:solidFill>
                 <a:latin typeface="Consolas"/>
               </a:rPr>
-              <a:t>01:45       </a:t>
+              <a:t>01:47       </a:t>
+            </a:r>
+            <a:r>
+              <a:rPr sz="1200" b="1">
+                <a:solidFill>
+                  <a:srgbClr val="3D5466"/>
+                </a:solidFill>
+                <a:latin typeface="Arial"/>
+              </a:rPr>
+              <a:t>  Feedbackbogen</a:t>
+            </a:r>
+            <a:r>
+              <a:rPr sz="900">
+                <a:solidFill>
+                  <a:srgbClr val="78808C"/>
+                </a:solidFill>
+                <a:latin typeface="Arial"/>
+              </a:rPr>
+              <a:t>  ·  Einzeln</a:t>
+            </a:r>
+          </a:p>
+          <a:p>
+            <a:pPr>
+              <a:spcBef>
+                <a:spcPts val="400"/>
+              </a:spcBef>
+              <a:spcAft>
+                <a:spcPts val="100"/>
+              </a:spcAft>
+            </a:pPr>
+            <a:r>
+              <a:rPr sz="900">
+                <a:solidFill>
+                  <a:srgbClr val="78808C"/>
+                </a:solidFill>
+                <a:latin typeface="Consolas"/>
+              </a:rPr>
+              <a:t>01:50       </a:t>
             </a:r>
             <a:r>
               <a:rPr sz="1200" b="1">

--- a/protected-downloads/praesentation/M17.pptx
+++ b/protected-downloads/praesentation/M17.pptx
@@ -4450,7 +4450,7 @@
                 </a:solidFill>
                 <a:latin typeface="Arial"/>
               </a:rPr>
-              <a:t>v0.4</a:t>
+              <a:t>v1.0</a:t>
             </a:r>
           </a:p>
         </p:txBody>

--- a/protected-downloads/praesentation/M17.pptx
+++ b/protected-downloads/praesentation/M17.pptx
@@ -5811,7 +5811,7 @@
                 </a:solidFill>
                 <a:latin typeface="Source Serif 4"/>
               </a:rPr>
-              <a:t>Arbeitsblatt A: Mein agree-Selbstcheck</a:t>
+              <a:t>AB-1: Mein agree-Selbstcheck</a:t>
             </a:r>
           </a:p>
         </p:txBody>
@@ -6143,7 +6143,7 @@
                 </a:solidFill>
                 <a:latin typeface="Source Serif 4"/>
               </a:rPr>
-              <a:t>Arbeitsblatt A: Mein agree-Selbstcheck</a:t>
+              <a:t>AB-1: Mein agree-Selbstcheck</a:t>
             </a:r>
           </a:p>
         </p:txBody>
@@ -6820,7 +6820,7 @@
                 </a:solidFill>
                 <a:latin typeface="Source Serif 4"/>
               </a:rPr>
-              <a:t>Arbeitsblatt B: Workflow-Optimierungsplan</a:t>
+              <a:t>AB-2: Workflow-Optimierungsplan</a:t>
             </a:r>
           </a:p>
         </p:txBody>

--- a/protected-downloads/praesentation/M17.pptx
+++ b/protected-downloads/praesentation/M17.pptx
@@ -4125,7 +4125,7 @@
                 <a:solidFill>
                   <a:srgbClr val="C8D2E6"/>
                 </a:solidFill>
-                <a:latin typeface="JetBrains Mono"/>
+                <a:latin typeface="Consolas"/>
               </a:rPr>
               <a:t>FKB CAMPUS  ·  FIRMENKUNDENAKADEMIE  ·  M17</a:t>
             </a:r>
@@ -4160,7 +4160,7 @@
                 <a:solidFill>
                   <a:srgbClr val="FFFFFF"/>
                 </a:solidFill>
-                <a:latin typeface="Source Serif 4"/>
+                <a:latin typeface="Arial"/>
               </a:rPr>
               <a:t>agree &amp; Co. effizient nutzen</a:t>
             </a:r>
@@ -4195,7 +4195,7 @@
                 <a:solidFill>
                   <a:srgbClr val="BECDE6"/>
                 </a:solidFill>
-                <a:latin typeface="Source Serif 4"/>
+                <a:latin typeface="Arial"/>
               </a:rPr>
               <a:t>Digitale Workflows im Firmenkundenalltag meistern und Zeitpotenziale durch konsequente Systemnutzung erschließen</a:t>
             </a:r>
@@ -4273,7 +4273,7 @@
                 <a:solidFill>
                   <a:srgbClr val="A0B4D2"/>
                 </a:solidFill>
-                <a:latin typeface="JetBrains Mono"/>
+                <a:latin typeface="Consolas"/>
               </a:rPr>
               <a:t>KOMPETENZFELD</a:t>
             </a:r>
@@ -4343,7 +4343,7 @@
                 <a:solidFill>
                   <a:srgbClr val="A0B4D2"/>
                 </a:solidFill>
-                <a:latin typeface="JetBrains Mono"/>
+                <a:latin typeface="Consolas"/>
               </a:rPr>
               <a:t>KOMPETENZSTUFE</a:t>
             </a:r>
@@ -4413,7 +4413,7 @@
                 <a:solidFill>
                   <a:srgbClr val="A0B4D2"/>
                 </a:solidFill>
-                <a:latin typeface="JetBrains Mono"/>
+                <a:latin typeface="Consolas"/>
               </a:rPr>
               <a:t>VERSION</a:t>
             </a:r>
@@ -4526,7 +4526,7 @@
                 <a:solidFill>
                   <a:srgbClr val="96A5BE"/>
                 </a:solidFill>
-                <a:latin typeface="JetBrains Mono"/>
+                <a:latin typeface="Consolas"/>
               </a:rPr>
               <a:t>FKB Campus  ·  2026</a:t>
             </a:r>
@@ -4561,7 +4561,7 @@
                 <a:solidFill>
                   <a:srgbClr val="96A5BE"/>
                 </a:solidFill>
-                <a:latin typeface="JetBrains Mono"/>
+                <a:latin typeface="Consolas"/>
               </a:rPr>
               <a:t>Trainer-Präsentation</a:t>
             </a:r>
@@ -4700,7 +4700,7 @@
                 <a:solidFill>
                   <a:srgbClr val="78808C"/>
                 </a:solidFill>
-                <a:latin typeface="JetBrains Mono"/>
+                <a:latin typeface="Consolas"/>
               </a:rPr>
               <a:t>M17  ·  INHALT</a:t>
             </a:r>
@@ -4821,7 +4821,7 @@
                 <a:solidFill>
                   <a:srgbClr val="1F2C56"/>
                 </a:solidFill>
-                <a:latin typeface="Source Serif 4"/>
+                <a:latin typeface="Arial"/>
               </a:rPr>
               <a:t>Die Bedarfsdimensionen im UnternehmerDialog</a:t>
             </a:r>
@@ -4837,7 +4837,7 @@
         <p:spPr>
           <a:xfrm>
             <a:off x="685800" y="1417320"/>
-            <a:ext cx="10817352" cy="5029200"/>
+            <a:ext cx="10817352" cy="4892040"/>
           </a:xfrm>
           <a:prstGeom prst="rect">
             <a:avLst/>
@@ -4845,12 +4845,12 @@
           <a:noFill/>
         </p:spPr>
         <p:txBody>
-          <a:bodyPr wrap="square">
+          <a:bodyPr wrap="square" anchor="ctr">
             <a:spAutoFit/>
           </a:bodyPr>
           <a:lstStyle/>
           <a:p>
-            <a:pPr>
+            <a:pPr marL="190500" indent="-190500">
               <a:spcBef>
                 <a:spcPts val="400"/>
               </a:spcBef>
@@ -4869,7 +4869,7 @@
             </a:r>
           </a:p>
           <a:p>
-            <a:pPr>
+            <a:pPr marL="190500" indent="-190500">
               <a:spcBef>
                 <a:spcPts val="400"/>
               </a:spcBef>
@@ -4960,7 +4960,7 @@
                 <a:solidFill>
                   <a:srgbClr val="A0B4D2"/>
                 </a:solidFill>
-                <a:latin typeface="JetBrains Mono"/>
+                <a:latin typeface="Consolas"/>
               </a:rPr>
               <a:t>FKB Campus  ·  M17</a:t>
             </a:r>
@@ -5099,7 +5099,7 @@
                 <a:solidFill>
                   <a:srgbClr val="78808C"/>
                 </a:solidFill>
-                <a:latin typeface="JetBrains Mono"/>
+                <a:latin typeface="Consolas"/>
               </a:rPr>
               <a:t>M17  ·  INHALT</a:t>
             </a:r>
@@ -5220,7 +5220,7 @@
                 <a:solidFill>
                   <a:srgbClr val="1F2C56"/>
                 </a:solidFill>
-                <a:latin typeface="Source Serif 4"/>
+                <a:latin typeface="Arial"/>
               </a:rPr>
               <a:t>Dokumentationsstandards</a:t>
             </a:r>
@@ -5236,7 +5236,7 @@
         <p:spPr>
           <a:xfrm>
             <a:off x="685800" y="1417320"/>
-            <a:ext cx="10817352" cy="5029200"/>
+            <a:ext cx="10817352" cy="4892040"/>
           </a:xfrm>
           <a:prstGeom prst="rect">
             <a:avLst/>
@@ -5249,7 +5249,7 @@
           </a:bodyPr>
           <a:lstStyle/>
           <a:p>
-            <a:pPr>
+            <a:pPr marL="190500" indent="-190500">
               <a:spcBef>
                 <a:spcPts val="400"/>
               </a:spcBef>
@@ -5268,7 +5268,7 @@
             </a:r>
           </a:p>
           <a:p>
-            <a:pPr>
+            <a:pPr marL="190500" indent="-190500">
               <a:spcBef>
                 <a:spcPts val="400"/>
               </a:spcBef>
@@ -5287,7 +5287,7 @@
             </a:r>
           </a:p>
           <a:p>
-            <a:pPr>
+            <a:pPr marL="190500" indent="-190500">
               <a:spcBef>
                 <a:spcPts val="400"/>
               </a:spcBef>
@@ -5306,7 +5306,7 @@
             </a:r>
           </a:p>
           <a:p>
-            <a:pPr>
+            <a:pPr marL="190500" indent="-190500">
               <a:spcBef>
                 <a:spcPts val="400"/>
               </a:spcBef>
@@ -5325,7 +5325,7 @@
             </a:r>
           </a:p>
           <a:p>
-            <a:pPr>
+            <a:pPr marL="190500" indent="-190500">
               <a:spcBef>
                 <a:spcPts val="400"/>
               </a:spcBef>
@@ -5344,7 +5344,7 @@
             </a:r>
           </a:p>
           <a:p>
-            <a:pPr>
+            <a:pPr marL="190500" indent="-190500">
               <a:spcBef>
                 <a:spcPts val="400"/>
               </a:spcBef>
@@ -5363,7 +5363,7 @@
             </a:r>
           </a:p>
           <a:p>
-            <a:pPr>
+            <a:pPr marL="190500" indent="-190500">
               <a:spcBef>
                 <a:spcPts val="400"/>
               </a:spcBef>
@@ -5382,7 +5382,7 @@
             </a:r>
           </a:p>
           <a:p>
-            <a:pPr>
+            <a:pPr marL="190500" indent="-190500">
               <a:spcBef>
                 <a:spcPts val="400"/>
               </a:spcBef>
@@ -5401,7 +5401,7 @@
             </a:r>
           </a:p>
           <a:p>
-            <a:pPr>
+            <a:pPr marL="190500" indent="-190500">
               <a:spcBef>
                 <a:spcPts val="400"/>
               </a:spcBef>
@@ -5420,7 +5420,7 @@
             </a:r>
           </a:p>
           <a:p>
-            <a:pPr>
+            <a:pPr marL="190500" indent="-190500">
               <a:spcBef>
                 <a:spcPts val="400"/>
               </a:spcBef>
@@ -5439,7 +5439,7 @@
             </a:r>
           </a:p>
           <a:p>
-            <a:pPr>
+            <a:pPr marL="190500" indent="-190500">
               <a:spcBef>
                 <a:spcPts val="400"/>
               </a:spcBef>
@@ -5458,7 +5458,7 @@
             </a:r>
           </a:p>
           <a:p>
-            <a:pPr>
+            <a:pPr marL="190500" indent="-190500">
               <a:spcBef>
                 <a:spcPts val="400"/>
               </a:spcBef>
@@ -5549,7 +5549,7 @@
                 <a:solidFill>
                   <a:srgbClr val="A0B4D2"/>
                 </a:solidFill>
-                <a:latin typeface="JetBrains Mono"/>
+                <a:latin typeface="Consolas"/>
               </a:rPr>
               <a:t>FKB Campus  ·  M17</a:t>
             </a:r>
@@ -5688,7 +5688,7 @@
                 <a:solidFill>
                   <a:srgbClr val="78808C"/>
                 </a:solidFill>
-                <a:latin typeface="JetBrains Mono"/>
+                <a:latin typeface="Consolas"/>
               </a:rPr>
               <a:t>M17  ·  INHALT</a:t>
             </a:r>
@@ -5809,7 +5809,7 @@
                 <a:solidFill>
                   <a:srgbClr val="1F2C56"/>
                 </a:solidFill>
-                <a:latin typeface="Source Serif 4"/>
+                <a:latin typeface="Arial"/>
               </a:rPr>
               <a:t>AB-1: Mein agree-Selbstcheck</a:t>
             </a:r>
@@ -5825,7 +5825,7 @@
         <p:spPr>
           <a:xfrm>
             <a:off x="685800" y="1417320"/>
-            <a:ext cx="10817352" cy="5029200"/>
+            <a:ext cx="10817352" cy="4892040"/>
           </a:xfrm>
           <a:prstGeom prst="rect">
             <a:avLst/>
@@ -5833,12 +5833,12 @@
           <a:noFill/>
         </p:spPr>
         <p:txBody>
-          <a:bodyPr wrap="square">
+          <a:bodyPr wrap="square" anchor="ctr">
             <a:spAutoFit/>
           </a:bodyPr>
           <a:lstStyle/>
           <a:p>
-            <a:pPr>
+            <a:pPr marL="190500" indent="-190500">
               <a:spcBef>
                 <a:spcPts val="400"/>
               </a:spcBef>
@@ -5857,7 +5857,7 @@
             </a:r>
           </a:p>
           <a:p>
-            <a:pPr>
+            <a:pPr marL="190500" indent="-190500">
               <a:spcBef>
                 <a:spcPts val="400"/>
               </a:spcBef>
@@ -5876,7 +5876,7 @@
             </a:r>
           </a:p>
           <a:p>
-            <a:pPr>
+            <a:pPr marL="190500" indent="-190500">
               <a:spcBef>
                 <a:spcPts val="400"/>
               </a:spcBef>
@@ -5967,7 +5967,7 @@
                 <a:solidFill>
                   <a:srgbClr val="A0B4D2"/>
                 </a:solidFill>
-                <a:latin typeface="JetBrains Mono"/>
+                <a:latin typeface="Consolas"/>
               </a:rPr>
               <a:t>FKB Campus  ·  M17</a:t>
             </a:r>
@@ -6106,7 +6106,7 @@
                 <a:solidFill>
                   <a:srgbClr val="78808C"/>
                 </a:solidFill>
-                <a:latin typeface="JetBrains Mono"/>
+                <a:latin typeface="Consolas"/>
               </a:rPr>
               <a:t>M17  ·  ÜBERSICHT</a:t>
             </a:r>
@@ -6141,7 +6141,7 @@
                 <a:solidFill>
                   <a:srgbClr val="1F2C56"/>
                 </a:solidFill>
-                <a:latin typeface="Source Serif 4"/>
+                <a:latin typeface="Arial"/>
               </a:rPr>
               <a:t>AB-1: Mein agree-Selbstcheck</a:t>
             </a:r>
@@ -6609,7 +6609,7 @@
                 <a:solidFill>
                   <a:srgbClr val="A0B4D2"/>
                 </a:solidFill>
-                <a:latin typeface="JetBrains Mono"/>
+                <a:latin typeface="Consolas"/>
               </a:rPr>
               <a:t>FKB Campus  ·  M17</a:t>
             </a:r>
@@ -6644,7 +6644,7 @@
                 <a:solidFill>
                   <a:srgbClr val="A0B4D2"/>
                 </a:solidFill>
-                <a:latin typeface="JetBrains Mono"/>
+                <a:latin typeface="Consolas"/>
               </a:rPr>
               <a:t>Übersicht</a:t>
             </a:r>
@@ -6783,7 +6783,7 @@
                 <a:solidFill>
                   <a:srgbClr val="78808C"/>
                 </a:solidFill>
-                <a:latin typeface="JetBrains Mono"/>
+                <a:latin typeface="Consolas"/>
               </a:rPr>
               <a:t>M17  ·  ÜBERSICHT</a:t>
             </a:r>
@@ -6818,7 +6818,7 @@
                 <a:solidFill>
                   <a:srgbClr val="1F2C56"/>
                 </a:solidFill>
-                <a:latin typeface="Source Serif 4"/>
+                <a:latin typeface="Arial"/>
               </a:rPr>
               <a:t>AB-2: Workflow-Optimierungsplan</a:t>
             </a:r>
@@ -7189,7 +7189,7 @@
                 <a:solidFill>
                   <a:srgbClr val="A0B4D2"/>
                 </a:solidFill>
-                <a:latin typeface="JetBrains Mono"/>
+                <a:latin typeface="Consolas"/>
               </a:rPr>
               <a:t>FKB Campus  ·  M17</a:t>
             </a:r>
@@ -7224,7 +7224,7 @@
                 <a:solidFill>
                   <a:srgbClr val="A0B4D2"/>
                 </a:solidFill>
-                <a:latin typeface="JetBrains Mono"/>
+                <a:latin typeface="Consolas"/>
               </a:rPr>
               <a:t>Übersicht</a:t>
             </a:r>
@@ -7363,7 +7363,7 @@
                 <a:solidFill>
                   <a:srgbClr val="78808C"/>
                 </a:solidFill>
-                <a:latin typeface="JetBrains Mono"/>
+                <a:latin typeface="Consolas"/>
               </a:rPr>
               <a:t>ÜBERBLICK  ·  M17</a:t>
             </a:r>
@@ -7441,7 +7441,7 @@
                 <a:solidFill>
                   <a:srgbClr val="1F2C56"/>
                 </a:solidFill>
-                <a:latin typeface="Source Serif 4"/>
+                <a:latin typeface="Arial"/>
               </a:rPr>
               <a:t>Worum geht es heute</a:t>
             </a:r>
@@ -7590,7 +7590,7 @@
                 <a:solidFill>
                   <a:srgbClr val="A0B4D2"/>
                 </a:solidFill>
-                <a:latin typeface="JetBrains Mono"/>
+                <a:latin typeface="Consolas"/>
               </a:rPr>
               <a:t>FKB Campus  ·  M17</a:t>
             </a:r>
@@ -7729,7 +7729,7 @@
                 <a:solidFill>
                   <a:srgbClr val="78808C"/>
                 </a:solidFill>
-                <a:latin typeface="JetBrains Mono"/>
+                <a:latin typeface="Consolas"/>
               </a:rPr>
               <a:t>LERNZIELE  ·  M17</a:t>
             </a:r>
@@ -7807,7 +7807,7 @@
                 <a:solidFill>
                   <a:srgbClr val="1F2C56"/>
                 </a:solidFill>
-                <a:latin typeface="Source Serif 4"/>
+                <a:latin typeface="Arial"/>
               </a:rPr>
               <a:t>Was Sie heute mitnehmen</a:t>
             </a:r>
@@ -8003,7 +8003,7 @@
                 <a:solidFill>
                   <a:srgbClr val="A0B4D2"/>
                 </a:solidFill>
-                <a:latin typeface="JetBrains Mono"/>
+                <a:latin typeface="Consolas"/>
               </a:rPr>
               <a:t>FKB Campus  ·  M17</a:t>
             </a:r>
@@ -8142,7 +8142,7 @@
                 <a:solidFill>
                   <a:srgbClr val="78808C"/>
                 </a:solidFill>
-                <a:latin typeface="JetBrains Mono"/>
+                <a:latin typeface="Consolas"/>
               </a:rPr>
               <a:t>AGENDA  ·  M17</a:t>
             </a:r>
@@ -8220,7 +8220,7 @@
                 <a:solidFill>
                   <a:srgbClr val="1F2C56"/>
                 </a:solidFill>
-                <a:latin typeface="Source Serif 4"/>
+                <a:latin typeface="Arial"/>
               </a:rPr>
               <a:t>So läuft das Modul</a:t>
             </a:r>
@@ -8756,7 +8756,7 @@
                 <a:solidFill>
                   <a:srgbClr val="A0B4D2"/>
                 </a:solidFill>
-                <a:latin typeface="JetBrains Mono"/>
+                <a:latin typeface="Consolas"/>
               </a:rPr>
               <a:t>FKB Campus  ·  M17</a:t>
             </a:r>
@@ -8895,7 +8895,7 @@
                 <a:solidFill>
                   <a:srgbClr val="78808C"/>
                 </a:solidFill>
-                <a:latin typeface="JetBrains Mono"/>
+                <a:latin typeface="Consolas"/>
               </a:rPr>
               <a:t>M17  ·  INHALT</a:t>
             </a:r>
@@ -9016,7 +9016,7 @@
                 <a:solidFill>
                   <a:srgbClr val="1F2C56"/>
                 </a:solidFill>
-                <a:latin typeface="Source Serif 4"/>
+                <a:latin typeface="Arial"/>
               </a:rPr>
               <a:t>Die häufigsten agree-Fehler im Firmenkundenalltag</a:t>
             </a:r>
@@ -9032,7 +9032,7 @@
         <p:spPr>
           <a:xfrm>
             <a:off x="685800" y="1417320"/>
-            <a:ext cx="10817352" cy="5029200"/>
+            <a:ext cx="10817352" cy="4892040"/>
           </a:xfrm>
           <a:prstGeom prst="rect">
             <a:avLst/>
@@ -9040,12 +9040,12 @@
           <a:noFill/>
         </p:spPr>
         <p:txBody>
-          <a:bodyPr wrap="square">
+          <a:bodyPr wrap="square" anchor="ctr">
             <a:spAutoFit/>
           </a:bodyPr>
           <a:lstStyle/>
           <a:p>
-            <a:pPr>
+            <a:pPr marL="190500" indent="-190500">
               <a:spcBef>
                 <a:spcPts val="400"/>
               </a:spcBef>
@@ -9064,7 +9064,7 @@
             </a:r>
           </a:p>
           <a:p>
-            <a:pPr>
+            <a:pPr marL="190500" indent="-190500">
               <a:spcBef>
                 <a:spcPts val="400"/>
               </a:spcBef>
@@ -9155,7 +9155,7 @@
                 <a:solidFill>
                   <a:srgbClr val="A0B4D2"/>
                 </a:solidFill>
-                <a:latin typeface="JetBrains Mono"/>
+                <a:latin typeface="Consolas"/>
               </a:rPr>
               <a:t>FKB Campus  ·  M17</a:t>
             </a:r>
@@ -9294,7 +9294,7 @@
                 <a:solidFill>
                   <a:srgbClr val="78808C"/>
                 </a:solidFill>
-                <a:latin typeface="JetBrains Mono"/>
+                <a:latin typeface="Consolas"/>
               </a:rPr>
               <a:t>M17  ·  SCHAUBILD</a:t>
             </a:r>
@@ -9329,7 +9329,7 @@
                 <a:solidFill>
                   <a:srgbClr val="1F2C56"/>
                 </a:solidFill>
-                <a:latin typeface="Source Serif 4"/>
+                <a:latin typeface="Arial"/>
               </a:rPr>
               <a:t>agree21 Kernbereiche für Firmenkundenberater</a:t>
             </a:r>
@@ -9474,7 +9474,7 @@
                 <a:solidFill>
                   <a:srgbClr val="A0B4D2"/>
                 </a:solidFill>
-                <a:latin typeface="JetBrains Mono"/>
+                <a:latin typeface="Consolas"/>
               </a:rPr>
               <a:t>FKB Campus  ·  M17</a:t>
             </a:r>
@@ -9509,7 +9509,7 @@
                 <a:solidFill>
                   <a:srgbClr val="A0B4D2"/>
                 </a:solidFill>
-                <a:latin typeface="JetBrains Mono"/>
+                <a:latin typeface="Consolas"/>
               </a:rPr>
               <a:t>Schaubild</a:t>
             </a:r>
@@ -9648,7 +9648,7 @@
                 <a:solidFill>
                   <a:srgbClr val="78808C"/>
                 </a:solidFill>
-                <a:latin typeface="JetBrains Mono"/>
+                <a:latin typeface="Consolas"/>
               </a:rPr>
               <a:t>M17  ·  INHALT</a:t>
             </a:r>
@@ -9769,7 +9769,7 @@
                 <a:solidFill>
                   <a:srgbClr val="1F2C56"/>
                 </a:solidFill>
-                <a:latin typeface="Source Serif 4"/>
+                <a:latin typeface="Arial"/>
               </a:rPr>
               <a:t>Phase 1: Vorbereitung (15–20 Minuten statt 45–60 Minuten)</a:t>
             </a:r>
@@ -9785,7 +9785,7 @@
         <p:spPr>
           <a:xfrm>
             <a:off x="685800" y="1417320"/>
-            <a:ext cx="10817352" cy="5029200"/>
+            <a:ext cx="10817352" cy="4892040"/>
           </a:xfrm>
           <a:prstGeom prst="rect">
             <a:avLst/>
@@ -9793,12 +9793,12 @@
           <a:noFill/>
         </p:spPr>
         <p:txBody>
-          <a:bodyPr wrap="square">
+          <a:bodyPr wrap="square" anchor="ctr">
             <a:spAutoFit/>
           </a:bodyPr>
           <a:lstStyle/>
           <a:p>
-            <a:pPr>
+            <a:pPr marL="190500" indent="-190500">
               <a:spcBef>
                 <a:spcPts val="400"/>
               </a:spcBef>
@@ -9817,7 +9817,7 @@
             </a:r>
           </a:p>
           <a:p>
-            <a:pPr>
+            <a:pPr marL="190500" indent="-190500">
               <a:spcBef>
                 <a:spcPts val="400"/>
               </a:spcBef>
@@ -9908,7 +9908,7 @@
                 <a:solidFill>
                   <a:srgbClr val="A0B4D2"/>
                 </a:solidFill>
-                <a:latin typeface="JetBrains Mono"/>
+                <a:latin typeface="Consolas"/>
               </a:rPr>
               <a:t>FKB Campus  ·  M17</a:t>
             </a:r>
@@ -10047,7 +10047,7 @@
                 <a:solidFill>
                   <a:srgbClr val="78808C"/>
                 </a:solidFill>
-                <a:latin typeface="JetBrains Mono"/>
+                <a:latin typeface="Consolas"/>
               </a:rPr>
               <a:t>M17  ·  INHALT</a:t>
             </a:r>
@@ -10168,7 +10168,7 @@
                 <a:solidFill>
                   <a:srgbClr val="1F2C56"/>
                 </a:solidFill>
-                <a:latin typeface="Source Serif 4"/>
+                <a:latin typeface="Arial"/>
               </a:rPr>
               <a:t>Phase 2: Während des Gesprächs</a:t>
             </a:r>
@@ -10184,7 +10184,7 @@
         <p:spPr>
           <a:xfrm>
             <a:off x="685800" y="1417320"/>
-            <a:ext cx="10817352" cy="5029200"/>
+            <a:ext cx="10817352" cy="4892040"/>
           </a:xfrm>
           <a:prstGeom prst="rect">
             <a:avLst/>
@@ -10192,12 +10192,12 @@
           <a:noFill/>
         </p:spPr>
         <p:txBody>
-          <a:bodyPr wrap="square">
+          <a:bodyPr wrap="square" anchor="ctr">
             <a:spAutoFit/>
           </a:bodyPr>
           <a:lstStyle/>
           <a:p>
-            <a:pPr>
+            <a:pPr marL="190500" indent="-190500">
               <a:spcBef>
                 <a:spcPts val="400"/>
               </a:spcBef>
@@ -10216,7 +10216,7 @@
             </a:r>
           </a:p>
           <a:p>
-            <a:pPr>
+            <a:pPr marL="190500" indent="-190500">
               <a:spcBef>
                 <a:spcPts val="400"/>
               </a:spcBef>
@@ -10235,7 +10235,7 @@
             </a:r>
           </a:p>
           <a:p>
-            <a:pPr>
+            <a:pPr marL="190500" indent="-190500">
               <a:spcBef>
                 <a:spcPts val="400"/>
               </a:spcBef>
@@ -10326,7 +10326,7 @@
                 <a:solidFill>
                   <a:srgbClr val="A0B4D2"/>
                 </a:solidFill>
-                <a:latin typeface="JetBrains Mono"/>
+                <a:latin typeface="Consolas"/>
               </a:rPr>
               <a:t>FKB Campus  ·  M17</a:t>
             </a:r>
@@ -10465,7 +10465,7 @@
                 <a:solidFill>
                   <a:srgbClr val="78808C"/>
                 </a:solidFill>
-                <a:latin typeface="JetBrains Mono"/>
+                <a:latin typeface="Consolas"/>
               </a:rPr>
               <a:t>M17  ·  INHALT</a:t>
             </a:r>
@@ -10586,7 +10586,7 @@
                 <a:solidFill>
                   <a:srgbClr val="1F2C56"/>
                 </a:solidFill>
-                <a:latin typeface="Source Serif 4"/>
+                <a:latin typeface="Arial"/>
               </a:rPr>
               <a:t>Phase 3: Nachbereitung (10 Minuten statt 30 Minuten)</a:t>
             </a:r>
@@ -10602,7 +10602,7 @@
         <p:spPr>
           <a:xfrm>
             <a:off x="685800" y="1417320"/>
-            <a:ext cx="10817352" cy="5029200"/>
+            <a:ext cx="10817352" cy="4892040"/>
           </a:xfrm>
           <a:prstGeom prst="rect">
             <a:avLst/>
@@ -10610,12 +10610,12 @@
           <a:noFill/>
         </p:spPr>
         <p:txBody>
-          <a:bodyPr wrap="square">
+          <a:bodyPr wrap="square" anchor="ctr">
             <a:spAutoFit/>
           </a:bodyPr>
           <a:lstStyle/>
           <a:p>
-            <a:pPr>
+            <a:pPr marL="190500" indent="-190500">
               <a:spcBef>
                 <a:spcPts val="400"/>
               </a:spcBef>
@@ -10706,7 +10706,7 @@
                 <a:solidFill>
                   <a:srgbClr val="A0B4D2"/>
                 </a:solidFill>
-                <a:latin typeface="JetBrains Mono"/>
+                <a:latin typeface="Consolas"/>
               </a:rPr>
               <a:t>FKB Campus  ·  M17</a:t>
             </a:r>

--- a/protected-downloads/praesentation/M17.pptx
+++ b/protected-downloads/praesentation/M17.pptx
@@ -18,7 +18,6 @@
     <p:sldId id="266" r:id="rId18"/>
     <p:sldId id="267" r:id="rId19"/>
     <p:sldId id="268" r:id="rId20"/>
-    <p:sldId id="269" r:id="rId21"/>
   </p:sldIdLst>
   <p:sldSz cx="12188952" cy="6858000" type="screen4x3"/>
   <p:notesSz cx="6858000" cy="9144000"/>
@@ -585,7 +584,7 @@
           <a:lstStyle/>
           <a:p>
             <a:r>
-              <a:t>Siehe Trainerhandbuch (Sektion 3) für Moderationshinweise, Timing und erwartete Teilnehmerreaktionen.</a:t>
+              <a:t>Einstieg: „Wie viel Zeit vor und nach einem Jahresgespräch verbringen Sie heute im System?"</a:t>
             </a:r>
           </a:p>
         </p:txBody>
@@ -655,7 +654,7 @@
           <a:lstStyle/>
           <a:p>
             <a:r>
-              <a:t>Siehe Trainerhandbuch (Sektion 3) für Moderationshinweise, Timing und erwartete Teilnehmerreaktionen.</a:t>
+              <a:t>Die Kernbereiche als Landkarte – wer sie kennt, findet für jede Aufgabe den richtigen Ort.</a:t>
             </a:r>
           </a:p>
         </p:txBody>
@@ -725,7 +724,7 @@
           <a:lstStyle/>
           <a:p>
             <a:r>
-              <a:t>Siehe Trainerhandbuch (Sektion 3) für Moderationshinweise, Timing und erwartete Teilnehmerreaktionen.</a:t>
+              <a:t>Kernbotschaft: die Zeitersparnis entsteht durch Routine, nicht durch Tempo.</a:t>
             </a:r>
           </a:p>
         </p:txBody>
@@ -795,7 +794,7 @@
           <a:lstStyle/>
           <a:p>
             <a:r>
-              <a:t>Siehe Trainerhandbuch (Sektion 3) für Moderationshinweise, Timing und erwartete Teilnehmerreaktionen.</a:t>
+              <a:t>Reporting-Cockpits und VR-NetWorld ergänzen: was wann wozu abrufen?</a:t>
             </a:r>
           </a:p>
         </p:txBody>
@@ -865,7 +864,7 @@
           <a:lstStyle/>
           <a:p>
             <a:r>
-              <a:t>Siehe Trainerhandbuch (Sektion 3) für Moderationshinweise, Timing und erwartete Teilnehmerreaktionen.</a:t>
+              <a:t>Der Praxiscase führt einmal den kompletten Workflow durch – von der Vorbereitung bis zur Wiedervorlage.</a:t>
             </a:r>
           </a:p>
         </p:txBody>
@@ -935,7 +934,7 @@
           <a:lstStyle/>
           <a:p>
             <a:r>
-              <a:t>Siehe Trainerhandbuch (Sektion 3) für Moderationshinweise, Timing und erwartete Teilnehmerreaktionen.</a:t>
+              <a:t>Überleitung zum Optimierungsplan und Selbstcheck.</a:t>
             </a:r>
           </a:p>
         </p:txBody>
@@ -1005,7 +1004,7 @@
           <a:lstStyle/>
           <a:p>
             <a:r>
-              <a:t>Siehe Trainerhandbuch (Sektion 3) für Moderationshinweise, Timing und erwartete Teilnehmerreaktionen.</a:t>
+              <a:t>Workflow-Optimierungsplan und Selbstcheck als Transferanker.</a:t>
             </a:r>
           </a:p>
         </p:txBody>
@@ -4601,7 +4600,7 @@
             <a:avLst/>
           </a:prstGeom>
           <a:solidFill>
-            <a:srgbClr val="EDEDF3"/>
+            <a:srgbClr val="1F2C56"/>
           </a:solidFill>
           <a:ln>
             <a:noFill/>
@@ -4631,57 +4630,14 @@
       </p:sp>
       <p:sp>
         <p:nvSpPr>
-          <p:cNvPr id="3" name="Rectangle 2"/>
-          <p:cNvSpPr/>
-          <p:nvPr/>
-        </p:nvSpPr>
-        <p:spPr>
-          <a:xfrm>
-            <a:off x="0" y="0"/>
-            <a:ext cx="12188952" cy="50292"/>
-          </a:xfrm>
-          <a:prstGeom prst="rect">
-            <a:avLst/>
-          </a:prstGeom>
-          <a:solidFill>
-            <a:srgbClr val="1F2C56"/>
-          </a:solidFill>
-          <a:ln>
-            <a:noFill/>
-          </a:ln>
-        </p:spPr>
-        <p:style>
-          <a:lnRef idx="1">
-            <a:schemeClr val="accent1"/>
-          </a:lnRef>
-          <a:fillRef idx="3">
-            <a:schemeClr val="accent1"/>
-          </a:fillRef>
-          <a:effectRef idx="2">
-            <a:schemeClr val="accent1"/>
-          </a:effectRef>
-          <a:fontRef idx="minor">
-            <a:schemeClr val="lt1"/>
-          </a:fontRef>
-        </p:style>
-        <p:txBody>
-          <a:bodyPr rtlCol="0" anchor="ctr"/>
-          <a:lstStyle/>
-          <a:p>
-            <a:pPr algn="ctr"/>
-          </a:p>
-        </p:txBody>
-      </p:sp>
-      <p:sp>
-        <p:nvSpPr>
-          <p:cNvPr id="4" name="TextBox 3"/>
+          <p:cNvPr id="3" name="TextBox 2"/>
           <p:cNvSpPr txBox="1"/>
           <p:nvPr/>
         </p:nvSpPr>
         <p:spPr>
           <a:xfrm>
-            <a:off x="685800" y="109728"/>
-            <a:ext cx="10817352" cy="228600"/>
+            <a:off x="685800" y="2377440"/>
+            <a:ext cx="10817352" cy="365760"/>
           </a:xfrm>
           <a:prstGeom prst="rect">
             <a:avLst/>
@@ -4696,70 +4652,27 @@
           <a:p>
             <a:pPr algn="l"/>
             <a:r>
-              <a:rPr sz="750">
-                <a:solidFill>
-                  <a:srgbClr val="78808C"/>
+              <a:rPr sz="1200">
+                <a:solidFill>
+                  <a:srgbClr val="D9C089"/>
                 </a:solidFill>
                 <a:latin typeface="Consolas"/>
               </a:rPr>
-              <a:t>M17  ·  INHALT</a:t>
-            </a:r>
-          </a:p>
-        </p:txBody>
-      </p:sp>
-      <p:sp>
-        <p:nvSpPr>
-          <p:cNvPr id="5" name="Rectangle 4"/>
+              <a:t>FALLARBEIT</a:t>
+            </a:r>
+          </a:p>
+        </p:txBody>
+      </p:sp>
+      <p:sp>
+        <p:nvSpPr>
+          <p:cNvPr id="4" name="Rectangle 3"/>
           <p:cNvSpPr/>
           <p:nvPr/>
         </p:nvSpPr>
         <p:spPr>
           <a:xfrm>
-            <a:off x="0" y="1234440"/>
-            <a:ext cx="12188952" cy="12700"/>
-          </a:xfrm>
-          <a:prstGeom prst="rect">
-            <a:avLst/>
-          </a:prstGeom>
-          <a:solidFill>
-            <a:srgbClr val="D8DFE4"/>
-          </a:solidFill>
-          <a:ln>
-            <a:noFill/>
-          </a:ln>
-        </p:spPr>
-        <p:style>
-          <a:lnRef idx="1">
-            <a:schemeClr val="accent1"/>
-          </a:lnRef>
-          <a:fillRef idx="3">
-            <a:schemeClr val="accent1"/>
-          </a:fillRef>
-          <a:effectRef idx="2">
-            <a:schemeClr val="accent1"/>
-          </a:effectRef>
-          <a:fontRef idx="minor">
-            <a:schemeClr val="lt1"/>
-          </a:fontRef>
-        </p:style>
-        <p:txBody>
-          <a:bodyPr rtlCol="0" anchor="ctr"/>
-          <a:lstStyle/>
-          <a:p>
-            <a:pPr algn="ctr"/>
-          </a:p>
-        </p:txBody>
-      </p:sp>
-      <p:sp>
-        <p:nvSpPr>
-          <p:cNvPr id="6" name="Rectangle 5"/>
-          <p:cNvSpPr/>
-          <p:nvPr/>
-        </p:nvSpPr>
-        <p:spPr>
-          <a:xfrm>
-            <a:off x="685800" y="502920"/>
-            <a:ext cx="36576" cy="658368"/>
+            <a:off x="685800" y="2788920"/>
+            <a:ext cx="548640" cy="38100"/>
           </a:xfrm>
           <a:prstGeom prst="rect">
             <a:avLst/>
@@ -4795,14 +4708,14 @@
       </p:sp>
       <p:sp>
         <p:nvSpPr>
-          <p:cNvPr id="7" name="TextBox 6"/>
+          <p:cNvPr id="5" name="TextBox 4"/>
           <p:cNvSpPr txBox="1"/>
           <p:nvPr/>
         </p:nvSpPr>
         <p:spPr>
           <a:xfrm>
-            <a:off x="813816" y="502920"/>
-            <a:ext cx="10634472" cy="685800"/>
+            <a:off x="685800" y="3017520"/>
+            <a:ext cx="10817352" cy="1463040"/>
           </a:xfrm>
           <a:prstGeom prst="rect">
             <a:avLst/>
@@ -4817,27 +4730,27 @@
           <a:p>
             <a:pPr algn="l"/>
             <a:r>
-              <a:rPr sz="2400" b="1" i="0">
-                <a:solidFill>
-                  <a:srgbClr val="1F2C56"/>
+              <a:rPr sz="4000" b="1" i="0">
+                <a:solidFill>
+                  <a:srgbClr val="FFFFFF"/>
                 </a:solidFill>
                 <a:latin typeface="Arial"/>
               </a:rPr>
-              <a:t>Die Bedarfsdimensionen im UnternehmerDialog</a:t>
-            </a:r>
-          </a:p>
-        </p:txBody>
-      </p:sp>
-      <p:sp>
-        <p:nvSpPr>
-          <p:cNvPr id="8" name="TextBox 7"/>
+              <a:t>Praxiscase</a:t>
+            </a:r>
+          </a:p>
+        </p:txBody>
+      </p:sp>
+      <p:sp>
+        <p:nvSpPr>
+          <p:cNvPr id="6" name="TextBox 5"/>
           <p:cNvSpPr txBox="1"/>
           <p:nvPr/>
         </p:nvSpPr>
         <p:spPr>
           <a:xfrm>
-            <a:off x="685800" y="1417320"/>
-            <a:ext cx="10817352" cy="4892040"/>
+            <a:off x="685800" y="4480560"/>
+            <a:ext cx="8653881" cy="1280160"/>
           </a:xfrm>
           <a:prstGeom prst="rect">
             <a:avLst/>
@@ -4845,103 +4758,34 @@
           <a:noFill/>
         </p:spPr>
         <p:txBody>
-          <a:bodyPr wrap="square" anchor="ctr">
+          <a:bodyPr wrap="square">
             <a:spAutoFit/>
           </a:bodyPr>
           <a:lstStyle/>
           <a:p>
-            <a:pPr marL="190500" indent="-190500">
-              <a:spcBef>
-                <a:spcPts val="400"/>
-              </a:spcBef>
-              <a:spcAft>
-                <a:spcPts val="200"/>
-              </a:spcAft>
-            </a:pPr>
-            <a:r>
-              <a:rPr sz="1300">
-                <a:solidFill>
-                  <a:srgbClr val="3D5466"/>
+            <a:pPr algn="l"/>
+            <a:r>
+              <a:rPr sz="1600" b="0" i="0">
+                <a:solidFill>
+                  <a:srgbClr val="C8D2E6"/>
                 </a:solidFill>
                 <a:latin typeface="Arial"/>
               </a:rPr>
-              <a:t>▸  (Bezeichnungen entsprechen der agree-Standardstruktur; in Ihrer Bankinstallation können einzelne Felder abweichend benannt sein)</a:t>
-            </a:r>
-          </a:p>
-          <a:p>
-            <a:pPr marL="190500" indent="-190500">
-              <a:spcBef>
-                <a:spcPts val="400"/>
-              </a:spcBef>
-              <a:spcAft>
-                <a:spcPts val="200"/>
-              </a:spcAft>
-            </a:pPr>
-            <a:r>
-              <a:rPr sz="1300">
-                <a:solidFill>
-                  <a:srgbClr val="3D5466"/>
-                </a:solidFill>
-                <a:latin typeface="Arial"/>
-              </a:rPr>
-              <a:t>▸  Wichtig: Nicht alle Dimensionen in jedem Gespräch vollständig abarbeiten. Priorität setzen – zwei oder drei Dimensionen pro Gespräch vertiefen.</a:t>
-            </a:r>
-          </a:p>
-        </p:txBody>
-      </p:sp>
-      <p:sp>
-        <p:nvSpPr>
-          <p:cNvPr id="9" name="Rectangle 8"/>
-          <p:cNvSpPr/>
-          <p:nvPr/>
-        </p:nvSpPr>
-        <p:spPr>
-          <a:xfrm>
-            <a:off x="0" y="6510528"/>
-            <a:ext cx="12188952" cy="347472"/>
-          </a:xfrm>
-          <a:prstGeom prst="rect">
-            <a:avLst/>
-          </a:prstGeom>
-          <a:solidFill>
-            <a:srgbClr val="0A1937"/>
-          </a:solidFill>
-          <a:ln>
-            <a:noFill/>
-          </a:ln>
-        </p:spPr>
-        <p:style>
-          <a:lnRef idx="1">
-            <a:schemeClr val="accent1"/>
-          </a:lnRef>
-          <a:fillRef idx="3">
-            <a:schemeClr val="accent1"/>
-          </a:fillRef>
-          <a:effectRef idx="2">
-            <a:schemeClr val="accent1"/>
-          </a:effectRef>
-          <a:fontRef idx="minor">
-            <a:schemeClr val="lt1"/>
-          </a:fontRef>
-        </p:style>
-        <p:txBody>
-          <a:bodyPr rtlCol="0" anchor="ctr"/>
-          <a:lstStyle/>
-          <a:p>
-            <a:pPr algn="ctr"/>
-          </a:p>
-        </p:txBody>
-      </p:sp>
-      <p:sp>
-        <p:nvSpPr>
-          <p:cNvPr id="10" name="TextBox 9"/>
+              <a:t>Ein Jahresgespräch von A bis Z effizient in agree abbilden.</a:t>
+            </a:r>
+          </a:p>
+        </p:txBody>
+      </p:sp>
+      <p:sp>
+        <p:nvSpPr>
+          <p:cNvPr id="7" name="TextBox 6"/>
           <p:cNvSpPr txBox="1"/>
           <p:nvPr/>
         </p:nvSpPr>
         <p:spPr>
           <a:xfrm>
-            <a:off x="685800" y="6583680"/>
-            <a:ext cx="6490411" cy="256032"/>
+            <a:off x="685800" y="6355080"/>
+            <a:ext cx="10817352" cy="274320"/>
           </a:xfrm>
           <a:prstGeom prst="rect">
             <a:avLst/>
@@ -4958,7 +4802,7 @@
             <a:r>
               <a:rPr sz="700">
                 <a:solidFill>
-                  <a:srgbClr val="A0B4D2"/>
+                  <a:srgbClr val="8CA0C3"/>
                 </a:solidFill>
                 <a:latin typeface="Consolas"/>
               </a:rPr>
@@ -5101,7 +4945,7 @@
                 </a:solidFill>
                 <a:latin typeface="Consolas"/>
               </a:rPr>
-              <a:t>M17  ·  INHALT</a:t>
+              <a:t>M17  ·  ARBEITSBLATT</a:t>
             </a:r>
           </a:p>
         </p:txBody>
@@ -5222,7 +5066,7 @@
                 </a:solidFill>
                 <a:latin typeface="Arial"/>
               </a:rPr>
-              <a:t>Dokumentationsstandards</a:t>
+              <a:t>Ein Jahresgespräch von A bis Z bearbeiten</a:t>
             </a:r>
           </a:p>
         </p:txBody>
@@ -5235,8 +5079,8 @@
         </p:nvSpPr>
         <p:spPr>
           <a:xfrm>
-            <a:off x="685800" y="1417320"/>
-            <a:ext cx="10817352" cy="4892040"/>
+            <a:off x="685800" y="1554480"/>
+            <a:ext cx="10817352" cy="3840480"/>
           </a:xfrm>
           <a:prstGeom prst="rect">
             <a:avLst/>
@@ -5258,13 +5102,13 @@
               </a:spcAft>
             </a:pPr>
             <a:r>
-              <a:rPr sz="1300">
+              <a:rPr sz="1400">
                 <a:solidFill>
                   <a:srgbClr val="3D5466"/>
                 </a:solidFill>
                 <a:latin typeface="Arial"/>
               </a:rPr>
-              <a:t>▸  Datum, Teilnehmer, Gesprächsanlass</a:t>
+              <a:t>▸  Führen Sie Ihren agree-Selbstcheck durch (AB-1).</a:t>
             </a:r>
           </a:p>
           <a:p>
@@ -5277,13 +5121,13 @@
               </a:spcAft>
             </a:pPr>
             <a:r>
-              <a:rPr sz="1300">
+              <a:rPr sz="1400">
                 <a:solidFill>
                   <a:srgbClr val="3D5466"/>
                 </a:solidFill>
                 <a:latin typeface="Arial"/>
               </a:rPr>
-              <a:t>▸  Besprochene Bedarfsdimensionen mit Ergebnis (Bedarf vorhanden / kein Bedarf / offen)</a:t>
+              <a:t>▸  Bilden Sie ein vollständiges Jahresgespräch (Vor–Während–Nach) im System ab.</a:t>
             </a:r>
           </a:p>
           <a:p>
@@ -5296,191 +5140,98 @@
               </a:spcAft>
             </a:pPr>
             <a:r>
-              <a:rPr sz="1300">
+              <a:rPr sz="1400">
                 <a:solidFill>
                   <a:srgbClr val="3D5466"/>
                 </a:solidFill>
                 <a:latin typeface="Arial"/>
               </a:rPr>
-              <a:t>▸  Vereinbarte Maßnahmen mit Termin</a:t>
-            </a:r>
-          </a:p>
-          <a:p>
-            <a:pPr marL="190500" indent="-190500">
-              <a:spcBef>
-                <a:spcPts val="400"/>
-              </a:spcBef>
-              <a:spcAft>
-                <a:spcPts val="200"/>
-              </a:spcAft>
-            </a:pPr>
-            <a:r>
-              <a:rPr sz="1300">
-                <a:solidFill>
-                  <a:srgbClr val="3D5466"/>
+              <a:t>▸  Entwickeln Sie Ihren persönlichen Workflow-Optimierungsplan (AB-2).</a:t>
+            </a:r>
+          </a:p>
+        </p:txBody>
+      </p:sp>
+      <p:sp>
+        <p:nvSpPr>
+          <p:cNvPr id="9" name="Rectangle 8"/>
+          <p:cNvSpPr/>
+          <p:nvPr/>
+        </p:nvSpPr>
+        <p:spPr>
+          <a:xfrm>
+            <a:off x="685800" y="5486400"/>
+            <a:ext cx="10817352" cy="640080"/>
+          </a:xfrm>
+          <a:prstGeom prst="rect">
+            <a:avLst/>
+          </a:prstGeom>
+          <a:solidFill>
+            <a:srgbClr val="1F2C56"/>
+          </a:solidFill>
+          <a:ln>
+            <a:noFill/>
+          </a:ln>
+        </p:spPr>
+        <p:style>
+          <a:lnRef idx="1">
+            <a:schemeClr val="accent1"/>
+          </a:lnRef>
+          <a:fillRef idx="3">
+            <a:schemeClr val="accent1"/>
+          </a:fillRef>
+          <a:effectRef idx="2">
+            <a:schemeClr val="accent1"/>
+          </a:effectRef>
+          <a:fontRef idx="minor">
+            <a:schemeClr val="lt1"/>
+          </a:fontRef>
+        </p:style>
+        <p:txBody>
+          <a:bodyPr rtlCol="0" anchor="ctr"/>
+          <a:lstStyle/>
+          <a:p>
+            <a:pPr algn="ctr"/>
+          </a:p>
+        </p:txBody>
+      </p:sp>
+      <p:sp>
+        <p:nvSpPr>
+          <p:cNvPr id="10" name="TextBox 9"/>
+          <p:cNvSpPr txBox="1"/>
+          <p:nvPr/>
+        </p:nvSpPr>
+        <p:spPr>
+          <a:xfrm>
+            <a:off x="868680" y="5596128"/>
+            <a:ext cx="10451592" cy="457200"/>
+          </a:xfrm>
+          <a:prstGeom prst="rect">
+            <a:avLst/>
+          </a:prstGeom>
+          <a:noFill/>
+        </p:spPr>
+        <p:txBody>
+          <a:bodyPr wrap="square">
+            <a:spAutoFit/>
+          </a:bodyPr>
+          <a:lstStyle/>
+          <a:p>
+            <a:pPr algn="l"/>
+            <a:r>
+              <a:rPr sz="1300" b="1" i="0">
+                <a:solidFill>
+                  <a:srgbClr val="FFFFFF"/>
                 </a:solidFill>
                 <a:latin typeface="Arial"/>
               </a:rPr>
-              <a:t>▸  Folgeaktivitäten angelegt</a:t>
-            </a:r>
-          </a:p>
-          <a:p>
-            <a:pPr marL="190500" indent="-190500">
-              <a:spcBef>
-                <a:spcPts val="400"/>
-              </a:spcBef>
-              <a:spcAft>
-                <a:spcPts val="200"/>
-              </a:spcAft>
-            </a:pPr>
-            <a:r>
-              <a:rPr sz="1300">
-                <a:solidFill>
-                  <a:srgbClr val="3D5466"/>
-                </a:solidFill>
-                <a:latin typeface="Arial"/>
-              </a:rPr>
-              <a:t>▸  ## 4.4 Reporting-Cockpits: Was wann wozu?</a:t>
-            </a:r>
-          </a:p>
-          <a:p>
-            <a:pPr marL="190500" indent="-190500">
-              <a:spcBef>
-                <a:spcPts val="400"/>
-              </a:spcBef>
-              <a:spcAft>
-                <a:spcPts val="200"/>
-              </a:spcAft>
-            </a:pPr>
-            <a:r>
-              <a:rPr sz="1300">
-                <a:solidFill>
-                  <a:srgbClr val="3D5466"/>
-                </a:solidFill>
-                <a:latin typeface="Arial"/>
-              </a:rPr>
-              <a:t>▸  Empfehlung – Die 15-Minuten-Morgenroutine:</a:t>
-            </a:r>
-          </a:p>
-          <a:p>
-            <a:pPr marL="190500" indent="-190500">
-              <a:spcBef>
-                <a:spcPts val="400"/>
-              </a:spcBef>
-              <a:spcAft>
-                <a:spcPts val="200"/>
-              </a:spcAft>
-            </a:pPr>
-            <a:r>
-              <a:rPr sz="1300">
-                <a:solidFill>
-                  <a:srgbClr val="3D5466"/>
-                </a:solidFill>
-                <a:latin typeface="Arial"/>
-              </a:rPr>
-              <a:t>▸  Aktivitätenübersicht: Welche Aufgaben sind heute fällig? (3 Min.)</a:t>
-            </a:r>
-          </a:p>
-          <a:p>
-            <a:pPr marL="190500" indent="-190500">
-              <a:spcBef>
-                <a:spcPts val="400"/>
-              </a:spcBef>
-              <a:spcAft>
-                <a:spcPts val="200"/>
-              </a:spcAft>
-            </a:pPr>
-            <a:r>
-              <a:rPr sz="1300">
-                <a:solidFill>
-                  <a:srgbClr val="3D5466"/>
-                </a:solidFill>
-                <a:latin typeface="Arial"/>
-              </a:rPr>
-              <a:t>▸  Frühwarnliste: Neue Hinweise? (5 Min.)</a:t>
-            </a:r>
-          </a:p>
-          <a:p>
-            <a:pPr marL="190500" indent="-190500">
-              <a:spcBef>
-                <a:spcPts val="400"/>
-              </a:spcBef>
-              <a:spcAft>
-                <a:spcPts val="200"/>
-              </a:spcAft>
-            </a:pPr>
-            <a:r>
-              <a:rPr sz="1300">
-                <a:solidFill>
-                  <a:srgbClr val="3D5466"/>
-                </a:solidFill>
-                <a:latin typeface="Arial"/>
-              </a:rPr>
-              <a:t>▸  Prolongationsübersicht: Fälligkeiten in den nächsten 30 Tagen? (3 Min.)</a:t>
-            </a:r>
-          </a:p>
-          <a:p>
-            <a:pPr marL="190500" indent="-190500">
-              <a:spcBef>
-                <a:spcPts val="400"/>
-              </a:spcBef>
-              <a:spcAft>
-                <a:spcPts val="200"/>
-              </a:spcAft>
-            </a:pPr>
-            <a:r>
-              <a:rPr sz="1300">
-                <a:solidFill>
-                  <a:srgbClr val="3D5466"/>
-                </a:solidFill>
-                <a:latin typeface="Arial"/>
-              </a:rPr>
-              <a:t>▸  E-Mail an Verbundpartner zu offenen Übergaben? (4 Min.)</a:t>
-            </a:r>
-          </a:p>
-          <a:p>
-            <a:pPr marL="190500" indent="-190500">
-              <a:spcBef>
-                <a:spcPts val="400"/>
-              </a:spcBef>
-              <a:spcAft>
-                <a:spcPts val="200"/>
-              </a:spcAft>
-            </a:pPr>
-            <a:r>
-              <a:rPr sz="1300">
-                <a:solidFill>
-                  <a:srgbClr val="3D5466"/>
-                </a:solidFill>
-                <a:latin typeface="Arial"/>
-              </a:rPr>
-              <a:t>▸  Diese Routine hält den Bestand im Griff – ohne aufwendige Recherche.</a:t>
-            </a:r>
-          </a:p>
-          <a:p>
-            <a:pPr marL="190500" indent="-190500">
-              <a:spcBef>
-                <a:spcPts val="400"/>
-              </a:spcBef>
-              <a:spcAft>
-                <a:spcPts val="200"/>
-              </a:spcAft>
-            </a:pPr>
-            <a:r>
-              <a:rPr sz="1300">
-                <a:solidFill>
-                  <a:srgbClr val="3D5466"/>
-                </a:solidFill>
-                <a:latin typeface="Arial"/>
-              </a:rPr>
-              <a:t>▸  ## 4.5 VR-NetWorld und Verbundpartner-Systeme</a:t>
-            </a:r>
-          </a:p>
-        </p:txBody>
-      </p:sp>
-      <p:sp>
-        <p:nvSpPr>
-          <p:cNvPr id="9" name="Rectangle 8"/>
+              <a:t>→  Bearbeitung im Teilnehmer-Workbook (Arbeitsblatt mit Ausfüllfeldern)</a:t>
+            </a:r>
+          </a:p>
+        </p:txBody>
+      </p:sp>
+      <p:sp>
+        <p:nvSpPr>
+          <p:cNvPr id="11" name="Rectangle 10"/>
           <p:cNvSpPr/>
           <p:nvPr/>
         </p:nvSpPr>
@@ -5523,7 +5274,7 @@
       </p:sp>
       <p:sp>
         <p:nvSpPr>
-          <p:cNvPr id="10" name="TextBox 9"/>
+          <p:cNvPr id="12" name="TextBox 11"/>
           <p:cNvSpPr txBox="1"/>
           <p:nvPr/>
         </p:nvSpPr>
@@ -5811,7 +5562,7 @@
                 </a:solidFill>
                 <a:latin typeface="Arial"/>
               </a:rPr>
-              <a:t>AB-1: Mein agree-Selbstcheck</a:t>
+              <a:t>Prinzip dieses Moduls</a:t>
             </a:r>
           </a:p>
         </p:txBody>
@@ -5837,6 +5588,25 @@
             <a:spAutoFit/>
           </a:bodyPr>
           <a:lstStyle/>
+          <a:p>
+            <a:pPr marL="177800" indent="-177800">
+              <a:spcBef>
+                <a:spcPts val="600"/>
+              </a:spcBef>
+              <a:spcAft>
+                <a:spcPts val="200"/>
+              </a:spcAft>
+            </a:pPr>
+            <a:r>
+              <a:rPr sz="1200" i="1">
+                <a:solidFill>
+                  <a:srgbClr val="3D5466"/>
+                </a:solidFill>
+                <a:latin typeface="Arial"/>
+              </a:rPr>
+              <a:t>→  Das System soll dir Zeit fürs Gespräch schenken, nicht sie nehmen.</a:t>
+            </a:r>
+          </a:p>
           <a:p>
             <a:pPr marL="190500" indent="-190500">
               <a:spcBef>
@@ -5853,45 +5623,7 @@
                 </a:solidFill>
                 <a:latin typeface="Arial"/>
               </a:rPr>
-              <a:t>▸  Bewerten Sie Ihren aktuellen Umgang mit agree ehrlich (1 = nutze ich kaum / 5 = nutze ich routiniert):</a:t>
-            </a:r>
-          </a:p>
-          <a:p>
-            <a:pPr marL="190500" indent="-190500">
-              <a:spcBef>
-                <a:spcPts val="400"/>
-              </a:spcBef>
-              <a:spcAft>
-                <a:spcPts val="200"/>
-              </a:spcAft>
-            </a:pPr>
-            <a:r>
-              <a:rPr sz="1300">
-                <a:solidFill>
-                  <a:srgbClr val="3D5466"/>
-                </a:solidFill>
-                <a:latin typeface="Arial"/>
-              </a:rPr>
-              <a:t>▸  Meine zwei größten Zeitfresser im aktuellen Workflow:</a:t>
-            </a:r>
-          </a:p>
-          <a:p>
-            <a:pPr marL="190500" indent="-190500">
-              <a:spcBef>
-                <a:spcPts val="400"/>
-              </a:spcBef>
-              <a:spcAft>
-                <a:spcPts val="200"/>
-              </a:spcAft>
-            </a:pPr>
-            <a:r>
-              <a:rPr sz="1300">
-                <a:solidFill>
-                  <a:srgbClr val="3D5466"/>
-                </a:solidFill>
-                <a:latin typeface="Arial"/>
-              </a:rPr>
-              <a:t>▸  agree-Funktion, die ich morgen früh ausprobiere:</a:t>
+              <a:t>▸  Wer agree für Vorbereitung und Dokumentation beherrscht, gewinnt Minuten je Termin zurück – für den Kunden.</a:t>
             </a:r>
           </a:p>
         </p:txBody>
@@ -6007,7 +5739,7 @@
             <a:avLst/>
           </a:prstGeom>
           <a:solidFill>
-            <a:srgbClr val="FFFFFF"/>
+            <a:srgbClr val="EDEDF3"/>
           </a:solidFill>
           <a:ln>
             <a:noFill/>
@@ -6108,43 +5840,51 @@
                 </a:solidFill>
                 <a:latin typeface="Consolas"/>
               </a:rPr>
-              <a:t>M17  ·  ÜBERSICHT</a:t>
-            </a:r>
-          </a:p>
-        </p:txBody>
-      </p:sp>
-      <p:sp>
-        <p:nvSpPr>
-          <p:cNvPr id="5" name="TextBox 4"/>
-          <p:cNvSpPr txBox="1"/>
-          <p:nvPr/>
-        </p:nvSpPr>
-        <p:spPr>
-          <a:xfrm>
-            <a:off x="685800" y="502920"/>
-            <a:ext cx="10817352" cy="594360"/>
-          </a:xfrm>
-          <a:prstGeom prst="rect">
-            <a:avLst/>
-          </a:prstGeom>
-          <a:noFill/>
-        </p:spPr>
-        <p:txBody>
-          <a:bodyPr wrap="square">
-            <a:spAutoFit/>
-          </a:bodyPr>
-          <a:lstStyle/>
-          <a:p>
-            <a:pPr algn="l"/>
-            <a:r>
-              <a:rPr sz="2000" b="1" i="0">
-                <a:solidFill>
-                  <a:srgbClr val="1F2C56"/>
-                </a:solidFill>
-                <a:latin typeface="Arial"/>
-              </a:rPr>
-              <a:t>AB-1: Mein agree-Selbstcheck</a:t>
-            </a:r>
+              <a:t>M17  ·  INHALT</a:t>
+            </a:r>
+          </a:p>
+        </p:txBody>
+      </p:sp>
+      <p:sp>
+        <p:nvSpPr>
+          <p:cNvPr id="5" name="Rectangle 4"/>
+          <p:cNvSpPr/>
+          <p:nvPr/>
+        </p:nvSpPr>
+        <p:spPr>
+          <a:xfrm>
+            <a:off x="0" y="1234440"/>
+            <a:ext cx="12188952" cy="12700"/>
+          </a:xfrm>
+          <a:prstGeom prst="rect">
+            <a:avLst/>
+          </a:prstGeom>
+          <a:solidFill>
+            <a:srgbClr val="D8DFE4"/>
+          </a:solidFill>
+          <a:ln>
+            <a:noFill/>
+          </a:ln>
+        </p:spPr>
+        <p:style>
+          <a:lnRef idx="1">
+            <a:schemeClr val="accent1"/>
+          </a:lnRef>
+          <a:fillRef idx="3">
+            <a:schemeClr val="accent1"/>
+          </a:fillRef>
+          <a:effectRef idx="2">
+            <a:schemeClr val="accent1"/>
+          </a:effectRef>
+          <a:fontRef idx="minor">
+            <a:schemeClr val="lt1"/>
+          </a:fontRef>
+        </p:style>
+        <p:txBody>
+          <a:bodyPr rtlCol="0" anchor="ctr"/>
+          <a:lstStyle/>
+          <a:p>
+            <a:pPr algn="ctr"/>
           </a:p>
         </p:txBody>
       </p:sp>
@@ -6156,8 +5896,8 @@
         </p:nvSpPr>
         <p:spPr>
           <a:xfrm>
-            <a:off x="685800" y="1143000"/>
-            <a:ext cx="10817352" cy="25400"/>
+            <a:off x="685800" y="502920"/>
+            <a:ext cx="36576" cy="658368"/>
           </a:xfrm>
           <a:prstGeom prst="rect">
             <a:avLst/>
@@ -6191,356 +5931,124 @@
           </a:p>
         </p:txBody>
       </p:sp>
-      <p:graphicFrame>
-        <p:nvGraphicFramePr>
-          <p:cNvPr id="7" name="Table 6"/>
-          <p:cNvGraphicFramePr>
-            <a:graphicFrameLocks noGrp="1"/>
-          </p:cNvGraphicFramePr>
-          <p:nvPr/>
-        </p:nvGraphicFramePr>
-        <p:xfrm>
-          <a:off x="685800" y="1417320"/>
-          <a:ext cx="10817352" cy="3072384"/>
-        </p:xfrm>
-        <a:graphic>
-          <a:graphicData uri="http://schemas.openxmlformats.org/drawingml/2006/table">
-            <a:tbl>
-              <a:tblPr firstRow="1" bandRow="1">
-                <a:tableStyleId>{5C22544A-7EE6-4342-B048-85BDC9FD1C3A}</a:tableStyleId>
-              </a:tblPr>
-              <a:tblGrid>
-                <a:gridCol w="3605784"/>
-                <a:gridCol w="3605784"/>
-                <a:gridCol w="3605784"/>
-              </a:tblGrid>
-              <a:tr h="384048">
-                <a:tc>
-                  <a:txBody>
-                    <a:bodyPr/>
-                    <a:lstStyle/>
-                    <a:p>
-                      <a:r>
-                        <a:rPr sz="1100" b="1">
-                          <a:solidFill>
-                            <a:srgbClr val="FFFFFF"/>
-                          </a:solidFill>
-                          <a:latin typeface="Arial"/>
-                        </a:rPr>
-                        <a:t>agree-Bereich</a:t>
-                      </a:r>
-                    </a:p>
-                  </a:txBody>
-                  <a:tcPr>
-                    <a:solidFill>
-                      <a:srgbClr val="1F2C56"/>
-                    </a:solidFill>
-                  </a:tcPr>
-                </a:tc>
-                <a:tc>
-                  <a:txBody>
-                    <a:bodyPr/>
-                    <a:lstStyle/>
-                    <a:p>
-                      <a:r>
-                        <a:rPr sz="1100" b="1">
-                          <a:solidFill>
-                            <a:srgbClr val="FFFFFF"/>
-                          </a:solidFill>
-                          <a:latin typeface="Arial"/>
-                        </a:rPr>
-                        <a:t>Meine Nutzung (1–5)</a:t>
-                      </a:r>
-                    </a:p>
-                  </a:txBody>
-                  <a:tcPr>
-                    <a:solidFill>
-                      <a:srgbClr val="1F2C56"/>
-                    </a:solidFill>
-                  </a:tcPr>
-                </a:tc>
-                <a:tc>
-                  <a:txBody>
-                    <a:bodyPr/>
-                    <a:lstStyle/>
-                    <a:p>
-                      <a:r>
-                        <a:rPr sz="1100" b="1">
-                          <a:solidFill>
-                            <a:srgbClr val="FFFFFF"/>
-                          </a:solidFill>
-                          <a:latin typeface="Arial"/>
-                        </a:rPr>
-                        <a:t>Wichtigste Verbesserung</a:t>
-                      </a:r>
-                    </a:p>
-                  </a:txBody>
-                  <a:tcPr>
-                    <a:solidFill>
-                      <a:srgbClr val="1F2C56"/>
-                    </a:solidFill>
-                  </a:tcPr>
-                </a:tc>
-              </a:tr>
-              <a:tr h="384048">
-                <a:tc>
-                  <a:txBody>
-                    <a:bodyPr/>
-                    <a:lstStyle/>
-                    <a:p>
-                      <a:r>
-                        <a:rPr sz="1050">
-                          <a:solidFill>
-                            <a:srgbClr val="3D5466"/>
-                          </a:solidFill>
-                          <a:latin typeface="Arial"/>
-                        </a:rPr>
-                        <a:t>CRM / Kundenprofil</a:t>
-                      </a:r>
-                    </a:p>
-                  </a:txBody>
-                  <a:tcPr/>
-                </a:tc>
-                <a:tc>
-                  <a:txBody>
-                    <a:bodyPr/>
-                    <a:lstStyle/>
-                    <a:p/>
-                  </a:txBody>
-                  <a:tcPr/>
-                </a:tc>
-                <a:tc>
-                  <a:txBody>
-                    <a:bodyPr/>
-                    <a:lstStyle/>
-                    <a:p/>
-                  </a:txBody>
-                  <a:tcPr/>
-                </a:tc>
-              </a:tr>
-              <a:tr h="384048">
-                <a:tc>
-                  <a:txBody>
-                    <a:bodyPr/>
-                    <a:lstStyle/>
-                    <a:p>
-                      <a:r>
-                        <a:rPr sz="1050">
-                          <a:solidFill>
-                            <a:srgbClr val="3D5466"/>
-                          </a:solidFill>
-                          <a:latin typeface="Arial"/>
-                        </a:rPr>
-                        <a:t>UnternehmerDialog</a:t>
-                      </a:r>
-                    </a:p>
-                  </a:txBody>
-                  <a:tcPr/>
-                </a:tc>
-                <a:tc>
-                  <a:txBody>
-                    <a:bodyPr/>
-                    <a:lstStyle/>
-                    <a:p/>
-                  </a:txBody>
-                  <a:tcPr/>
-                </a:tc>
-                <a:tc>
-                  <a:txBody>
-                    <a:bodyPr/>
-                    <a:lstStyle/>
-                    <a:p/>
-                  </a:txBody>
-                  <a:tcPr/>
-                </a:tc>
-              </a:tr>
-              <a:tr h="384048">
-                <a:tc>
-                  <a:txBody>
-                    <a:bodyPr/>
-                    <a:lstStyle/>
-                    <a:p>
-                      <a:r>
-                        <a:rPr sz="1050">
-                          <a:solidFill>
-                            <a:srgbClr val="3D5466"/>
-                          </a:solidFill>
-                          <a:latin typeface="Arial"/>
-                        </a:rPr>
-                        <a:t>Kreditbearbeitung / Prolongation</a:t>
-                      </a:r>
-                    </a:p>
-                  </a:txBody>
-                  <a:tcPr/>
-                </a:tc>
-                <a:tc>
-                  <a:txBody>
-                    <a:bodyPr/>
-                    <a:lstStyle/>
-                    <a:p/>
-                  </a:txBody>
-                  <a:tcPr/>
-                </a:tc>
-                <a:tc>
-                  <a:txBody>
-                    <a:bodyPr/>
-                    <a:lstStyle/>
-                    <a:p/>
-                  </a:txBody>
-                  <a:tcPr/>
-                </a:tc>
-              </a:tr>
-              <a:tr h="384048">
-                <a:tc>
-                  <a:txBody>
-                    <a:bodyPr/>
-                    <a:lstStyle/>
-                    <a:p>
-                      <a:r>
-                        <a:rPr sz="1050">
-                          <a:solidFill>
-                            <a:srgbClr val="3D5466"/>
-                          </a:solidFill>
-                          <a:latin typeface="Arial"/>
-                        </a:rPr>
-                        <a:t>Controlling (NMZ, DB-Cockpit)</a:t>
-                      </a:r>
-                    </a:p>
-                  </a:txBody>
-                  <a:tcPr/>
-                </a:tc>
-                <a:tc>
-                  <a:txBody>
-                    <a:bodyPr/>
-                    <a:lstStyle/>
-                    <a:p/>
-                  </a:txBody>
-                  <a:tcPr/>
-                </a:tc>
-                <a:tc>
-                  <a:txBody>
-                    <a:bodyPr/>
-                    <a:lstStyle/>
-                    <a:p/>
-                  </a:txBody>
-                  <a:tcPr/>
-                </a:tc>
-              </a:tr>
-              <a:tr h="384048">
-                <a:tc>
-                  <a:txBody>
-                    <a:bodyPr/>
-                    <a:lstStyle/>
-                    <a:p>
-                      <a:r>
-                        <a:rPr sz="1050">
-                          <a:solidFill>
-                            <a:srgbClr val="3D5466"/>
-                          </a:solidFill>
-                          <a:latin typeface="Arial"/>
-                        </a:rPr>
-                        <a:t>Verbundpartner-Cockpit</a:t>
-                      </a:r>
-                    </a:p>
-                  </a:txBody>
-                  <a:tcPr/>
-                </a:tc>
-                <a:tc>
-                  <a:txBody>
-                    <a:bodyPr/>
-                    <a:lstStyle/>
-                    <a:p/>
-                  </a:txBody>
-                  <a:tcPr/>
-                </a:tc>
-                <a:tc>
-                  <a:txBody>
-                    <a:bodyPr/>
-                    <a:lstStyle/>
-                    <a:p/>
-                  </a:txBody>
-                  <a:tcPr/>
-                </a:tc>
-              </a:tr>
-              <a:tr h="384048">
-                <a:tc>
-                  <a:txBody>
-                    <a:bodyPr/>
-                    <a:lstStyle/>
-                    <a:p>
-                      <a:r>
-                        <a:rPr sz="1050">
-                          <a:solidFill>
-                            <a:srgbClr val="3D5466"/>
-                          </a:solidFill>
-                          <a:latin typeface="Arial"/>
-                        </a:rPr>
-                        <a:t>Frühwarnliste</a:t>
-                      </a:r>
-                    </a:p>
-                  </a:txBody>
-                  <a:tcPr/>
-                </a:tc>
-                <a:tc>
-                  <a:txBody>
-                    <a:bodyPr/>
-                    <a:lstStyle/>
-                    <a:p/>
-                  </a:txBody>
-                  <a:tcPr/>
-                </a:tc>
-                <a:tc>
-                  <a:txBody>
-                    <a:bodyPr/>
-                    <a:lstStyle/>
-                    <a:p/>
-                  </a:txBody>
-                  <a:tcPr/>
-                </a:tc>
-              </a:tr>
-              <a:tr h="384048">
-                <a:tc>
-                  <a:txBody>
-                    <a:bodyPr/>
-                    <a:lstStyle/>
-                    <a:p>
-                      <a:r>
-                        <a:rPr sz="1050">
-                          <a:solidFill>
-                            <a:srgbClr val="3D5466"/>
-                          </a:solidFill>
-                          <a:latin typeface="Arial"/>
-                        </a:rPr>
-                        <a:t>Aktivitäten / Aufgabenverwaltung</a:t>
-                      </a:r>
-                    </a:p>
-                  </a:txBody>
-                  <a:tcPr/>
-                </a:tc>
-                <a:tc>
-                  <a:txBody>
-                    <a:bodyPr/>
-                    <a:lstStyle/>
-                    <a:p/>
-                  </a:txBody>
-                  <a:tcPr/>
-                </a:tc>
-                <a:tc>
-                  <a:txBody>
-                    <a:bodyPr/>
-                    <a:lstStyle/>
-                    <a:p/>
-                  </a:txBody>
-                  <a:tcPr/>
-                </a:tc>
-              </a:tr>
-            </a:tbl>
-          </a:graphicData>
-        </a:graphic>
-      </p:graphicFrame>
-      <p:sp>
-        <p:nvSpPr>
-          <p:cNvPr id="8" name="Rectangle 7"/>
+      <p:sp>
+        <p:nvSpPr>
+          <p:cNvPr id="7" name="TextBox 6"/>
+          <p:cNvSpPr txBox="1"/>
+          <p:nvPr/>
+        </p:nvSpPr>
+        <p:spPr>
+          <a:xfrm>
+            <a:off x="813816" y="502920"/>
+            <a:ext cx="10634472" cy="685800"/>
+          </a:xfrm>
+          <a:prstGeom prst="rect">
+            <a:avLst/>
+          </a:prstGeom>
+          <a:noFill/>
+        </p:spPr>
+        <p:txBody>
+          <a:bodyPr wrap="square">
+            <a:spAutoFit/>
+          </a:bodyPr>
+          <a:lstStyle/>
+          <a:p>
+            <a:pPr algn="l"/>
+            <a:r>
+              <a:rPr sz="2400" b="1" i="0">
+                <a:solidFill>
+                  <a:srgbClr val="1F2C56"/>
+                </a:solidFill>
+                <a:latin typeface="Arial"/>
+              </a:rPr>
+              <a:t>Reflexion und Selbstcheck</a:t>
+            </a:r>
+          </a:p>
+        </p:txBody>
+      </p:sp>
+      <p:sp>
+        <p:nvSpPr>
+          <p:cNvPr id="8" name="TextBox 7"/>
+          <p:cNvSpPr txBox="1"/>
+          <p:nvPr/>
+        </p:nvSpPr>
+        <p:spPr>
+          <a:xfrm>
+            <a:off x="685800" y="1417320"/>
+            <a:ext cx="10817352" cy="4892040"/>
+          </a:xfrm>
+          <a:prstGeom prst="rect">
+            <a:avLst/>
+          </a:prstGeom>
+          <a:noFill/>
+        </p:spPr>
+        <p:txBody>
+          <a:bodyPr wrap="square" anchor="ctr">
+            <a:spAutoFit/>
+          </a:bodyPr>
+          <a:lstStyle/>
+          <a:p>
+            <a:pPr marL="190500" indent="-190500">
+              <a:spcBef>
+                <a:spcPts val="400"/>
+              </a:spcBef>
+              <a:spcAft>
+                <a:spcPts val="200"/>
+              </a:spcAft>
+            </a:pPr>
+            <a:r>
+              <a:rPr sz="1300">
+                <a:solidFill>
+                  <a:srgbClr val="3D5466"/>
+                </a:solidFill>
+                <a:latin typeface="Arial"/>
+              </a:rPr>
+              <a:t>▸  Welcher der drei Workflow-Phasen kostet Sie heute am meisten Zeit?</a:t>
+            </a:r>
+          </a:p>
+          <a:p>
+            <a:pPr marL="190500" indent="-190500">
+              <a:spcBef>
+                <a:spcPts val="400"/>
+              </a:spcBef>
+              <a:spcAft>
+                <a:spcPts val="200"/>
+              </a:spcAft>
+            </a:pPr>
+            <a:r>
+              <a:rPr sz="1300">
+                <a:solidFill>
+                  <a:srgbClr val="3D5466"/>
+                </a:solidFill>
+                <a:latin typeface="Arial"/>
+              </a:rPr>
+              <a:t>▸  Welchen agree-Kernbereich nutzen Sie bislang am wenigsten?</a:t>
+            </a:r>
+          </a:p>
+          <a:p>
+            <a:pPr marL="190500" indent="-190500">
+              <a:spcBef>
+                <a:spcPts val="400"/>
+              </a:spcBef>
+              <a:spcAft>
+                <a:spcPts val="200"/>
+              </a:spcAft>
+            </a:pPr>
+            <a:r>
+              <a:rPr sz="1300">
+                <a:solidFill>
+                  <a:srgbClr val="3D5466"/>
+                </a:solidFill>
+                <a:latin typeface="Arial"/>
+              </a:rPr>
+              <a:t>▸  Welche eine Routine ändern Sie ab morgen, um Zeit fürs Gespräch zu gewinnen?</a:t>
+            </a:r>
+          </a:p>
+        </p:txBody>
+      </p:sp>
+      <p:sp>
+        <p:nvSpPr>
+          <p:cNvPr id="9" name="Rectangle 8"/>
           <p:cNvSpPr/>
           <p:nvPr/>
         </p:nvSpPr>
@@ -6583,7 +6091,7 @@
       </p:sp>
       <p:sp>
         <p:nvSpPr>
-          <p:cNvPr id="9" name="TextBox 8"/>
+          <p:cNvPr id="10" name="TextBox 9"/>
           <p:cNvSpPr txBox="1"/>
           <p:nvPr/>
         </p:nvSpPr>
@@ -6612,621 +6120,6 @@
                 <a:latin typeface="Consolas"/>
               </a:rPr>
               <a:t>FKB Campus  ·  M17</a:t>
-            </a:r>
-          </a:p>
-        </p:txBody>
-      </p:sp>
-      <p:sp>
-        <p:nvSpPr>
-          <p:cNvPr id="10" name="TextBox 9"/>
-          <p:cNvSpPr txBox="1"/>
-          <p:nvPr/>
-        </p:nvSpPr>
-        <p:spPr>
-          <a:xfrm>
-            <a:off x="7176211" y="6583680"/>
-            <a:ext cx="4326940" cy="256032"/>
-          </a:xfrm>
-          <a:prstGeom prst="rect">
-            <a:avLst/>
-          </a:prstGeom>
-          <a:noFill/>
-        </p:spPr>
-        <p:txBody>
-          <a:bodyPr wrap="none">
-            <a:spAutoFit/>
-          </a:bodyPr>
-          <a:lstStyle/>
-          <a:p>
-            <a:pPr algn="r"/>
-            <a:r>
-              <a:rPr sz="700">
-                <a:solidFill>
-                  <a:srgbClr val="A0B4D2"/>
-                </a:solidFill>
-                <a:latin typeface="Consolas"/>
-              </a:rPr>
-              <a:t>Übersicht</a:t>
-            </a:r>
-          </a:p>
-        </p:txBody>
-      </p:sp>
-    </p:spTree>
-  </p:cSld>
-  <p:clrMapOvr>
-    <a:masterClrMapping/>
-  </p:clrMapOvr>
-</p:sld>
-</file>
-
-<file path=ppt/slides/slide14.xml><?xml version="1.0" encoding="utf-8"?>
-<p:sld xmlns:a="http://schemas.openxmlformats.org/drawingml/2006/main" xmlns:p="http://schemas.openxmlformats.org/presentationml/2006/main" xmlns:r="http://schemas.openxmlformats.org/officeDocument/2006/relationships">
-  <p:cSld>
-    <p:spTree>
-      <p:nvGrpSpPr>
-        <p:cNvPr id="1" name=""/>
-        <p:cNvGrpSpPr/>
-        <p:nvPr/>
-      </p:nvGrpSpPr>
-      <p:grpSpPr/>
-      <p:sp>
-        <p:nvSpPr>
-          <p:cNvPr id="2" name="Rectangle 1"/>
-          <p:cNvSpPr/>
-          <p:nvPr/>
-        </p:nvSpPr>
-        <p:spPr>
-          <a:xfrm>
-            <a:off x="0" y="0"/>
-            <a:ext cx="12188952" cy="6858000"/>
-          </a:xfrm>
-          <a:prstGeom prst="rect">
-            <a:avLst/>
-          </a:prstGeom>
-          <a:solidFill>
-            <a:srgbClr val="FFFFFF"/>
-          </a:solidFill>
-          <a:ln>
-            <a:noFill/>
-          </a:ln>
-        </p:spPr>
-        <p:style>
-          <a:lnRef idx="1">
-            <a:schemeClr val="accent1"/>
-          </a:lnRef>
-          <a:fillRef idx="3">
-            <a:schemeClr val="accent1"/>
-          </a:fillRef>
-          <a:effectRef idx="2">
-            <a:schemeClr val="accent1"/>
-          </a:effectRef>
-          <a:fontRef idx="minor">
-            <a:schemeClr val="lt1"/>
-          </a:fontRef>
-        </p:style>
-        <p:txBody>
-          <a:bodyPr rtlCol="0" anchor="ctr"/>
-          <a:lstStyle/>
-          <a:p>
-            <a:pPr algn="ctr"/>
-          </a:p>
-        </p:txBody>
-      </p:sp>
-      <p:sp>
-        <p:nvSpPr>
-          <p:cNvPr id="3" name="Rectangle 2"/>
-          <p:cNvSpPr/>
-          <p:nvPr/>
-        </p:nvSpPr>
-        <p:spPr>
-          <a:xfrm>
-            <a:off x="0" y="0"/>
-            <a:ext cx="12188952" cy="50292"/>
-          </a:xfrm>
-          <a:prstGeom prst="rect">
-            <a:avLst/>
-          </a:prstGeom>
-          <a:solidFill>
-            <a:srgbClr val="1F2C56"/>
-          </a:solidFill>
-          <a:ln>
-            <a:noFill/>
-          </a:ln>
-        </p:spPr>
-        <p:style>
-          <a:lnRef idx="1">
-            <a:schemeClr val="accent1"/>
-          </a:lnRef>
-          <a:fillRef idx="3">
-            <a:schemeClr val="accent1"/>
-          </a:fillRef>
-          <a:effectRef idx="2">
-            <a:schemeClr val="accent1"/>
-          </a:effectRef>
-          <a:fontRef idx="minor">
-            <a:schemeClr val="lt1"/>
-          </a:fontRef>
-        </p:style>
-        <p:txBody>
-          <a:bodyPr rtlCol="0" anchor="ctr"/>
-          <a:lstStyle/>
-          <a:p>
-            <a:pPr algn="ctr"/>
-          </a:p>
-        </p:txBody>
-      </p:sp>
-      <p:sp>
-        <p:nvSpPr>
-          <p:cNvPr id="4" name="TextBox 3"/>
-          <p:cNvSpPr txBox="1"/>
-          <p:nvPr/>
-        </p:nvSpPr>
-        <p:spPr>
-          <a:xfrm>
-            <a:off x="685800" y="109728"/>
-            <a:ext cx="10817352" cy="228600"/>
-          </a:xfrm>
-          <a:prstGeom prst="rect">
-            <a:avLst/>
-          </a:prstGeom>
-          <a:noFill/>
-        </p:spPr>
-        <p:txBody>
-          <a:bodyPr wrap="none">
-            <a:spAutoFit/>
-          </a:bodyPr>
-          <a:lstStyle/>
-          <a:p>
-            <a:pPr algn="l"/>
-            <a:r>
-              <a:rPr sz="750">
-                <a:solidFill>
-                  <a:srgbClr val="78808C"/>
-                </a:solidFill>
-                <a:latin typeface="Consolas"/>
-              </a:rPr>
-              <a:t>M17  ·  ÜBERSICHT</a:t>
-            </a:r>
-          </a:p>
-        </p:txBody>
-      </p:sp>
-      <p:sp>
-        <p:nvSpPr>
-          <p:cNvPr id="5" name="TextBox 4"/>
-          <p:cNvSpPr txBox="1"/>
-          <p:nvPr/>
-        </p:nvSpPr>
-        <p:spPr>
-          <a:xfrm>
-            <a:off x="685800" y="502920"/>
-            <a:ext cx="10817352" cy="594360"/>
-          </a:xfrm>
-          <a:prstGeom prst="rect">
-            <a:avLst/>
-          </a:prstGeom>
-          <a:noFill/>
-        </p:spPr>
-        <p:txBody>
-          <a:bodyPr wrap="square">
-            <a:spAutoFit/>
-          </a:bodyPr>
-          <a:lstStyle/>
-          <a:p>
-            <a:pPr algn="l"/>
-            <a:r>
-              <a:rPr sz="2000" b="1" i="0">
-                <a:solidFill>
-                  <a:srgbClr val="1F2C56"/>
-                </a:solidFill>
-                <a:latin typeface="Arial"/>
-              </a:rPr>
-              <a:t>AB-2: Workflow-Optimierungsplan</a:t>
-            </a:r>
-          </a:p>
-        </p:txBody>
-      </p:sp>
-      <p:sp>
-        <p:nvSpPr>
-          <p:cNvPr id="6" name="Rectangle 5"/>
-          <p:cNvSpPr/>
-          <p:nvPr/>
-        </p:nvSpPr>
-        <p:spPr>
-          <a:xfrm>
-            <a:off x="685800" y="1143000"/>
-            <a:ext cx="10817352" cy="25400"/>
-          </a:xfrm>
-          <a:prstGeom prst="rect">
-            <a:avLst/>
-          </a:prstGeom>
-          <a:solidFill>
-            <a:srgbClr val="D9C089"/>
-          </a:solidFill>
-          <a:ln>
-            <a:noFill/>
-          </a:ln>
-        </p:spPr>
-        <p:style>
-          <a:lnRef idx="1">
-            <a:schemeClr val="accent1"/>
-          </a:lnRef>
-          <a:fillRef idx="3">
-            <a:schemeClr val="accent1"/>
-          </a:fillRef>
-          <a:effectRef idx="2">
-            <a:schemeClr val="accent1"/>
-          </a:effectRef>
-          <a:fontRef idx="minor">
-            <a:schemeClr val="lt1"/>
-          </a:fontRef>
-        </p:style>
-        <p:txBody>
-          <a:bodyPr rtlCol="0" anchor="ctr"/>
-          <a:lstStyle/>
-          <a:p>
-            <a:pPr algn="ctr"/>
-          </a:p>
-        </p:txBody>
-      </p:sp>
-      <p:graphicFrame>
-        <p:nvGraphicFramePr>
-          <p:cNvPr id="7" name="Table 6"/>
-          <p:cNvGraphicFramePr>
-            <a:graphicFrameLocks noGrp="1"/>
-          </p:cNvGraphicFramePr>
-          <p:nvPr/>
-        </p:nvGraphicFramePr>
-        <p:xfrm>
-          <a:off x="685800" y="1417320"/>
-          <a:ext cx="10817352" cy="1536192"/>
-        </p:xfrm>
-        <a:graphic>
-          <a:graphicData uri="http://schemas.openxmlformats.org/drawingml/2006/table">
-            <a:tbl>
-              <a:tblPr firstRow="1" bandRow="1">
-                <a:tableStyleId>{5C22544A-7EE6-4342-B048-85BDC9FD1C3A}</a:tableStyleId>
-              </a:tblPr>
-              <a:tblGrid>
-                <a:gridCol w="2704338"/>
-                <a:gridCol w="2704338"/>
-                <a:gridCol w="2704338"/>
-                <a:gridCol w="2704338"/>
-              </a:tblGrid>
-              <a:tr h="384048">
-                <a:tc>
-                  <a:txBody>
-                    <a:bodyPr/>
-                    <a:lstStyle/>
-                    <a:p>
-                      <a:r>
-                        <a:rPr sz="1100" b="1">
-                          <a:solidFill>
-                            <a:srgbClr val="FFFFFF"/>
-                          </a:solidFill>
-                          <a:latin typeface="Arial"/>
-                        </a:rPr>
-                        <a:t>Phase</a:t>
-                      </a:r>
-                    </a:p>
-                  </a:txBody>
-                  <a:tcPr>
-                    <a:solidFill>
-                      <a:srgbClr val="1F2C56"/>
-                    </a:solidFill>
-                  </a:tcPr>
-                </a:tc>
-                <a:tc>
-                  <a:txBody>
-                    <a:bodyPr/>
-                    <a:lstStyle/>
-                    <a:p>
-                      <a:r>
-                        <a:rPr sz="1100" b="1">
-                          <a:solidFill>
-                            <a:srgbClr val="FFFFFF"/>
-                          </a:solidFill>
-                          <a:latin typeface="Arial"/>
-                        </a:rPr>
-                        <a:t>Aktuell</a:t>
-                      </a:r>
-                    </a:p>
-                  </a:txBody>
-                  <a:tcPr>
-                    <a:solidFill>
-                      <a:srgbClr val="1F2C56"/>
-                    </a:solidFill>
-                  </a:tcPr>
-                </a:tc>
-                <a:tc>
-                  <a:txBody>
-                    <a:bodyPr/>
-                    <a:lstStyle/>
-                    <a:p>
-                      <a:r>
-                        <a:rPr sz="1100" b="1">
-                          <a:solidFill>
-                            <a:srgbClr val="FFFFFF"/>
-                          </a:solidFill>
-                          <a:latin typeface="Arial"/>
-                        </a:rPr>
-                        <a:t>Ziel nach Optimierung</a:t>
-                      </a:r>
-                    </a:p>
-                  </a:txBody>
-                  <a:tcPr>
-                    <a:solidFill>
-                      <a:srgbClr val="1F2C56"/>
-                    </a:solidFill>
-                  </a:tcPr>
-                </a:tc>
-                <a:tc>
-                  <a:txBody>
-                    <a:bodyPr/>
-                    <a:lstStyle/>
-                    <a:p>
-                      <a:r>
-                        <a:rPr sz="1100" b="1">
-                          <a:solidFill>
-                            <a:srgbClr val="FFFFFF"/>
-                          </a:solidFill>
-                          <a:latin typeface="Arial"/>
-                        </a:rPr>
-                        <a:t>Maßnahme</a:t>
-                      </a:r>
-                    </a:p>
-                  </a:txBody>
-                  <a:tcPr>
-                    <a:solidFill>
-                      <a:srgbClr val="1F2C56"/>
-                    </a:solidFill>
-                  </a:tcPr>
-                </a:tc>
-              </a:tr>
-              <a:tr h="384048">
-                <a:tc>
-                  <a:txBody>
-                    <a:bodyPr/>
-                    <a:lstStyle/>
-                    <a:p>
-                      <a:r>
-                        <a:rPr sz="1050">
-                          <a:solidFill>
-                            <a:srgbClr val="3D5466"/>
-                          </a:solidFill>
-                          <a:latin typeface="Arial"/>
-                        </a:rPr>
-                        <a:t>Vorbereitung</a:t>
-                      </a:r>
-                    </a:p>
-                  </a:txBody>
-                  <a:tcPr/>
-                </a:tc>
-                <a:tc>
-                  <a:txBody>
-                    <a:bodyPr/>
-                    <a:lstStyle/>
-                    <a:p/>
-                  </a:txBody>
-                  <a:tcPr/>
-                </a:tc>
-                <a:tc>
-                  <a:txBody>
-                    <a:bodyPr/>
-                    <a:lstStyle/>
-                    <a:p/>
-                  </a:txBody>
-                  <a:tcPr/>
-                </a:tc>
-                <a:tc>
-                  <a:txBody>
-                    <a:bodyPr/>
-                    <a:lstStyle/>
-                    <a:p/>
-                  </a:txBody>
-                  <a:tcPr/>
-                </a:tc>
-              </a:tr>
-              <a:tr h="384048">
-                <a:tc>
-                  <a:txBody>
-                    <a:bodyPr/>
-                    <a:lstStyle/>
-                    <a:p>
-                      <a:r>
-                        <a:rPr sz="1050">
-                          <a:solidFill>
-                            <a:srgbClr val="3D5466"/>
-                          </a:solidFill>
-                          <a:latin typeface="Arial"/>
-                        </a:rPr>
-                        <a:t>Nachbereitung</a:t>
-                      </a:r>
-                    </a:p>
-                  </a:txBody>
-                  <a:tcPr/>
-                </a:tc>
-                <a:tc>
-                  <a:txBody>
-                    <a:bodyPr/>
-                    <a:lstStyle/>
-                    <a:p/>
-                  </a:txBody>
-                  <a:tcPr/>
-                </a:tc>
-                <a:tc>
-                  <a:txBody>
-                    <a:bodyPr/>
-                    <a:lstStyle/>
-                    <a:p/>
-                  </a:txBody>
-                  <a:tcPr/>
-                </a:tc>
-                <a:tc>
-                  <a:txBody>
-                    <a:bodyPr/>
-                    <a:lstStyle/>
-                    <a:p/>
-                  </a:txBody>
-                  <a:tcPr/>
-                </a:tc>
-              </a:tr>
-              <a:tr h="384048">
-                <a:tc>
-                  <a:txBody>
-                    <a:bodyPr/>
-                    <a:lstStyle/>
-                    <a:p>
-                      <a:r>
-                        <a:rPr sz="1050">
-                          <a:solidFill>
-                            <a:srgbClr val="3D5466"/>
-                          </a:solidFill>
-                          <a:latin typeface="Arial"/>
-                        </a:rPr>
-                        <a:t>Reporting-Routine</a:t>
-                      </a:r>
-                    </a:p>
-                  </a:txBody>
-                  <a:tcPr/>
-                </a:tc>
-                <a:tc>
-                  <a:txBody>
-                    <a:bodyPr/>
-                    <a:lstStyle/>
-                    <a:p/>
-                  </a:txBody>
-                  <a:tcPr/>
-                </a:tc>
-                <a:tc>
-                  <a:txBody>
-                    <a:bodyPr/>
-                    <a:lstStyle/>
-                    <a:p/>
-                  </a:txBody>
-                  <a:tcPr/>
-                </a:tc>
-                <a:tc>
-                  <a:txBody>
-                    <a:bodyPr/>
-                    <a:lstStyle/>
-                    <a:p/>
-                  </a:txBody>
-                  <a:tcPr/>
-                </a:tc>
-              </a:tr>
-            </a:tbl>
-          </a:graphicData>
-        </a:graphic>
-      </p:graphicFrame>
-      <p:sp>
-        <p:nvSpPr>
-          <p:cNvPr id="8" name="Rectangle 7"/>
-          <p:cNvSpPr/>
-          <p:nvPr/>
-        </p:nvSpPr>
-        <p:spPr>
-          <a:xfrm>
-            <a:off x="0" y="6510528"/>
-            <a:ext cx="12188952" cy="347472"/>
-          </a:xfrm>
-          <a:prstGeom prst="rect">
-            <a:avLst/>
-          </a:prstGeom>
-          <a:solidFill>
-            <a:srgbClr val="0A1937"/>
-          </a:solidFill>
-          <a:ln>
-            <a:noFill/>
-          </a:ln>
-        </p:spPr>
-        <p:style>
-          <a:lnRef idx="1">
-            <a:schemeClr val="accent1"/>
-          </a:lnRef>
-          <a:fillRef idx="3">
-            <a:schemeClr val="accent1"/>
-          </a:fillRef>
-          <a:effectRef idx="2">
-            <a:schemeClr val="accent1"/>
-          </a:effectRef>
-          <a:fontRef idx="minor">
-            <a:schemeClr val="lt1"/>
-          </a:fontRef>
-        </p:style>
-        <p:txBody>
-          <a:bodyPr rtlCol="0" anchor="ctr"/>
-          <a:lstStyle/>
-          <a:p>
-            <a:pPr algn="ctr"/>
-          </a:p>
-        </p:txBody>
-      </p:sp>
-      <p:sp>
-        <p:nvSpPr>
-          <p:cNvPr id="9" name="TextBox 8"/>
-          <p:cNvSpPr txBox="1"/>
-          <p:nvPr/>
-        </p:nvSpPr>
-        <p:spPr>
-          <a:xfrm>
-            <a:off x="685800" y="6583680"/>
-            <a:ext cx="6490411" cy="256032"/>
-          </a:xfrm>
-          <a:prstGeom prst="rect">
-            <a:avLst/>
-          </a:prstGeom>
-          <a:noFill/>
-        </p:spPr>
-        <p:txBody>
-          <a:bodyPr wrap="none">
-            <a:spAutoFit/>
-          </a:bodyPr>
-          <a:lstStyle/>
-          <a:p>
-            <a:pPr algn="l"/>
-            <a:r>
-              <a:rPr sz="700">
-                <a:solidFill>
-                  <a:srgbClr val="A0B4D2"/>
-                </a:solidFill>
-                <a:latin typeface="Consolas"/>
-              </a:rPr>
-              <a:t>FKB Campus  ·  M17</a:t>
-            </a:r>
-          </a:p>
-        </p:txBody>
-      </p:sp>
-      <p:sp>
-        <p:nvSpPr>
-          <p:cNvPr id="10" name="TextBox 9"/>
-          <p:cNvSpPr txBox="1"/>
-          <p:nvPr/>
-        </p:nvSpPr>
-        <p:spPr>
-          <a:xfrm>
-            <a:off x="7176211" y="6583680"/>
-            <a:ext cx="4326940" cy="256032"/>
-          </a:xfrm>
-          <a:prstGeom prst="rect">
-            <a:avLst/>
-          </a:prstGeom>
-          <a:noFill/>
-        </p:spPr>
-        <p:txBody>
-          <a:bodyPr wrap="none">
-            <a:spAutoFit/>
-          </a:bodyPr>
-          <a:lstStyle/>
-          <a:p>
-            <a:pPr algn="r"/>
-            <a:r>
-              <a:rPr sz="700">
-                <a:solidFill>
-                  <a:srgbClr val="A0B4D2"/>
-                </a:solidFill>
-                <a:latin typeface="Consolas"/>
-              </a:rPr>
-              <a:t>Übersicht</a:t>
             </a:r>
           </a:p>
         </p:txBody>
@@ -9018,7 +7911,7 @@
                 </a:solidFill>
                 <a:latin typeface="Arial"/>
               </a:rPr>
-              <a:t>Die häufigsten agree-Fehler im Firmenkundenalltag</a:t>
+              <a:t>Das System soll dir Zeit fürs Gespräch schenken</a:t>
             </a:r>
           </a:p>
         </p:txBody>
@@ -9044,6 +7937,25 @@
             <a:spAutoFit/>
           </a:bodyPr>
           <a:lstStyle/>
+          <a:p>
+            <a:pPr marL="177800" indent="-177800">
+              <a:spcBef>
+                <a:spcPts val="600"/>
+              </a:spcBef>
+              <a:spcAft>
+                <a:spcPts val="200"/>
+              </a:spcAft>
+            </a:pPr>
+            <a:r>
+              <a:rPr sz="1200" i="1">
+                <a:solidFill>
+                  <a:srgbClr val="3D5466"/>
+                </a:solidFill>
+                <a:latin typeface="Arial"/>
+              </a:rPr>
+              <a:t>→  Das System soll dir Zeit fürs Gespräch schenken, nicht sie nehmen.</a:t>
+            </a:r>
+          </a:p>
           <a:p>
             <a:pPr marL="190500" indent="-190500">
               <a:spcBef>
@@ -9060,7 +7972,7 @@
                 </a:solidFill>
                 <a:latin typeface="Arial"/>
               </a:rPr>
-              <a:t>▸  ## 4.2 Effizienter Gesprächsworkflow: Vor – Während – Nach</a:t>
+              <a:t>▸  Wer agree für Vorbereitung und Dokumentation beherrscht, gewinnt Minuten je Termin zurück.</a:t>
             </a:r>
           </a:p>
           <a:p>
@@ -9079,7 +7991,7 @@
                 </a:solidFill>
                 <a:latin typeface="Arial"/>
               </a:rPr>
-              <a:t>▸  Der größte Effizienzgewinn entsteht nicht aus einzelnen Funktionen, sondern aus einem konsistenten Workflow, der agree konsequent in alle drei Gesprächsphasen einbindet.</a:t>
+              <a:t>▸  Diese Minuten gehören dem Kunden – nicht der Maske.</a:t>
             </a:r>
           </a:p>
         </p:txBody>
@@ -9195,7 +8107,7 @@
             <a:avLst/>
           </a:prstGeom>
           <a:solidFill>
-            <a:srgbClr val="FFFFFF"/>
+            <a:srgbClr val="EDEDF3"/>
           </a:solidFill>
           <a:ln>
             <a:noFill/>
@@ -9296,43 +8208,51 @@
                 </a:solidFill>
                 <a:latin typeface="Consolas"/>
               </a:rPr>
-              <a:t>M17  ·  SCHAUBILD</a:t>
-            </a:r>
-          </a:p>
-        </p:txBody>
-      </p:sp>
-      <p:sp>
-        <p:nvSpPr>
-          <p:cNvPr id="5" name="TextBox 4"/>
-          <p:cNvSpPr txBox="1"/>
-          <p:nvPr/>
-        </p:nvSpPr>
-        <p:spPr>
-          <a:xfrm>
-            <a:off x="685800" y="502920"/>
-            <a:ext cx="10817352" cy="594360"/>
-          </a:xfrm>
-          <a:prstGeom prst="rect">
-            <a:avLst/>
-          </a:prstGeom>
-          <a:noFill/>
-        </p:spPr>
-        <p:txBody>
-          <a:bodyPr wrap="square">
-            <a:spAutoFit/>
-          </a:bodyPr>
-          <a:lstStyle/>
-          <a:p>
-            <a:pPr algn="l"/>
-            <a:r>
-              <a:rPr sz="2000" b="1" i="0">
-                <a:solidFill>
-                  <a:srgbClr val="1F2C56"/>
-                </a:solidFill>
-                <a:latin typeface="Arial"/>
-              </a:rPr>
-              <a:t>agree21 Kernbereiche für Firmenkundenberater</a:t>
-            </a:r>
+              <a:t>M17  ·  INHALT</a:t>
+            </a:r>
+          </a:p>
+        </p:txBody>
+      </p:sp>
+      <p:sp>
+        <p:nvSpPr>
+          <p:cNvPr id="5" name="Rectangle 4"/>
+          <p:cNvSpPr/>
+          <p:nvPr/>
+        </p:nvSpPr>
+        <p:spPr>
+          <a:xfrm>
+            <a:off x="0" y="1234440"/>
+            <a:ext cx="12188952" cy="12700"/>
+          </a:xfrm>
+          <a:prstGeom prst="rect">
+            <a:avLst/>
+          </a:prstGeom>
+          <a:solidFill>
+            <a:srgbClr val="D8DFE4"/>
+          </a:solidFill>
+          <a:ln>
+            <a:noFill/>
+          </a:ln>
+        </p:spPr>
+        <p:style>
+          <a:lnRef idx="1">
+            <a:schemeClr val="accent1"/>
+          </a:lnRef>
+          <a:fillRef idx="3">
+            <a:schemeClr val="accent1"/>
+          </a:fillRef>
+          <a:effectRef idx="2">
+            <a:schemeClr val="accent1"/>
+          </a:effectRef>
+          <a:fontRef idx="minor">
+            <a:schemeClr val="lt1"/>
+          </a:fontRef>
+        </p:style>
+        <p:txBody>
+          <a:bodyPr rtlCol="0" anchor="ctr"/>
+          <a:lstStyle/>
+          <a:p>
+            <a:pPr algn="ctr"/>
           </a:p>
         </p:txBody>
       </p:sp>
@@ -9344,8 +8264,8 @@
         </p:nvSpPr>
         <p:spPr>
           <a:xfrm>
-            <a:off x="685800" y="1143000"/>
-            <a:ext cx="10817352" cy="25400"/>
+            <a:off x="685800" y="502920"/>
+            <a:ext cx="36576" cy="658368"/>
           </a:xfrm>
           <a:prstGeom prst="rect">
             <a:avLst/>
@@ -9379,33 +8299,124 @@
           </a:p>
         </p:txBody>
       </p:sp>
-      <p:pic>
-        <p:nvPicPr>
-          <p:cNvPr id="7" name="Picture 6" descr="image.png"/>
-          <p:cNvPicPr>
-            <a:picLocks noChangeAspect="1"/>
-          </p:cNvPicPr>
-          <p:nvPr/>
-        </p:nvPicPr>
-        <p:blipFill>
-          <a:blip r:embed="rId2"/>
-          <a:stretch>
-            <a:fillRect/>
-          </a:stretch>
-        </p:blipFill>
-        <p:spPr>
-          <a:xfrm>
-            <a:off x="2163921" y="1325880"/>
-            <a:ext cx="7861110" cy="4937760"/>
-          </a:xfrm>
-          <a:prstGeom prst="rect">
-            <a:avLst/>
-          </a:prstGeom>
-        </p:spPr>
-      </p:pic>
-      <p:sp>
-        <p:nvSpPr>
-          <p:cNvPr id="8" name="Rectangle 7"/>
+      <p:sp>
+        <p:nvSpPr>
+          <p:cNvPr id="7" name="TextBox 6"/>
+          <p:cNvSpPr txBox="1"/>
+          <p:nvPr/>
+        </p:nvSpPr>
+        <p:spPr>
+          <a:xfrm>
+            <a:off x="813816" y="502920"/>
+            <a:ext cx="10634472" cy="685800"/>
+          </a:xfrm>
+          <a:prstGeom prst="rect">
+            <a:avLst/>
+          </a:prstGeom>
+          <a:noFill/>
+        </p:spPr>
+        <p:txBody>
+          <a:bodyPr wrap="square">
+            <a:spAutoFit/>
+          </a:bodyPr>
+          <a:lstStyle/>
+          <a:p>
+            <a:pPr algn="l"/>
+            <a:r>
+              <a:rPr sz="2400" b="1" i="0">
+                <a:solidFill>
+                  <a:srgbClr val="1F2C56"/>
+                </a:solidFill>
+                <a:latin typeface="Arial"/>
+              </a:rPr>
+              <a:t>Fünf Kernbereiche – und die häufigsten Fehler</a:t>
+            </a:r>
+          </a:p>
+        </p:txBody>
+      </p:sp>
+      <p:sp>
+        <p:nvSpPr>
+          <p:cNvPr id="8" name="TextBox 7"/>
+          <p:cNvSpPr txBox="1"/>
+          <p:nvPr/>
+        </p:nvSpPr>
+        <p:spPr>
+          <a:xfrm>
+            <a:off x="685800" y="1417320"/>
+            <a:ext cx="10817352" cy="4892040"/>
+          </a:xfrm>
+          <a:prstGeom prst="rect">
+            <a:avLst/>
+          </a:prstGeom>
+          <a:noFill/>
+        </p:spPr>
+        <p:txBody>
+          <a:bodyPr wrap="square" anchor="ctr">
+            <a:spAutoFit/>
+          </a:bodyPr>
+          <a:lstStyle/>
+          <a:p>
+            <a:pPr marL="177800" indent="-177800">
+              <a:spcBef>
+                <a:spcPts val="600"/>
+              </a:spcBef>
+              <a:spcAft>
+                <a:spcPts val="200"/>
+              </a:spcAft>
+            </a:pPr>
+            <a:r>
+              <a:rPr sz="1200" i="1">
+                <a:solidFill>
+                  <a:srgbClr val="3D5466"/>
+                </a:solidFill>
+                <a:latin typeface="Arial"/>
+              </a:rPr>
+              <a:t>→  Wer die fünf Kernbereiche von agree kennt, arbeitet mit dem System statt gegen es.</a:t>
+            </a:r>
+          </a:p>
+          <a:p>
+            <a:pPr marL="190500" indent="-190500">
+              <a:spcBef>
+                <a:spcPts val="400"/>
+              </a:spcBef>
+              <a:spcAft>
+                <a:spcPts val="200"/>
+              </a:spcAft>
+            </a:pPr>
+            <a:r>
+              <a:rPr sz="1300">
+                <a:solidFill>
+                  <a:srgbClr val="3D5466"/>
+                </a:solidFill>
+                <a:latin typeface="Arial"/>
+              </a:rPr>
+              <a:t>▸  Kundenstamm, Engagement, Vorgänge, UnternehmerDialog, Reporting.</a:t>
+            </a:r>
+          </a:p>
+          <a:p>
+            <a:pPr marL="190500" indent="-190500">
+              <a:spcBef>
+                <a:spcPts val="400"/>
+              </a:spcBef>
+              <a:spcAft>
+                <a:spcPts val="200"/>
+              </a:spcAft>
+            </a:pPr>
+            <a:r>
+              <a:rPr sz="1300">
+                <a:solidFill>
+                  <a:srgbClr val="3D5466"/>
+                </a:solidFill>
+                <a:latin typeface="Arial"/>
+              </a:rPr>
+              <a:t>▸  Die häufigsten Fehler kosten Zeit: Doppelerfassung, verstreute Notizen, ungenutzte Vorlagen.</a:t>
+            </a:r>
+          </a:p>
+        </p:txBody>
+      </p:sp>
+      <p:sp>
+        <p:nvSpPr>
+          <p:cNvPr id="9" name="Rectangle 8"/>
           <p:cNvSpPr/>
           <p:nvPr/>
         </p:nvSpPr>
@@ -9448,7 +8459,7 @@
       </p:sp>
       <p:sp>
         <p:nvSpPr>
-          <p:cNvPr id="9" name="TextBox 8"/>
+          <p:cNvPr id="10" name="TextBox 9"/>
           <p:cNvSpPr txBox="1"/>
           <p:nvPr/>
         </p:nvSpPr>
@@ -9477,41 +8488,6 @@
                 <a:latin typeface="Consolas"/>
               </a:rPr>
               <a:t>FKB Campus  ·  M17</a:t>
-            </a:r>
-          </a:p>
-        </p:txBody>
-      </p:sp>
-      <p:sp>
-        <p:nvSpPr>
-          <p:cNvPr id="10" name="TextBox 9"/>
-          <p:cNvSpPr txBox="1"/>
-          <p:nvPr/>
-        </p:nvSpPr>
-        <p:spPr>
-          <a:xfrm>
-            <a:off x="7176211" y="6583680"/>
-            <a:ext cx="4326940" cy="256032"/>
-          </a:xfrm>
-          <a:prstGeom prst="rect">
-            <a:avLst/>
-          </a:prstGeom>
-          <a:noFill/>
-        </p:spPr>
-        <p:txBody>
-          <a:bodyPr wrap="none">
-            <a:spAutoFit/>
-          </a:bodyPr>
-          <a:lstStyle/>
-          <a:p>
-            <a:pPr algn="r"/>
-            <a:r>
-              <a:rPr sz="700">
-                <a:solidFill>
-                  <a:srgbClr val="A0B4D2"/>
-                </a:solidFill>
-                <a:latin typeface="Consolas"/>
-              </a:rPr>
-              <a:t>Schaubild</a:t>
             </a:r>
           </a:p>
         </p:txBody>
@@ -9549,7 +8525,7 @@
             <a:avLst/>
           </a:prstGeom>
           <a:solidFill>
-            <a:srgbClr val="EDEDF3"/>
+            <a:srgbClr val="FFFFFF"/>
           </a:solidFill>
           <a:ln>
             <a:noFill/>
@@ -9650,51 +8626,43 @@
                 </a:solidFill>
                 <a:latin typeface="Consolas"/>
               </a:rPr>
-              <a:t>M17  ·  INHALT</a:t>
-            </a:r>
-          </a:p>
-        </p:txBody>
-      </p:sp>
-      <p:sp>
-        <p:nvSpPr>
-          <p:cNvPr id="5" name="Rectangle 4"/>
-          <p:cNvSpPr/>
-          <p:nvPr/>
-        </p:nvSpPr>
-        <p:spPr>
-          <a:xfrm>
-            <a:off x="0" y="1234440"/>
-            <a:ext cx="12188952" cy="12700"/>
-          </a:xfrm>
-          <a:prstGeom prst="rect">
-            <a:avLst/>
-          </a:prstGeom>
-          <a:solidFill>
-            <a:srgbClr val="D8DFE4"/>
-          </a:solidFill>
-          <a:ln>
-            <a:noFill/>
-          </a:ln>
-        </p:spPr>
-        <p:style>
-          <a:lnRef idx="1">
-            <a:schemeClr val="accent1"/>
-          </a:lnRef>
-          <a:fillRef idx="3">
-            <a:schemeClr val="accent1"/>
-          </a:fillRef>
-          <a:effectRef idx="2">
-            <a:schemeClr val="accent1"/>
-          </a:effectRef>
-          <a:fontRef idx="minor">
-            <a:schemeClr val="lt1"/>
-          </a:fontRef>
-        </p:style>
-        <p:txBody>
-          <a:bodyPr rtlCol="0" anchor="ctr"/>
-          <a:lstStyle/>
-          <a:p>
-            <a:pPr algn="ctr"/>
+              <a:t>M17  ·  SCHAUBILD</a:t>
+            </a:r>
+          </a:p>
+        </p:txBody>
+      </p:sp>
+      <p:sp>
+        <p:nvSpPr>
+          <p:cNvPr id="5" name="TextBox 4"/>
+          <p:cNvSpPr txBox="1"/>
+          <p:nvPr/>
+        </p:nvSpPr>
+        <p:spPr>
+          <a:xfrm>
+            <a:off x="685800" y="502920"/>
+            <a:ext cx="10817352" cy="594360"/>
+          </a:xfrm>
+          <a:prstGeom prst="rect">
+            <a:avLst/>
+          </a:prstGeom>
+          <a:noFill/>
+        </p:spPr>
+        <p:txBody>
+          <a:bodyPr wrap="square">
+            <a:spAutoFit/>
+          </a:bodyPr>
+          <a:lstStyle/>
+          <a:p>
+            <a:pPr algn="l"/>
+            <a:r>
+              <a:rPr sz="2000" b="1" i="0">
+                <a:solidFill>
+                  <a:srgbClr val="1F2C56"/>
+                </a:solidFill>
+                <a:latin typeface="Arial"/>
+              </a:rPr>
+              <a:t>Die agree-Kernbereiche für Firmenkundenberater</a:t>
+            </a:r>
           </a:p>
         </p:txBody>
       </p:sp>
@@ -9706,8 +8674,8 @@
         </p:nvSpPr>
         <p:spPr>
           <a:xfrm>
-            <a:off x="685800" y="502920"/>
-            <a:ext cx="36576" cy="658368"/>
+            <a:off x="685800" y="1143000"/>
+            <a:ext cx="10817352" cy="25400"/>
           </a:xfrm>
           <a:prstGeom prst="rect">
             <a:avLst/>
@@ -9741,105 +8709,33 @@
           </a:p>
         </p:txBody>
       </p:sp>
-      <p:sp>
-        <p:nvSpPr>
-          <p:cNvPr id="7" name="TextBox 6"/>
-          <p:cNvSpPr txBox="1"/>
-          <p:nvPr/>
-        </p:nvSpPr>
-        <p:spPr>
-          <a:xfrm>
-            <a:off x="813816" y="502920"/>
-            <a:ext cx="10634472" cy="685800"/>
-          </a:xfrm>
-          <a:prstGeom prst="rect">
-            <a:avLst/>
-          </a:prstGeom>
-          <a:noFill/>
-        </p:spPr>
-        <p:txBody>
-          <a:bodyPr wrap="square">
-            <a:spAutoFit/>
-          </a:bodyPr>
-          <a:lstStyle/>
-          <a:p>
-            <a:pPr algn="l"/>
-            <a:r>
-              <a:rPr sz="2400" b="1" i="0">
-                <a:solidFill>
-                  <a:srgbClr val="1F2C56"/>
-                </a:solidFill>
-                <a:latin typeface="Arial"/>
-              </a:rPr>
-              <a:t>Phase 1: Vorbereitung (15–20 Minuten statt 45–60 Minuten)</a:t>
-            </a:r>
-          </a:p>
-        </p:txBody>
-      </p:sp>
-      <p:sp>
-        <p:nvSpPr>
-          <p:cNvPr id="8" name="TextBox 7"/>
-          <p:cNvSpPr txBox="1"/>
-          <p:nvPr/>
-        </p:nvSpPr>
-        <p:spPr>
-          <a:xfrm>
-            <a:off x="685800" y="1417320"/>
-            <a:ext cx="10817352" cy="4892040"/>
-          </a:xfrm>
-          <a:prstGeom prst="rect">
-            <a:avLst/>
-          </a:prstGeom>
-          <a:noFill/>
-        </p:spPr>
-        <p:txBody>
-          <a:bodyPr wrap="square" anchor="ctr">
-            <a:spAutoFit/>
-          </a:bodyPr>
-          <a:lstStyle/>
-          <a:p>
-            <a:pPr marL="190500" indent="-190500">
-              <a:spcBef>
-                <a:spcPts val="400"/>
-              </a:spcBef>
-              <a:spcAft>
-                <a:spcPts val="200"/>
-              </a:spcAft>
-            </a:pPr>
-            <a:r>
-              <a:rPr sz="1300">
-                <a:solidFill>
-                  <a:srgbClr val="3D5466"/>
-                </a:solidFill>
-                <a:latin typeface="Arial"/>
-              </a:rPr>
-              <a:t>▸  agree-Checkliste Jahresgespräch:</a:t>
-            </a:r>
-          </a:p>
-          <a:p>
-            <a:pPr marL="190500" indent="-190500">
-              <a:spcBef>
-                <a:spcPts val="400"/>
-              </a:spcBef>
-              <a:spcAft>
-                <a:spcPts val="200"/>
-              </a:spcAft>
-            </a:pPr>
-            <a:r>
-              <a:rPr sz="1300">
-                <a:solidFill>
-                  <a:srgbClr val="3D5466"/>
-                </a:solidFill>
-                <a:latin typeface="Arial"/>
-              </a:rPr>
-              <a:t>▸  Ergebnis: Sie gehen mit einem konkreten Bild in das Gespräch – statt im Gespräch zu blättern.</a:t>
-            </a:r>
-          </a:p>
-        </p:txBody>
-      </p:sp>
-      <p:sp>
-        <p:nvSpPr>
-          <p:cNvPr id="9" name="Rectangle 8"/>
+      <p:pic>
+        <p:nvPicPr>
+          <p:cNvPr id="7" name="Picture 6" descr="image.png"/>
+          <p:cNvPicPr>
+            <a:picLocks noChangeAspect="1"/>
+          </p:cNvPicPr>
+          <p:nvPr/>
+        </p:nvPicPr>
+        <p:blipFill>
+          <a:blip r:embed="rId2"/>
+          <a:stretch>
+            <a:fillRect/>
+          </a:stretch>
+        </p:blipFill>
+        <p:spPr>
+          <a:xfrm>
+            <a:off x="2163921" y="1325880"/>
+            <a:ext cx="7861110" cy="4937760"/>
+          </a:xfrm>
+          <a:prstGeom prst="rect">
+            <a:avLst/>
+          </a:prstGeom>
+        </p:spPr>
+      </p:pic>
+      <p:sp>
+        <p:nvSpPr>
+          <p:cNvPr id="8" name="Rectangle 7"/>
           <p:cNvSpPr/>
           <p:nvPr/>
         </p:nvSpPr>
@@ -9882,7 +8778,7 @@
       </p:sp>
       <p:sp>
         <p:nvSpPr>
-          <p:cNvPr id="10" name="TextBox 9"/>
+          <p:cNvPr id="9" name="TextBox 8"/>
           <p:cNvSpPr txBox="1"/>
           <p:nvPr/>
         </p:nvSpPr>
@@ -9911,6 +8807,41 @@
                 <a:latin typeface="Consolas"/>
               </a:rPr>
               <a:t>FKB Campus  ·  M17</a:t>
+            </a:r>
+          </a:p>
+        </p:txBody>
+      </p:sp>
+      <p:sp>
+        <p:nvSpPr>
+          <p:cNvPr id="10" name="TextBox 9"/>
+          <p:cNvSpPr txBox="1"/>
+          <p:nvPr/>
+        </p:nvSpPr>
+        <p:spPr>
+          <a:xfrm>
+            <a:off x="7176211" y="6583680"/>
+            <a:ext cx="4326940" cy="256032"/>
+          </a:xfrm>
+          <a:prstGeom prst="rect">
+            <a:avLst/>
+          </a:prstGeom>
+          <a:noFill/>
+        </p:spPr>
+        <p:txBody>
+          <a:bodyPr wrap="none">
+            <a:spAutoFit/>
+          </a:bodyPr>
+          <a:lstStyle/>
+          <a:p>
+            <a:pPr algn="r"/>
+            <a:r>
+              <a:rPr sz="700">
+                <a:solidFill>
+                  <a:srgbClr val="A0B4D2"/>
+                </a:solidFill>
+                <a:latin typeface="Consolas"/>
+              </a:rPr>
+              <a:t>Schaubild</a:t>
             </a:r>
           </a:p>
         </p:txBody>
@@ -10170,7 +9101,7 @@
                 </a:solidFill>
                 <a:latin typeface="Arial"/>
               </a:rPr>
-              <a:t>Phase 2: Während des Gesprächs</a:t>
+              <a:t>Der Gesprächsworkflow: Vor – Während – Nach</a:t>
             </a:r>
           </a:p>
         </p:txBody>
@@ -10196,6 +9127,25 @@
             <a:spAutoFit/>
           </a:bodyPr>
           <a:lstStyle/>
+          <a:p>
+            <a:pPr marL="177800" indent="-177800">
+              <a:spcBef>
+                <a:spcPts val="600"/>
+              </a:spcBef>
+              <a:spcAft>
+                <a:spcPts val="200"/>
+              </a:spcAft>
+            </a:pPr>
+            <a:r>
+              <a:rPr sz="1200" i="1">
+                <a:solidFill>
+                  <a:srgbClr val="3D5466"/>
+                </a:solidFill>
+                <a:latin typeface="Arial"/>
+              </a:rPr>
+              <a:t>→  Ein guter Workflow halbiert die Systemzeit – 15 statt 45 Minuten Vorbereitung, 10 statt 30 Minuten Nachbereitung.</a:t>
+            </a:r>
+          </a:p>
           <a:p>
             <a:pPr marL="190500" indent="-190500">
               <a:spcBef>
@@ -10212,7 +9162,7 @@
                 </a:solidFill>
                 <a:latin typeface="Arial"/>
               </a:rPr>
-              <a:t>▸  Kein separates Notizheft – direkt in agree</a:t>
+              <a:t>▸  Vorbereitung: Engagement, Anlässe und Vorjahresnotizen in agree bündeln.</a:t>
             </a:r>
           </a:p>
           <a:p>
@@ -10231,7 +9181,7 @@
                 </a:solidFill>
                 <a:latin typeface="Arial"/>
               </a:rPr>
-              <a:t>▸  Vereinbarungen sofort als Aktivität/Aufgabe anlegen (mit Datum und Verantwortlichkeit)</a:t>
+              <a:t>▸  Während des Gesprächs: strukturiert erfassen statt hinterher rekonstruieren.</a:t>
             </a:r>
           </a:p>
           <a:p>
@@ -10250,7 +9200,7 @@
                 </a:solidFill>
                 <a:latin typeface="Arial"/>
               </a:rPr>
-              <a:t>▸  Bedarfe in den dafür vorgesehenen Bedarfsfeldern des UnternehmerDialogs erfassen</a:t>
+              <a:t>▸  Nachbereitung: Vorgangsnotiz und Wiedervorlagen sofort setzen.</a:t>
             </a:r>
           </a:p>
         </p:txBody>
@@ -10588,7 +9538,7 @@
                 </a:solidFill>
                 <a:latin typeface="Arial"/>
               </a:rPr>
-              <a:t>Phase 3: Nachbereitung (10 Minuten statt 30 Minuten)</a:t>
+              <a:t>UnternehmerDialog: mehr als ein Formular</a:t>
             </a:r>
           </a:p>
         </p:txBody>
@@ -10614,6 +9564,25 @@
             <a:spAutoFit/>
           </a:bodyPr>
           <a:lstStyle/>
+          <a:p>
+            <a:pPr marL="177800" indent="-177800">
+              <a:spcBef>
+                <a:spcPts val="600"/>
+              </a:spcBef>
+              <a:spcAft>
+                <a:spcPts val="200"/>
+              </a:spcAft>
+            </a:pPr>
+            <a:r>
+              <a:rPr sz="1200" i="1">
+                <a:solidFill>
+                  <a:srgbClr val="3D5466"/>
+                </a:solidFill>
+                <a:latin typeface="Arial"/>
+              </a:rPr>
+              <a:t>→  Der UnternehmerDialog ist ein Bedarfsradar – richtig genutzt, öffnet er Gesprächsanlässe statt Häkchen zu verwalten.</a:t>
+            </a:r>
+          </a:p>
           <a:p>
             <a:pPr marL="190500" indent="-190500">
               <a:spcBef>
@@ -10630,7 +9599,26 @@
                 </a:solidFill>
                 <a:latin typeface="Arial"/>
               </a:rPr>
-              <a:t>▸  ## 4.3 UnternehmerDialog: Mehr als ein Formular</a:t>
+              <a:t>▸  Die Bedarfsdimensionen strukturieren das Gespräch entlang des Kundenbedarfs.</a:t>
+            </a:r>
+          </a:p>
+          <a:p>
+            <a:pPr marL="190500" indent="-190500">
+              <a:spcBef>
+                <a:spcPts val="400"/>
+              </a:spcBef>
+              <a:spcAft>
+                <a:spcPts val="200"/>
+              </a:spcAft>
+            </a:pPr>
+            <a:r>
+              <a:rPr sz="1300">
+                <a:solidFill>
+                  <a:srgbClr val="3D5466"/>
+                </a:solidFill>
+                <a:latin typeface="Arial"/>
+              </a:rPr>
+              <a:t>▸  Dokumentationsstandards sichern Revisionssicherheit und Vertretbarkeit.</a:t>
             </a:r>
           </a:p>
         </p:txBody>
